--- a/slaydlar/M11.pptx
+++ b/slaydlar/M11.pptx
@@ -20,6 +20,7 @@
     <p:sldId id="268" r:id="rId20"/>
     <p:sldId id="269" r:id="rId21"/>
     <p:sldId id="270" r:id="rId22"/>
+    <p:sldId id="271" r:id="rId23"/>
   </p:sldIdLst>
   <p:sldSz cx="12192000" cy="6858000" type="screen4x3"/>
   <p:notesSz cx="6858000" cy="9144000"/>
@@ -686,19 +687,25 @@
           <a:lstStyle/>
           <a:p>
             <a:r>
-              <a:t>RAG (Lewis va boshq., 2020) tizimi ikki bosqichda ishlaydi. Tayyorgarlik (indekslash): hujjatlar bo'laklarga (chunk, odatda 200–1000 token, qisman ustma-ust) bo'linadi, har bo'lak embedding modeli orqali zich vektorga (384–1024 o'lcham) aylantiriladi va vektor indeksga yoziladi. So'rov vaqtida: foydalanuvchi savoli xuddi shu model bilan vektorga aylantiriladi, indeksdan eng yaqin k bo'lak (odatda kosinus o'xshashligi bo'yicha) topiladi, ular promptga kontekst sifatida qo'shiladi va LLM javob yaratadi. Afzalliklari: modelni qayta o'qitmasdan bilimni yangilash, javobni manbaga bog'lash (iqtibos), hallutsinatsiyani kamaytirish, maxfiy hujjatlarni model og'irliklariga kiritmaslik. Sifat zanjirning eng zaif bo'g'ini bilan belgilanadi: yomon bo'laklash yoki mos kelmaydigan embedding modeli har qanday LLM'ni foydasiz qiladi.</a:t>
+              <a:t>O'qitish narxi oddiy formula bilan baholanadi: C ≈ 6 · P · D FLOP, bu yerda D — o'qitish tokenlari soni. Chinchilla tadqiqoti (Hoffmann va boshq., 2022) berilgan hisoblash byudjetida optimal nisbat D ≈ 20 · P ekanini ko'rsatdi, biroq inferens narxini hisobga olgan zamonaviy modellar ancha ko'proq tokenda o'qitiladi (Llama 3 8B — 15 trillion, ya'ni D ≈ 1900 · P). Misol: 70 milliard parametrli modelni 15 trillion tokenda o'qitish 6 · 7·10¹⁰ · 1,5·10¹³ ≈ 6,3·10²⁴ FLOP. H100'ning BF16 cho'qqisi 989 TFLOPS, real MFU 40 foiz → ≈ 400 TFLOPS → 1,6·10¹⁰ GPU-sekund ≈ 4,4 million GPU-soat; 4096 GPU'da ≈ 45 kun. Meta'ning Llama 3 70B uchun e'lon qilgan ≈ 6,4 million GPU-soati shu tartibda (pastroq MFU va nosozliklar bilan). O'qitishda xotira talabi parametr boshiga ≈ 16 bayt (BF16 og'irlik 2 + BF16 gradient 2 + FP32 asosiy nusxa 4 + Adam momentlari 8) plus faollashuvlar: 70B uchun faqat holatlar 1,1 TB — bu bitta GPU'ga sig'maydi, shuning uchun ZeRO/FSDP (holatlarni GPU'lar o'rtasida bo'lish), tensor parallelizm (qatlam ichida), konveyer parallelizmi (qatlamlar bo'yicha) va ma'lumot parallelizmi birgalikda — «3D parallelizm» — ishlatiladi.</a:t>
             </a:r>
           </a:p>
           <a:p/>
           <a:p>
             <a:r>
-              <a:t>Vektor qidiruvning markaziy masalasi — N ta d-o'lchamli vektor orasidan so'rovga eng yaqin k tasini tez topish. To'liq qidiruv (Flat, brute force) O(N · d) — 1 million × 768 o'lcham uchun GPU'da bir necha millisekund, lekin 100 million uchun sekin va 300 GB xotira. Taxminiy eng yaqin qo'shni (approximate nearest neighbor, ANN) indekslari aniqlikning bir qismini tezlik va xotiraga almashtiradi. IVF (inverted file): vektorlar k-means bilan n_list klasterga bo'linadi, so'rov vaqtida faqat n_probe eng yaqin klaster tekshiriladi — tezlik 10–100 marta, recall n_probe bilan sozlanadi. HNSW (hierarchical navigable small world): ko'p qatlamli graf, qidiruv yuqori qatlamdan pastga «yo'l topib» tushadi — eng yuqori recall/tezlik nisbati, lekin xotira hajmi katta (vektor + graf qirralari) va qurish sekin. PQ (product quantization): vektor m sub-vektorga bo'linib, har biri 256 ta kod bilan kvantlanadi — 768 o'lchamli FP32 vektor (3 KB) 96 baytga siqiladi, xotira 32 marta kamayadi, recall biroz tushadi. Amaliyotda kombinatsiyalar ishlatiladi: IVF4096,PQ64 yuz millionlab vektor uchun, HNSW32 o'n millionlargacha.</a:t>
+              <a:t>Inferens ikki fazadan iborat. Prefill — promptning barcha tokenlarini bir vaqtda qayta ishlash: n_prompt tokenli prompt uchun 2 · P · n_prompt FLOP, katta matritsalar, compute-bound; u birinchi tokengacha vaqtni (TTFT) belgilaydi. Decode — har qadamda bitta token generatsiya: 2P FLOP, lekin barcha og'irliklar (2P bayt FP16'da) va KV-kesh o'qiladi, memory-bound; u tokenlar orasidagi vaqtni belgilaydi. Shuning uchun bitta ketma-ketlik uchun maksimal tezlik ≈ B_HBM / (model hajmi): 8B FP16 model (16 GB) A100 80 GB'da (2039 GB/s) ≈ 127 token/s nazariy chegara, amalda 80–100. Throughput'ni oshirishning yagona yo'li — ko'p ketma-ketlikni bir vaqtda dekodlash (partiyalash): og'irliklar bir marta o'qiladi, 32 token hisoblanadi; intensivlik 32 marta oshadi.</a:t>
             </a:r>
           </a:p>
           <a:p/>
           <a:p>
             <a:r>
-              <a:t>Vektor baza (vector database) — indeks ustiga metama'lumot filtrlash, CRUD, persistentlik, replikatsiya va API qo'shadigan tizim. FAISS (Meta) — kutubxona, baza emas: eng tez va moslashuvchan, GPU qo'llab-quvvatlaydi, lekin saqlash va filtrlashni o'zingiz yozasiz. Chroma — yengil, Python'ga joylashtiriladigan, prototiplar uchun qulay (ichida HNSW). Milvus, Qdrant, Weaviate — taqsimlangan, ishlab chiqarish darajasidagi serverlar; pgvector — PostgreSQL kengaytmasi, mavjud relyatsion ma'lumot bilan birga saqlash uchun. Tanlov mezonlari: vektorlar soni (10⁶ — har qanday, 10⁹ — faqat taqsimlangan), filtrlash murakkabligi, yangilanish chastotasi, mavjud infratuzilma. Sifatni oshirish usullari: gibrid qidiruv (zich vektor + BM25 kalit so'z, natijalar RRF bilan birlashtiriladi), qayta saralash (cross-encoder reranker, masalan bge-reranker, top-50 ni top-5 ga qisqartiradi, aniqlikni sezilarli oshiradi, lekin har juftlik uchun model chaqiruvi), so'rovni qayta yozish, ierarxik bo'laklash.</a:t>
+              <a:t>KV-kesh — dekodlashda har qadamda oldingi tokenlarning K va V vektorlarini qayta hisoblamaslik uchun saqlanadigan xotira. Token boshiga hajmi: 2 · L · n_kv_heads · d_head · bayt. Llama 2 7B (MHA, 32 bosh): 2 · 32 · 32 · 128 · 2 = 512 KB/token; Llama 3.1 8B (GQA, 8 bosh): 2 · 32 · 8 · 128 · 2 = 128 KB/token; Llama 3.1 70B: 2 · 80 · 8 · 128 · 2 = 320 KB/token. 8 000 tokenli kontekst 8B model uchun 1 GB, 70B uchun 2,5 GB — bitta foydalanuvchi uchun. 80 GB GPU'da 8B model (16 GB) qolgan 60 GB'ga ≈ 60 ta 8K-kontekstli ketma-ketlik sig'dira oladi. Muammo shundaki, an'anaviy tizimlar har ketma-ketlik uchun maksimal uzunlikka xotira oldindan ajratadi va 60–80 foizi isrof bo'ladi. vLLM tizimidagi PagedAttention (Kwon va boshq., 2023) operatsion tizim virtual xotirasi g'oyasini oladi: KV-kesh belgilangan hajmli «sahifa»larga (masalan, 16 token) bo'linadi, ketma-ketlik o'sgan sari sahifalar kerak bo'lganda ajratiladi, bir xil prefiksli so'rovlar sahifalarni bo'lishadi. Natija — xotira isrofi 4 foizdan kam, throughput 2–4 marta yuqori.</a:t>
+            </a:r>
+          </a:p>
+          <a:p/>
+          <a:p>
+            <a:r>
+              <a:t>Ikkinchi asosiy optimallashtirish — uzluksiz partiyalash (continuous batching, Orca tizimidan): partiya butun so'rovlar darajasida emas, iteratsiya darajasida tuziladi; bitta ketma-ketlik tugashi bilan uning o'rnini navbatdagi so'rov egallaydi, GPU hech qachon qisqa so'rovlar tugashini kutmaydi. Uchinchisi — spekulyativ dekodlash (speculative decoding): kichik «qoralama» model bir necha tokenni tez taklif qiladi, katta model ularni bitta prefill-ga o'xshash qadamda parallel tekshiradi; decode memory-bound bo'lgani uchun 4 tokenni tekshirish 1 tokenni hisoblash bilan deyarli bir xil vaqt oladi, natijada 2–3 marta tezlashish, chiqish taqsimoti esa aynan saqlanadi. To'rtinchisi — kvantlash: og'irliklarni INT8/INT4 (GPTQ, AWQ) yoki FP8'ga o'tkazish xotirani va shu bilan decode vaqtini 2–4 marta kamaytiradi; KV-keshni FP8'ga kvantlash sig'imni ikki marta oshiradi. Beshinchisi — prefiks keshlash: tizim prompti yoki umumiy hujjat prefiksining KV-keshi so'rovlar o'rtasida saqlanadi, TTFT keskin tushadi.</a:t>
             </a:r>
           </a:p>
         </p:txBody>
@@ -768,13 +775,19 @@
           <a:lstStyle/>
           <a:p>
             <a:r>
-              <a:t>Agent — LLM'ni qaror qabul qiluvchi «miya» sifatida ishlatuvchi, vositalar (tools) bilan muhit bilan o'zaro ta'sir qiluvchi va ko'p qadamli vazifalarni bajaruvchi tizim. ReAct naqshi (reasoning + acting) asosiy sikl: model fikrlaydi, vosita chaqiruvini tuziladigan formatda (JSON) chiqaradi, tizim vositani bajaradi (qidiruv, kod, SQL, API), natija promptga qaytariladi, sikl takrorlanadi. Zamonaviy modellar vosita chaqirishga maxsus o'qitilgan (function calling); Model Context Protocol (MCP) kabi standartlar vositalarni tavsiflash va ulashni birxillashtiradi. Agent xotirasi qisqa muddatli (kontekst oynasi) va uzoq muddatli (vektor baza — RAG agentning xotirasi bo'ladi) qismlardan iborat.</a:t>
+              <a:t>RAG (Lewis va boshq., 2020) tizimi ikki bosqichda ishlaydi. Tayyorgarlik (indekslash): hujjatlar bo'laklarga (chunk, odatda 200–1000 token, qisman ustma-ust) bo'linadi, har bo'lak embedding modeli orqali zich vektorga (384–1024 o'lcham) aylantiriladi va vektor indeksga yoziladi. So'rov vaqtida: foydalanuvchi savoli xuddi shu model bilan vektorga aylantiriladi, indeksdan eng yaqin k bo'lak (odatda kosinus o'xshashligi bo'yicha) topiladi, ular promptga kontekst sifatida qo'shiladi va LLM javob yaratadi. Afzalliklari: modelni qayta o'qitmasdan bilimni yangilash, javobni manbaga bog'lash (iqtibos), hallutsinatsiyani kamaytirish, maxfiy hujjatlarni model og'irliklariga kiritmaslik. Sifat zanjirning eng zaif bo'g'ini bilan belgilanadi: yomon bo'laklash yoki mos kelmaydigan embedding modeli har qanday LLM'ni foydasiz qiladi.</a:t>
             </a:r>
           </a:p>
           <a:p/>
           <a:p>
             <a:r>
-              <a:t>Infratuzilma nuqtai nazaridan agentlar uch yangi talab qo'yadi. Birinchidan, kechikish zanjiri: bitta foydalanuvchi vazifasi 5–20 ta LLM chaqiruvi va vosita bajarilishidan iborat, umumiy vaqt o'nlab soniya; shuning uchun har chaqiruvning TTFT va prefiks keshlash hal qiluvchi, oqimli (streaming) javob va parallel vosita chaqiruvi zarur. Ikkinchidan, xavfsizlik: agent haqiqiy amallar bajaradi (fayl o'chirish, pul o'tkazish, xat yuborish), bilvosita prompt injection (M9) orqali uni aldash mumkin — vositalarga eng kam imtiyoz, sandbox (konteyner) ichida kod bajarish, qaytarib bo'lmaydigan amallar uchun inson tasdig'i majburiy. Uchinchidan, kuzatuv (observability): har qadam — prompt, javob, vosita kirish-chiqishi, token sarfi, kechikish — izlanadi (tracing, masalan OpenTelemetry asosida), aks holda nosozlikni topib bo'lmaydi va narxni nazorat qilib bo'lmaydi. Ko'p agentli tizimlarda (bir agent rejalashtiradi, boshqalar bajaradi) bu talablar ko'payadi va orkestratsiya qatlami (navbatlar, holat mashinasi, qayta urinish) kerak bo'ladi.</a:t>
+              <a:t>Vektor qidiruvning markaziy masalasi — N ta d-o'lchamli vektor orasidan so'rovga eng yaqin k tasini tez topish. To'liq qidiruv (Flat, brute force) O(N · d) — 1 million × 768 o'lcham uchun GPU'da bir necha millisekund, lekin 100 million uchun sekin va 300 GB xotira. Taxminiy eng yaqin qo'shni (approximate nearest neighbor, ANN) indekslari aniqlikning bir qismini tezlik va xotiraga almashtiradi. IVF (inverted file): vektorlar k-means bilan n_list klasterga bo'linadi, so'rov vaqtida faqat n_probe eng yaqin klaster tekshiriladi — tezlik 10–100 marta, recall n_probe bilan sozlanadi. HNSW (hierarchical navigable small world): ko'p qatlamli graf, qidiruv yuqori qatlamdan pastga «yo'l topib» tushadi — eng yuqori recall/tezlik nisbati, lekin xotira hajmi katta (vektor + graf qirralari) va qurish sekin. PQ (product quantization): vektor m sub-vektorga bo'linib, har biri 256 ta kod bilan kvantlanadi — 768 o'lchamli FP32 vektor (3 KB) 96 baytga siqiladi, xotira 32 marta kamayadi, recall biroz tushadi. Amaliyotda kombinatsiyalar ishlatiladi: IVF4096,PQ64 yuz millionlab vektor uchun, HNSW32 o'n millionlargacha.</a:t>
+            </a:r>
+          </a:p>
+          <a:p/>
+          <a:p>
+            <a:r>
+              <a:t>Vektor baza (vector database) — indeks ustiga metama'lumot filtrlash, CRUD, persistentlik, replikatsiya va API qo'shadigan tizim. FAISS (Meta) — kutubxona, baza emas: eng tez va moslashuvchan, GPU qo'llab-quvvatlaydi, lekin saqlash va filtrlashni o'zingiz yozasiz. Chroma — yengil, Python'ga joylashtiriladigan, prototiplar uchun qulay (ichida HNSW). Milvus, Qdrant, Weaviate — taqsimlangan, ishlab chiqarish darajasidagi serverlar; pgvector — PostgreSQL kengaytmasi, mavjud relyatsion ma'lumot bilan birga saqlash uchun. Tanlov mezonlari: vektorlar soni (10⁶ — har qanday, 10⁹ — faqat taqsimlangan), filtrlash murakkabligi, yangilanish chastotasi, mavjud infratuzilma. Sifatni oshirish usullari: gibrid qidiruv (zich vektor + BM25 kalit so'z, natijalar RRF bilan birlashtiriladi), qayta saralash (cross-encoder reranker, masalan bge-reranker, top-50 ni top-5 ga qisqartiradi, aniqlikni sezilarli oshiradi, lekin har juftlik uchun model chaqiruvi), so'rovni qayta yozish, ierarxik bo'laklash.</a:t>
             </a:r>
           </a:p>
         </p:txBody>
@@ -800,6 +813,82 @@
 </file>
 
 <file path=ppt/notesSlides/notesSlide5.xml><?xml version="1.0" encoding="utf-8"?>
+<p:notes xmlns:a="http://schemas.openxmlformats.org/drawingml/2006/main" xmlns:p="http://schemas.openxmlformats.org/presentationml/2006/main" xmlns:r="http://schemas.openxmlformats.org/officeDocument/2006/relationships">
+  <p:cSld>
+    <p:spTree>
+      <p:nvGrpSpPr>
+        <p:cNvPr id="1" name=""/>
+        <p:cNvGrpSpPr/>
+        <p:nvPr/>
+      </p:nvGrpSpPr>
+      <p:grpSpPr>
+        <a:xfrm>
+          <a:off x="0" y="0"/>
+          <a:ext cx="0" cy="0"/>
+          <a:chOff x="0" y="0"/>
+          <a:chExt cx="0" cy="0"/>
+        </a:xfrm>
+      </p:grpSpPr>
+      <p:sp>
+        <p:nvSpPr>
+          <p:cNvPr id="2" name="Slide Image Placeholder 1"/>
+          <p:cNvSpPr>
+            <a:spLocks noGrp="1"/>
+          </p:cNvSpPr>
+          <p:nvPr>
+            <p:ph type="sldImg" idx="2"/>
+          </p:nvPr>
+        </p:nvSpPr>
+        <p:spPr/>
+      </p:sp>
+      <p:sp>
+        <p:nvSpPr>
+          <p:cNvPr id="3" name="Notes Placeholder 2"/>
+          <p:cNvSpPr>
+            <a:spLocks noGrp="1"/>
+          </p:cNvSpPr>
+          <p:nvPr>
+            <p:ph type="body" idx="3" sz="quarter"/>
+          </p:nvPr>
+        </p:nvSpPr>
+        <p:spPr/>
+        <p:txBody>
+          <a:bodyPr/>
+          <a:lstStyle/>
+          <a:p>
+            <a:r>
+              <a:t>Agent — LLM'ni qaror qabul qiluvchi «miya» sifatida ishlatuvchi, vositalar (tools) bilan muhit bilan o'zaro ta'sir qiluvchi va ko'p qadamli vazifalarni bajaruvchi tizim. ReAct naqshi (reasoning + acting) asosiy sikl: model fikrlaydi, vosita chaqiruvini tuziladigan formatda (JSON) chiqaradi, tizim vositani bajaradi (qidiruv, kod, SQL, API), natija promptga qaytariladi, sikl takrorlanadi. Zamonaviy modellar vosita chaqirishga maxsus o'qitilgan (function calling); Model Context Protocol (MCP) kabi standartlar vositalarni tavsiflash va ulashni birxillashtiradi. Agent xotirasi qisqa muddatli (kontekst oynasi) va uzoq muddatli (vektor baza — RAG agentning xotirasi bo'ladi) qismlardan iborat.</a:t>
+            </a:r>
+          </a:p>
+          <a:p/>
+          <a:p>
+            <a:r>
+              <a:t>Infratuzilma nuqtai nazaridan agentlar uch yangi talab qo'yadi. Birinchidan, kechikish zanjiri: bitta foydalanuvchi vazifasi 5–20 ta LLM chaqiruvi va vosita bajarilishidan iborat, umumiy vaqt o'nlab soniya; shuning uchun har chaqiruvning TTFT va prefiks keshlash hal qiluvchi, oqimli (streaming) javob va parallel vosita chaqiruvi zarur. Ikkinchidan, xavfsizlik: agent haqiqiy amallar bajaradi (fayl o'chirish, pul o'tkazish, xat yuborish), bilvosita prompt injection (M9) orqali uni aldash mumkin — vositalarga eng kam imtiyoz, sandbox (konteyner) ichida kod bajarish, qaytarib bo'lmaydigan amallar uchun inson tasdig'i majburiy. Uchinchidan, kuzatuv (observability): har qadam — prompt, javob, vosita kirish-chiqishi, token sarfi, kechikish — izlanadi (tracing, masalan OpenTelemetry asosida), aks holda nosozlikni topib bo'lmaydi va narxni nazorat qilib bo'lmaydi. Ko'p agentli tizimlarda (bir agent rejalashtiradi, boshqalar bajaradi) bu talablar ko'payadi va orkestratsiya qatlami (navbatlar, holat mashinasi, qayta urinish) kerak bo'ladi.</a:t>
+            </a:r>
+          </a:p>
+        </p:txBody>
+      </p:sp>
+      <p:sp>
+        <p:nvSpPr>
+          <p:cNvPr id="4" name="Slide Number Placeholder 3"/>
+          <p:cNvSpPr>
+            <a:spLocks noGrp="1"/>
+          </p:cNvSpPr>
+          <p:nvPr>
+            <p:ph type="sldNum" idx="5" sz="quarter"/>
+          </p:nvPr>
+        </p:nvSpPr>
+        <p:spPr/>
+      </p:sp>
+    </p:spTree>
+  </p:cSld>
+  <p:clrMapOvr>
+    <a:masterClrMapping/>
+  </p:clrMapOvr>
+</p:notes>
+</file>
+
+<file path=ppt/notesSlides/notesSlide6.xml><?xml version="1.0" encoding="utf-8"?>
 <p:notes xmlns:a="http://schemas.openxmlformats.org/drawingml/2006/main" xmlns:p="http://schemas.openxmlformats.org/presentationml/2006/main" xmlns:r="http://schemas.openxmlformats.org/officeDocument/2006/relationships">
   <p:cSld>
     <p:spTree>
@@ -5640,6 +5729,2111 @@
                 <a:latin typeface="Calibri"/>
               </a:rPr>
               <a:t>10</a:t>
+            </a:r>
+          </a:p>
+        </p:txBody>
+      </p:sp>
+      <p:sp>
+        <p:nvSpPr>
+          <p:cNvPr id="10" name="Rounded Rectangle 9"/>
+          <p:cNvSpPr/>
+          <p:nvPr/>
+        </p:nvSpPr>
+        <p:spPr>
+          <a:xfrm>
+            <a:off x="550000" y="1409780"/>
+            <a:ext cx="11100000" cy="1503480"/>
+          </a:xfrm>
+          <a:prstGeom prst="roundRect">
+            <a:avLst>
+              <a:gd name="adj" fmla="val 8000"/>
+            </a:avLst>
+          </a:prstGeom>
+          <a:solidFill>
+            <a:srgbClr val="F5F8FC"/>
+          </a:solidFill>
+          <a:ln>
+            <a:noFill/>
+          </a:ln>
+          <a:effectLst/>
+        </p:spPr>
+        <p:style>
+          <a:lnRef idx="1">
+            <a:schemeClr val="accent1"/>
+          </a:lnRef>
+          <a:fillRef idx="3">
+            <a:schemeClr val="accent1"/>
+          </a:fillRef>
+          <a:effectRef idx="2">
+            <a:schemeClr val="accent1"/>
+          </a:effectRef>
+          <a:fontRef idx="minor">
+            <a:schemeClr val="lt1"/>
+          </a:fontRef>
+        </p:style>
+        <p:txBody>
+          <a:bodyPr rtlCol="0" anchor="ctr"/>
+          <a:lstStyle/>
+          <a:p>
+            <a:pPr algn="ctr"/>
+          </a:p>
+        </p:txBody>
+      </p:sp>
+      <p:sp>
+        <p:nvSpPr>
+          <p:cNvPr id="11" name="Rectangle 10"/>
+          <p:cNvSpPr/>
+          <p:nvPr/>
+        </p:nvSpPr>
+        <p:spPr>
+          <a:xfrm>
+            <a:off x="550000" y="1409780"/>
+            <a:ext cx="70000" cy="1503480"/>
+          </a:xfrm>
+          <a:prstGeom prst="rect">
+            <a:avLst/>
+          </a:prstGeom>
+          <a:solidFill>
+            <a:srgbClr val="2D5C8F"/>
+          </a:solidFill>
+          <a:ln>
+            <a:noFill/>
+          </a:ln>
+          <a:effectLst/>
+        </p:spPr>
+        <p:style>
+          <a:lnRef idx="1">
+            <a:schemeClr val="accent1"/>
+          </a:lnRef>
+          <a:fillRef idx="3">
+            <a:schemeClr val="accent1"/>
+          </a:fillRef>
+          <a:effectRef idx="2">
+            <a:schemeClr val="accent1"/>
+          </a:effectRef>
+          <a:fontRef idx="minor">
+            <a:schemeClr val="lt1"/>
+          </a:fontRef>
+        </p:style>
+        <p:txBody>
+          <a:bodyPr rtlCol="0" anchor="ctr"/>
+          <a:lstStyle/>
+          <a:p>
+            <a:pPr algn="ctr"/>
+          </a:p>
+        </p:txBody>
+      </p:sp>
+      <p:sp>
+        <p:nvSpPr>
+          <p:cNvPr id="12" name="Oval 11"/>
+          <p:cNvSpPr/>
+          <p:nvPr/>
+        </p:nvSpPr>
+        <p:spPr>
+          <a:xfrm>
+            <a:off x="780000" y="1951520"/>
+            <a:ext cx="420000" cy="420000"/>
+          </a:xfrm>
+          <a:prstGeom prst="ellipse">
+            <a:avLst/>
+          </a:prstGeom>
+          <a:solidFill>
+            <a:srgbClr val="2D5C8F"/>
+          </a:solidFill>
+          <a:ln>
+            <a:noFill/>
+          </a:ln>
+          <a:effectLst/>
+        </p:spPr>
+        <p:style>
+          <a:lnRef idx="1">
+            <a:schemeClr val="accent1"/>
+          </a:lnRef>
+          <a:fillRef idx="3">
+            <a:schemeClr val="accent1"/>
+          </a:fillRef>
+          <a:effectRef idx="2">
+            <a:schemeClr val="accent1"/>
+          </a:effectRef>
+          <a:fontRef idx="minor">
+            <a:schemeClr val="lt1"/>
+          </a:fontRef>
+        </p:style>
+        <p:txBody>
+          <a:bodyPr rtlCol="0" anchor="ctr" lIns="0" rIns="0"/>
+          <a:lstStyle/>
+          <a:p>
+            <a:pPr algn="ctr"/>
+            <a:r>
+              <a:rPr sz="1400" b="1">
+                <a:solidFill>
+                  <a:srgbClr val="FFFFFF"/>
+                </a:solidFill>
+                <a:latin typeface="Calibri"/>
+              </a:rPr>
+              <a:t>1</a:t>
+            </a:r>
+          </a:p>
+        </p:txBody>
+      </p:sp>
+      <p:sp>
+        <p:nvSpPr>
+          <p:cNvPr id="13" name="TextBox 12"/>
+          <p:cNvSpPr txBox="1"/>
+          <p:nvPr/>
+        </p:nvSpPr>
+        <p:spPr>
+          <a:xfrm>
+            <a:off x="1380000" y="1449780"/>
+            <a:ext cx="10150000" cy="1423480"/>
+          </a:xfrm>
+          <a:prstGeom prst="rect">
+            <a:avLst/>
+          </a:prstGeom>
+          <a:noFill/>
+        </p:spPr>
+        <p:txBody>
+          <a:bodyPr wrap="square" anchor="ctr">
+            <a:spAutoFit/>
+          </a:bodyPr>
+          <a:lstStyle/>
+          <a:p>
+            <a:r>
+              <a:rPr sz="1500" b="1">
+                <a:solidFill>
+                  <a:srgbClr val="1F3A5F"/>
+                </a:solidFill>
+                <a:latin typeface="Calibri"/>
+              </a:rPr>
+              <a:t>RAG (Lewis va boshq., 2020) tizimi ikki bosqichda ishlaydi.</a:t>
+            </a:r>
+          </a:p>
+          <a:p>
+            <a:pPr>
+              <a:spcBef>
+                <a:spcPts val="400"/>
+              </a:spcBef>
+            </a:pPr>
+            <a:r>
+              <a:rPr sz="1400">
+                <a:solidFill>
+                  <a:srgbClr val="334055"/>
+                </a:solidFill>
+                <a:latin typeface="Calibri"/>
+              </a:rPr>
+              <a:t>Tayyorgarlik (indekslash): hujjatlar bo'laklarga (chunk, odatda 200–1000 token, qisman ustma-ust) bo'linadi, har bo'lak embedding modeli orqali zich vektorga (384–1024 o'lcham) aylantiriladi va vektor indeksga yoziladi.</a:t>
+            </a:r>
+          </a:p>
+        </p:txBody>
+      </p:sp>
+      <p:sp>
+        <p:nvSpPr>
+          <p:cNvPr id="14" name="Rounded Rectangle 13"/>
+          <p:cNvSpPr/>
+          <p:nvPr/>
+        </p:nvSpPr>
+        <p:spPr>
+          <a:xfrm>
+            <a:off x="550000" y="3023260"/>
+            <a:ext cx="11100000" cy="1503480"/>
+          </a:xfrm>
+          <a:prstGeom prst="roundRect">
+            <a:avLst>
+              <a:gd name="adj" fmla="val 8000"/>
+            </a:avLst>
+          </a:prstGeom>
+          <a:solidFill>
+            <a:srgbClr val="F5F8FC"/>
+          </a:solidFill>
+          <a:ln>
+            <a:noFill/>
+          </a:ln>
+          <a:effectLst/>
+        </p:spPr>
+        <p:style>
+          <a:lnRef idx="1">
+            <a:schemeClr val="accent1"/>
+          </a:lnRef>
+          <a:fillRef idx="3">
+            <a:schemeClr val="accent1"/>
+          </a:fillRef>
+          <a:effectRef idx="2">
+            <a:schemeClr val="accent1"/>
+          </a:effectRef>
+          <a:fontRef idx="minor">
+            <a:schemeClr val="lt1"/>
+          </a:fontRef>
+        </p:style>
+        <p:txBody>
+          <a:bodyPr rtlCol="0" anchor="ctr"/>
+          <a:lstStyle/>
+          <a:p>
+            <a:pPr algn="ctr"/>
+          </a:p>
+        </p:txBody>
+      </p:sp>
+      <p:sp>
+        <p:nvSpPr>
+          <p:cNvPr id="15" name="Rectangle 14"/>
+          <p:cNvSpPr/>
+          <p:nvPr/>
+        </p:nvSpPr>
+        <p:spPr>
+          <a:xfrm>
+            <a:off x="550000" y="3023260"/>
+            <a:ext cx="70000" cy="1503480"/>
+          </a:xfrm>
+          <a:prstGeom prst="rect">
+            <a:avLst/>
+          </a:prstGeom>
+          <a:solidFill>
+            <a:srgbClr val="0F8B8D"/>
+          </a:solidFill>
+          <a:ln>
+            <a:noFill/>
+          </a:ln>
+          <a:effectLst/>
+        </p:spPr>
+        <p:style>
+          <a:lnRef idx="1">
+            <a:schemeClr val="accent1"/>
+          </a:lnRef>
+          <a:fillRef idx="3">
+            <a:schemeClr val="accent1"/>
+          </a:fillRef>
+          <a:effectRef idx="2">
+            <a:schemeClr val="accent1"/>
+          </a:effectRef>
+          <a:fontRef idx="minor">
+            <a:schemeClr val="lt1"/>
+          </a:fontRef>
+        </p:style>
+        <p:txBody>
+          <a:bodyPr rtlCol="0" anchor="ctr"/>
+          <a:lstStyle/>
+          <a:p>
+            <a:pPr algn="ctr"/>
+          </a:p>
+        </p:txBody>
+      </p:sp>
+      <p:sp>
+        <p:nvSpPr>
+          <p:cNvPr id="16" name="Oval 15"/>
+          <p:cNvSpPr/>
+          <p:nvPr/>
+        </p:nvSpPr>
+        <p:spPr>
+          <a:xfrm>
+            <a:off x="780000" y="3565000"/>
+            <a:ext cx="420000" cy="420000"/>
+          </a:xfrm>
+          <a:prstGeom prst="ellipse">
+            <a:avLst/>
+          </a:prstGeom>
+          <a:solidFill>
+            <a:srgbClr val="0F8B8D"/>
+          </a:solidFill>
+          <a:ln>
+            <a:noFill/>
+          </a:ln>
+          <a:effectLst/>
+        </p:spPr>
+        <p:style>
+          <a:lnRef idx="1">
+            <a:schemeClr val="accent1"/>
+          </a:lnRef>
+          <a:fillRef idx="3">
+            <a:schemeClr val="accent1"/>
+          </a:fillRef>
+          <a:effectRef idx="2">
+            <a:schemeClr val="accent1"/>
+          </a:effectRef>
+          <a:fontRef idx="minor">
+            <a:schemeClr val="lt1"/>
+          </a:fontRef>
+        </p:style>
+        <p:txBody>
+          <a:bodyPr rtlCol="0" anchor="ctr" lIns="0" rIns="0"/>
+          <a:lstStyle/>
+          <a:p>
+            <a:pPr algn="ctr"/>
+            <a:r>
+              <a:rPr sz="1400" b="1">
+                <a:solidFill>
+                  <a:srgbClr val="FFFFFF"/>
+                </a:solidFill>
+                <a:latin typeface="Calibri"/>
+              </a:rPr>
+              <a:t>2</a:t>
+            </a:r>
+          </a:p>
+        </p:txBody>
+      </p:sp>
+      <p:sp>
+        <p:nvSpPr>
+          <p:cNvPr id="17" name="TextBox 16"/>
+          <p:cNvSpPr txBox="1"/>
+          <p:nvPr/>
+        </p:nvSpPr>
+        <p:spPr>
+          <a:xfrm>
+            <a:off x="1380000" y="3063260"/>
+            <a:ext cx="10150000" cy="1423480"/>
+          </a:xfrm>
+          <a:prstGeom prst="rect">
+            <a:avLst/>
+          </a:prstGeom>
+          <a:noFill/>
+        </p:spPr>
+        <p:txBody>
+          <a:bodyPr wrap="square" anchor="ctr">
+            <a:spAutoFit/>
+          </a:bodyPr>
+          <a:lstStyle/>
+          <a:p>
+            <a:r>
+              <a:rPr sz="1500" b="1">
+                <a:solidFill>
+                  <a:srgbClr val="1F3A5F"/>
+                </a:solidFill>
+                <a:latin typeface="Calibri"/>
+              </a:rPr>
+              <a:t>Vektor qidiruvning markaziy masalasi — N ta d-o'lchamli vektor orasidan so'rovga eng yaqin k tasini tez topish.</a:t>
+            </a:r>
+          </a:p>
+          <a:p>
+            <a:pPr>
+              <a:spcBef>
+                <a:spcPts val="400"/>
+              </a:spcBef>
+            </a:pPr>
+            <a:r>
+              <a:rPr sz="1400">
+                <a:solidFill>
+                  <a:srgbClr val="334055"/>
+                </a:solidFill>
+                <a:latin typeface="Calibri"/>
+              </a:rPr>
+              <a:t>To'liq qidiruv (Flat, brute force) O(N · d) — 1 million × 768 o'lcham uchun GPU'da bir necha millisekund, lekin 100 million uchun sekin va 300 GB xotira. Taxminiy eng yaqin qo'shni (approximate nearest neighbor, ANN) indekslari aniqlikning bir qismini tezlik va xotiraga almashtiradi.</a:t>
+            </a:r>
+          </a:p>
+        </p:txBody>
+      </p:sp>
+      <p:sp>
+        <p:nvSpPr>
+          <p:cNvPr id="18" name="Rounded Rectangle 17"/>
+          <p:cNvSpPr/>
+          <p:nvPr/>
+        </p:nvSpPr>
+        <p:spPr>
+          <a:xfrm>
+            <a:off x="550000" y="4636740"/>
+            <a:ext cx="11100000" cy="1503480"/>
+          </a:xfrm>
+          <a:prstGeom prst="roundRect">
+            <a:avLst>
+              <a:gd name="adj" fmla="val 8000"/>
+            </a:avLst>
+          </a:prstGeom>
+          <a:solidFill>
+            <a:srgbClr val="F5F8FC"/>
+          </a:solidFill>
+          <a:ln>
+            <a:noFill/>
+          </a:ln>
+          <a:effectLst/>
+        </p:spPr>
+        <p:style>
+          <a:lnRef idx="1">
+            <a:schemeClr val="accent1"/>
+          </a:lnRef>
+          <a:fillRef idx="3">
+            <a:schemeClr val="accent1"/>
+          </a:fillRef>
+          <a:effectRef idx="2">
+            <a:schemeClr val="accent1"/>
+          </a:effectRef>
+          <a:fontRef idx="minor">
+            <a:schemeClr val="lt1"/>
+          </a:fontRef>
+        </p:style>
+        <p:txBody>
+          <a:bodyPr rtlCol="0" anchor="ctr"/>
+          <a:lstStyle/>
+          <a:p>
+            <a:pPr algn="ctr"/>
+          </a:p>
+        </p:txBody>
+      </p:sp>
+      <p:sp>
+        <p:nvSpPr>
+          <p:cNvPr id="19" name="Rectangle 18"/>
+          <p:cNvSpPr/>
+          <p:nvPr/>
+        </p:nvSpPr>
+        <p:spPr>
+          <a:xfrm>
+            <a:off x="550000" y="4636740"/>
+            <a:ext cx="70000" cy="1503480"/>
+          </a:xfrm>
+          <a:prstGeom prst="rect">
+            <a:avLst/>
+          </a:prstGeom>
+          <a:solidFill>
+            <a:srgbClr val="6A3FB5"/>
+          </a:solidFill>
+          <a:ln>
+            <a:noFill/>
+          </a:ln>
+          <a:effectLst/>
+        </p:spPr>
+        <p:style>
+          <a:lnRef idx="1">
+            <a:schemeClr val="accent1"/>
+          </a:lnRef>
+          <a:fillRef idx="3">
+            <a:schemeClr val="accent1"/>
+          </a:fillRef>
+          <a:effectRef idx="2">
+            <a:schemeClr val="accent1"/>
+          </a:effectRef>
+          <a:fontRef idx="minor">
+            <a:schemeClr val="lt1"/>
+          </a:fontRef>
+        </p:style>
+        <p:txBody>
+          <a:bodyPr rtlCol="0" anchor="ctr"/>
+          <a:lstStyle/>
+          <a:p>
+            <a:pPr algn="ctr"/>
+          </a:p>
+        </p:txBody>
+      </p:sp>
+      <p:sp>
+        <p:nvSpPr>
+          <p:cNvPr id="20" name="Oval 19"/>
+          <p:cNvSpPr/>
+          <p:nvPr/>
+        </p:nvSpPr>
+        <p:spPr>
+          <a:xfrm>
+            <a:off x="780000" y="5178480"/>
+            <a:ext cx="420000" cy="420000"/>
+          </a:xfrm>
+          <a:prstGeom prst="ellipse">
+            <a:avLst/>
+          </a:prstGeom>
+          <a:solidFill>
+            <a:srgbClr val="6A3FB5"/>
+          </a:solidFill>
+          <a:ln>
+            <a:noFill/>
+          </a:ln>
+          <a:effectLst/>
+        </p:spPr>
+        <p:style>
+          <a:lnRef idx="1">
+            <a:schemeClr val="accent1"/>
+          </a:lnRef>
+          <a:fillRef idx="3">
+            <a:schemeClr val="accent1"/>
+          </a:fillRef>
+          <a:effectRef idx="2">
+            <a:schemeClr val="accent1"/>
+          </a:effectRef>
+          <a:fontRef idx="minor">
+            <a:schemeClr val="lt1"/>
+          </a:fontRef>
+        </p:style>
+        <p:txBody>
+          <a:bodyPr rtlCol="0" anchor="ctr" lIns="0" rIns="0"/>
+          <a:lstStyle/>
+          <a:p>
+            <a:pPr algn="ctr"/>
+            <a:r>
+              <a:rPr sz="1400" b="1">
+                <a:solidFill>
+                  <a:srgbClr val="FFFFFF"/>
+                </a:solidFill>
+                <a:latin typeface="Calibri"/>
+              </a:rPr>
+              <a:t>3</a:t>
+            </a:r>
+          </a:p>
+        </p:txBody>
+      </p:sp>
+      <p:sp>
+        <p:nvSpPr>
+          <p:cNvPr id="21" name="TextBox 20"/>
+          <p:cNvSpPr txBox="1"/>
+          <p:nvPr/>
+        </p:nvSpPr>
+        <p:spPr>
+          <a:xfrm>
+            <a:off x="1380000" y="4676740"/>
+            <a:ext cx="10150000" cy="1423480"/>
+          </a:xfrm>
+          <a:prstGeom prst="rect">
+            <a:avLst/>
+          </a:prstGeom>
+          <a:noFill/>
+        </p:spPr>
+        <p:txBody>
+          <a:bodyPr wrap="square" anchor="ctr">
+            <a:spAutoFit/>
+          </a:bodyPr>
+          <a:lstStyle/>
+          <a:p>
+            <a:r>
+              <a:rPr sz="1500" b="1">
+                <a:solidFill>
+                  <a:srgbClr val="1F3A5F"/>
+                </a:solidFill>
+                <a:latin typeface="Calibri"/>
+              </a:rPr>
+              <a:t>Vektor baza (vector database) — indeks ustiga metama'lumot filtrlash, CRUD, persistentlik, replikatsiya va API qo'shadigan tizim.</a:t>
+            </a:r>
+          </a:p>
+          <a:p>
+            <a:pPr>
+              <a:spcBef>
+                <a:spcPts val="400"/>
+              </a:spcBef>
+            </a:pPr>
+            <a:r>
+              <a:rPr sz="1400">
+                <a:solidFill>
+                  <a:srgbClr val="334055"/>
+                </a:solidFill>
+                <a:latin typeface="Calibri"/>
+              </a:rPr>
+              <a:t>FAISS (Meta) — kutubxona, baza emas: eng tez va moslashuvchan, GPU qo'llab-quvvatlaydi, lekin saqlash va filtrlashni o'zingiz yozasiz. Chroma — yengil, Python'ga joylashtiriladigan, prototiplar uchun qulay (ichida HNSW).</a:t>
+            </a:r>
+          </a:p>
+        </p:txBody>
+      </p:sp>
+    </p:spTree>
+  </p:cSld>
+  <p:clrMapOvr>
+    <a:masterClrMapping/>
+  </p:clrMapOvr>
+  <p:transition spd="med">
+    <p:fade/>
+  </p:transition>
+  <p:timing>
+    <p:tnLst>
+      <p:par>
+        <p:cTn id="1" dur="indefinite" restart="never" nodeType="tmRoot">
+          <p:childTnLst>
+            <p:seq concurrent="1" nextAc="seek">
+              <p:cTn id="2" dur="indefinite" nodeType="mainSeq">
+                <p:childTnLst>
+                  <p:par>
+                    <p:cTn id="79" fill="hold">
+                      <p:stCondLst>
+                        <p:cond delay="indefinite"/>
+                        <p:cond evt="onBegin" delay="0">
+                          <p:tn val="2"/>
+                        </p:cond>
+                      </p:stCondLst>
+                      <p:childTnLst>
+                        <p:par>
+                          <p:cTn id="3" fill="hold">
+                            <p:stCondLst>
+                              <p:cond delay="0"/>
+                            </p:stCondLst>
+                            <p:childTnLst>
+                              <p:par>
+                                <p:cTn id="4" presetID="10" presetClass="entr" presetSubtype="0" fill="hold" grpId="0" nodeType="withEffect">
+                                  <p:stCondLst>
+                                    <p:cond delay="0"/>
+                                  </p:stCondLst>
+                                  <p:childTnLst>
+                                    <p:set>
+                                      <p:cBhvr>
+                                        <p:cTn id="5" dur="1" fill="hold">
+                                          <p:stCondLst>
+                                            <p:cond delay="0"/>
+                                          </p:stCondLst>
+                                        </p:cTn>
+                                        <p:tgtEl>
+                                          <p:spTgt spid="6"/>
+                                        </p:tgtEl>
+                                        <p:attrNameLst>
+                                          <p:attrName>style.visibility</p:attrName>
+                                        </p:attrNameLst>
+                                      </p:cBhvr>
+                                      <p:to>
+                                        <p:strVal val="visible"/>
+                                      </p:to>
+                                    </p:set>
+                                    <p:animEffect transition="in" filter="fade">
+                                      <p:cBhvr>
+                                        <p:cTn id="6" dur="550"/>
+                                        <p:tgtEl>
+                                          <p:spTgt spid="6"/>
+                                        </p:tgtEl>
+                                      </p:cBhvr>
+                                    </p:animEffect>
+                                  </p:childTnLst>
+                                </p:cTn>
+                              </p:par>
+                            </p:childTnLst>
+                          </p:cTn>
+                        </p:par>
+                        <p:par>
+                          <p:cTn id="7" fill="hold">
+                            <p:stCondLst>
+                              <p:cond delay="220"/>
+                            </p:stCondLst>
+                            <p:childTnLst>
+                              <p:par>
+                                <p:cTn id="8" presetID="42" presetClass="entr" presetSubtype="0" fill="hold" grpId="0" nodeType="afterEffect">
+                                  <p:stCondLst>
+                                    <p:cond delay="0"/>
+                                  </p:stCondLst>
+                                  <p:childTnLst>
+                                    <p:set>
+                                      <p:cBhvr>
+                                        <p:cTn id="9" dur="1" fill="hold">
+                                          <p:stCondLst>
+                                            <p:cond delay="0"/>
+                                          </p:stCondLst>
+                                        </p:cTn>
+                                        <p:tgtEl>
+                                          <p:spTgt spid="10"/>
+                                        </p:tgtEl>
+                                        <p:attrNameLst>
+                                          <p:attrName>style.visibility</p:attrName>
+                                        </p:attrNameLst>
+                                      </p:cBhvr>
+                                      <p:to>
+                                        <p:strVal val="visible"/>
+                                      </p:to>
+                                    </p:set>
+                                    <p:animEffect transition="in" filter="fade">
+                                      <p:cBhvr>
+                                        <p:cTn id="10" dur="550"/>
+                                        <p:tgtEl>
+                                          <p:spTgt spid="10"/>
+                                        </p:tgtEl>
+                                      </p:cBhvr>
+                                    </p:animEffect>
+                                    <p:anim calcmode="lin" valueType="num">
+                                      <p:cBhvr additive="base">
+                                        <p:cTn id="11" dur="550" fill="hold"/>
+                                        <p:tgtEl>
+                                          <p:spTgt spid="10"/>
+                                        </p:tgtEl>
+                                        <p:attrNameLst>
+                                          <p:attrName>ppt_x</p:attrName>
+                                        </p:attrNameLst>
+                                      </p:cBhvr>
+                                      <p:tavLst>
+                                        <p:tav tm="0">
+                                          <p:val>
+                                            <p:strVal val="#ppt_x"/>
+                                          </p:val>
+                                        </p:tav>
+                                        <p:tav tm="100000">
+                                          <p:val>
+                                            <p:strVal val="#ppt_x"/>
+                                          </p:val>
+                                        </p:tav>
+                                      </p:tavLst>
+                                    </p:anim>
+                                    <p:anim calcmode="lin" valueType="num">
+                                      <p:cBhvr additive="base">
+                                        <p:cTn id="12" dur="550" fill="hold"/>
+                                        <p:tgtEl>
+                                          <p:spTgt spid="10"/>
+                                        </p:tgtEl>
+                                        <p:attrNameLst>
+                                          <p:attrName>ppt_y</p:attrName>
+                                        </p:attrNameLst>
+                                      </p:cBhvr>
+                                      <p:tavLst>
+                                        <p:tav tm="0">
+                                          <p:val>
+                                            <p:strVal val="#ppt_y+.08"/>
+                                          </p:val>
+                                        </p:tav>
+                                        <p:tav tm="100000">
+                                          <p:val>
+                                            <p:strVal val="#ppt_y"/>
+                                          </p:val>
+                                        </p:tav>
+                                      </p:tavLst>
+                                    </p:anim>
+                                  </p:childTnLst>
+                                </p:cTn>
+                              </p:par>
+                            </p:childTnLst>
+                          </p:cTn>
+                        </p:par>
+                        <p:par>
+                          <p:cTn id="13" fill="hold">
+                            <p:stCondLst>
+                              <p:cond delay="220"/>
+                            </p:stCondLst>
+                            <p:childTnLst>
+                              <p:par>
+                                <p:cTn id="14" presetID="42" presetClass="entr" presetSubtype="0" fill="hold" grpId="0" nodeType="afterEffect">
+                                  <p:stCondLst>
+                                    <p:cond delay="0"/>
+                                  </p:stCondLst>
+                                  <p:childTnLst>
+                                    <p:set>
+                                      <p:cBhvr>
+                                        <p:cTn id="15" dur="1" fill="hold">
+                                          <p:stCondLst>
+                                            <p:cond delay="0"/>
+                                          </p:stCondLst>
+                                        </p:cTn>
+                                        <p:tgtEl>
+                                          <p:spTgt spid="11"/>
+                                        </p:tgtEl>
+                                        <p:attrNameLst>
+                                          <p:attrName>style.visibility</p:attrName>
+                                        </p:attrNameLst>
+                                      </p:cBhvr>
+                                      <p:to>
+                                        <p:strVal val="visible"/>
+                                      </p:to>
+                                    </p:set>
+                                    <p:animEffect transition="in" filter="fade">
+                                      <p:cBhvr>
+                                        <p:cTn id="16" dur="550"/>
+                                        <p:tgtEl>
+                                          <p:spTgt spid="11"/>
+                                        </p:tgtEl>
+                                      </p:cBhvr>
+                                    </p:animEffect>
+                                    <p:anim calcmode="lin" valueType="num">
+                                      <p:cBhvr additive="base">
+                                        <p:cTn id="17" dur="550" fill="hold"/>
+                                        <p:tgtEl>
+                                          <p:spTgt spid="11"/>
+                                        </p:tgtEl>
+                                        <p:attrNameLst>
+                                          <p:attrName>ppt_x</p:attrName>
+                                        </p:attrNameLst>
+                                      </p:cBhvr>
+                                      <p:tavLst>
+                                        <p:tav tm="0">
+                                          <p:val>
+                                            <p:strVal val="#ppt_x"/>
+                                          </p:val>
+                                        </p:tav>
+                                        <p:tav tm="100000">
+                                          <p:val>
+                                            <p:strVal val="#ppt_x"/>
+                                          </p:val>
+                                        </p:tav>
+                                      </p:tavLst>
+                                    </p:anim>
+                                    <p:anim calcmode="lin" valueType="num">
+                                      <p:cBhvr additive="base">
+                                        <p:cTn id="18" dur="550" fill="hold"/>
+                                        <p:tgtEl>
+                                          <p:spTgt spid="11"/>
+                                        </p:tgtEl>
+                                        <p:attrNameLst>
+                                          <p:attrName>ppt_y</p:attrName>
+                                        </p:attrNameLst>
+                                      </p:cBhvr>
+                                      <p:tavLst>
+                                        <p:tav tm="0">
+                                          <p:val>
+                                            <p:strVal val="#ppt_y+.08"/>
+                                          </p:val>
+                                        </p:tav>
+                                        <p:tav tm="100000">
+                                          <p:val>
+                                            <p:strVal val="#ppt_y"/>
+                                          </p:val>
+                                        </p:tav>
+                                      </p:tavLst>
+                                    </p:anim>
+                                  </p:childTnLst>
+                                </p:cTn>
+                              </p:par>
+                            </p:childTnLst>
+                          </p:cTn>
+                        </p:par>
+                        <p:par>
+                          <p:cTn id="19" fill="hold">
+                            <p:stCondLst>
+                              <p:cond delay="220"/>
+                            </p:stCondLst>
+                            <p:childTnLst>
+                              <p:par>
+                                <p:cTn id="20" presetID="53" presetClass="entr" presetSubtype="16" fill="hold" grpId="0" nodeType="afterEffect">
+                                  <p:stCondLst>
+                                    <p:cond delay="0"/>
+                                  </p:stCondLst>
+                                  <p:childTnLst>
+                                    <p:set>
+                                      <p:cBhvr>
+                                        <p:cTn id="21" dur="1" fill="hold">
+                                          <p:stCondLst>
+                                            <p:cond delay="0"/>
+                                          </p:stCondLst>
+                                        </p:cTn>
+                                        <p:tgtEl>
+                                          <p:spTgt spid="12"/>
+                                        </p:tgtEl>
+                                        <p:attrNameLst>
+                                          <p:attrName>style.visibility</p:attrName>
+                                        </p:attrNameLst>
+                                      </p:cBhvr>
+                                      <p:to>
+                                        <p:strVal val="visible"/>
+                                      </p:to>
+                                    </p:set>
+                                    <p:animEffect transition="in" filter="fade">
+                                      <p:cBhvr>
+                                        <p:cTn id="22" dur="550"/>
+                                        <p:tgtEl>
+                                          <p:spTgt spid="12"/>
+                                        </p:tgtEl>
+                                      </p:cBhvr>
+                                    </p:animEffect>
+                                    <p:anim calcmode="lin" valueType="num">
+                                      <p:cBhvr additive="base">
+                                        <p:cTn id="23" dur="550" fill="hold"/>
+                                        <p:tgtEl>
+                                          <p:spTgt spid="12"/>
+                                        </p:tgtEl>
+                                        <p:attrNameLst>
+                                          <p:attrName>ppt_w</p:attrName>
+                                        </p:attrNameLst>
+                                      </p:cBhvr>
+                                      <p:tavLst>
+                                        <p:tav tm="0">
+                                          <p:val>
+                                            <p:strVal val="0"/>
+                                          </p:val>
+                                        </p:tav>
+                                        <p:tav tm="100000">
+                                          <p:val>
+                                            <p:strVal val="#ppt_w"/>
+                                          </p:val>
+                                        </p:tav>
+                                      </p:tavLst>
+                                    </p:anim>
+                                    <p:anim calcmode="lin" valueType="num">
+                                      <p:cBhvr additive="base">
+                                        <p:cTn id="24" dur="550" fill="hold"/>
+                                        <p:tgtEl>
+                                          <p:spTgt spid="12"/>
+                                        </p:tgtEl>
+                                        <p:attrNameLst>
+                                          <p:attrName>ppt_h</p:attrName>
+                                        </p:attrNameLst>
+                                      </p:cBhvr>
+                                      <p:tavLst>
+                                        <p:tav tm="0">
+                                          <p:val>
+                                            <p:strVal val="0"/>
+                                          </p:val>
+                                        </p:tav>
+                                        <p:tav tm="100000">
+                                          <p:val>
+                                            <p:strVal val="#ppt_h"/>
+                                          </p:val>
+                                        </p:tav>
+                                      </p:tavLst>
+                                    </p:anim>
+                                  </p:childTnLst>
+                                </p:cTn>
+                              </p:par>
+                            </p:childTnLst>
+                          </p:cTn>
+                        </p:par>
+                        <p:par>
+                          <p:cTn id="25" fill="hold">
+                            <p:stCondLst>
+                              <p:cond delay="220"/>
+                            </p:stCondLst>
+                            <p:childTnLst>
+                              <p:par>
+                                <p:cTn id="26" presetID="42" presetClass="entr" presetSubtype="0" fill="hold" grpId="0" nodeType="afterEffect">
+                                  <p:stCondLst>
+                                    <p:cond delay="0"/>
+                                  </p:stCondLst>
+                                  <p:childTnLst>
+                                    <p:set>
+                                      <p:cBhvr>
+                                        <p:cTn id="27" dur="1" fill="hold">
+                                          <p:stCondLst>
+                                            <p:cond delay="0"/>
+                                          </p:stCondLst>
+                                        </p:cTn>
+                                        <p:tgtEl>
+                                          <p:spTgt spid="13"/>
+                                        </p:tgtEl>
+                                        <p:attrNameLst>
+                                          <p:attrName>style.visibility</p:attrName>
+                                        </p:attrNameLst>
+                                      </p:cBhvr>
+                                      <p:to>
+                                        <p:strVal val="visible"/>
+                                      </p:to>
+                                    </p:set>
+                                    <p:animEffect transition="in" filter="fade">
+                                      <p:cBhvr>
+                                        <p:cTn id="28" dur="550"/>
+                                        <p:tgtEl>
+                                          <p:spTgt spid="13"/>
+                                        </p:tgtEl>
+                                      </p:cBhvr>
+                                    </p:animEffect>
+                                    <p:anim calcmode="lin" valueType="num">
+                                      <p:cBhvr additive="base">
+                                        <p:cTn id="29" dur="550" fill="hold"/>
+                                        <p:tgtEl>
+                                          <p:spTgt spid="13"/>
+                                        </p:tgtEl>
+                                        <p:attrNameLst>
+                                          <p:attrName>ppt_x</p:attrName>
+                                        </p:attrNameLst>
+                                      </p:cBhvr>
+                                      <p:tavLst>
+                                        <p:tav tm="0">
+                                          <p:val>
+                                            <p:strVal val="#ppt_x"/>
+                                          </p:val>
+                                        </p:tav>
+                                        <p:tav tm="100000">
+                                          <p:val>
+                                            <p:strVal val="#ppt_x"/>
+                                          </p:val>
+                                        </p:tav>
+                                      </p:tavLst>
+                                    </p:anim>
+                                    <p:anim calcmode="lin" valueType="num">
+                                      <p:cBhvr additive="base">
+                                        <p:cTn id="30" dur="550" fill="hold"/>
+                                        <p:tgtEl>
+                                          <p:spTgt spid="13"/>
+                                        </p:tgtEl>
+                                        <p:attrNameLst>
+                                          <p:attrName>ppt_y</p:attrName>
+                                        </p:attrNameLst>
+                                      </p:cBhvr>
+                                      <p:tavLst>
+                                        <p:tav tm="0">
+                                          <p:val>
+                                            <p:strVal val="#ppt_y+.08"/>
+                                          </p:val>
+                                        </p:tav>
+                                        <p:tav tm="100000">
+                                          <p:val>
+                                            <p:strVal val="#ppt_y"/>
+                                          </p:val>
+                                        </p:tav>
+                                      </p:tavLst>
+                                    </p:anim>
+                                  </p:childTnLst>
+                                </p:cTn>
+                              </p:par>
+                            </p:childTnLst>
+                          </p:cTn>
+                        </p:par>
+                        <p:par>
+                          <p:cTn id="31" fill="hold">
+                            <p:stCondLst>
+                              <p:cond delay="440"/>
+                            </p:stCondLst>
+                            <p:childTnLst>
+                              <p:par>
+                                <p:cTn id="32" presetID="42" presetClass="entr" presetSubtype="0" fill="hold" grpId="0" nodeType="afterEffect">
+                                  <p:stCondLst>
+                                    <p:cond delay="0"/>
+                                  </p:stCondLst>
+                                  <p:childTnLst>
+                                    <p:set>
+                                      <p:cBhvr>
+                                        <p:cTn id="33" dur="1" fill="hold">
+                                          <p:stCondLst>
+                                            <p:cond delay="0"/>
+                                          </p:stCondLst>
+                                        </p:cTn>
+                                        <p:tgtEl>
+                                          <p:spTgt spid="14"/>
+                                        </p:tgtEl>
+                                        <p:attrNameLst>
+                                          <p:attrName>style.visibility</p:attrName>
+                                        </p:attrNameLst>
+                                      </p:cBhvr>
+                                      <p:to>
+                                        <p:strVal val="visible"/>
+                                      </p:to>
+                                    </p:set>
+                                    <p:animEffect transition="in" filter="fade">
+                                      <p:cBhvr>
+                                        <p:cTn id="34" dur="550"/>
+                                        <p:tgtEl>
+                                          <p:spTgt spid="14"/>
+                                        </p:tgtEl>
+                                      </p:cBhvr>
+                                    </p:animEffect>
+                                    <p:anim calcmode="lin" valueType="num">
+                                      <p:cBhvr additive="base">
+                                        <p:cTn id="35" dur="550" fill="hold"/>
+                                        <p:tgtEl>
+                                          <p:spTgt spid="14"/>
+                                        </p:tgtEl>
+                                        <p:attrNameLst>
+                                          <p:attrName>ppt_x</p:attrName>
+                                        </p:attrNameLst>
+                                      </p:cBhvr>
+                                      <p:tavLst>
+                                        <p:tav tm="0">
+                                          <p:val>
+                                            <p:strVal val="#ppt_x"/>
+                                          </p:val>
+                                        </p:tav>
+                                        <p:tav tm="100000">
+                                          <p:val>
+                                            <p:strVal val="#ppt_x"/>
+                                          </p:val>
+                                        </p:tav>
+                                      </p:tavLst>
+                                    </p:anim>
+                                    <p:anim calcmode="lin" valueType="num">
+                                      <p:cBhvr additive="base">
+                                        <p:cTn id="36" dur="550" fill="hold"/>
+                                        <p:tgtEl>
+                                          <p:spTgt spid="14"/>
+                                        </p:tgtEl>
+                                        <p:attrNameLst>
+                                          <p:attrName>ppt_y</p:attrName>
+                                        </p:attrNameLst>
+                                      </p:cBhvr>
+                                      <p:tavLst>
+                                        <p:tav tm="0">
+                                          <p:val>
+                                            <p:strVal val="#ppt_y+.08"/>
+                                          </p:val>
+                                        </p:tav>
+                                        <p:tav tm="100000">
+                                          <p:val>
+                                            <p:strVal val="#ppt_y"/>
+                                          </p:val>
+                                        </p:tav>
+                                      </p:tavLst>
+                                    </p:anim>
+                                  </p:childTnLst>
+                                </p:cTn>
+                              </p:par>
+                            </p:childTnLst>
+                          </p:cTn>
+                        </p:par>
+                        <p:par>
+                          <p:cTn id="37" fill="hold">
+                            <p:stCondLst>
+                              <p:cond delay="440"/>
+                            </p:stCondLst>
+                            <p:childTnLst>
+                              <p:par>
+                                <p:cTn id="38" presetID="42" presetClass="entr" presetSubtype="0" fill="hold" grpId="0" nodeType="afterEffect">
+                                  <p:stCondLst>
+                                    <p:cond delay="0"/>
+                                  </p:stCondLst>
+                                  <p:childTnLst>
+                                    <p:set>
+                                      <p:cBhvr>
+                                        <p:cTn id="39" dur="1" fill="hold">
+                                          <p:stCondLst>
+                                            <p:cond delay="0"/>
+                                          </p:stCondLst>
+                                        </p:cTn>
+                                        <p:tgtEl>
+                                          <p:spTgt spid="15"/>
+                                        </p:tgtEl>
+                                        <p:attrNameLst>
+                                          <p:attrName>style.visibility</p:attrName>
+                                        </p:attrNameLst>
+                                      </p:cBhvr>
+                                      <p:to>
+                                        <p:strVal val="visible"/>
+                                      </p:to>
+                                    </p:set>
+                                    <p:animEffect transition="in" filter="fade">
+                                      <p:cBhvr>
+                                        <p:cTn id="40" dur="550"/>
+                                        <p:tgtEl>
+                                          <p:spTgt spid="15"/>
+                                        </p:tgtEl>
+                                      </p:cBhvr>
+                                    </p:animEffect>
+                                    <p:anim calcmode="lin" valueType="num">
+                                      <p:cBhvr additive="base">
+                                        <p:cTn id="41" dur="550" fill="hold"/>
+                                        <p:tgtEl>
+                                          <p:spTgt spid="15"/>
+                                        </p:tgtEl>
+                                        <p:attrNameLst>
+                                          <p:attrName>ppt_x</p:attrName>
+                                        </p:attrNameLst>
+                                      </p:cBhvr>
+                                      <p:tavLst>
+                                        <p:tav tm="0">
+                                          <p:val>
+                                            <p:strVal val="#ppt_x"/>
+                                          </p:val>
+                                        </p:tav>
+                                        <p:tav tm="100000">
+                                          <p:val>
+                                            <p:strVal val="#ppt_x"/>
+                                          </p:val>
+                                        </p:tav>
+                                      </p:tavLst>
+                                    </p:anim>
+                                    <p:anim calcmode="lin" valueType="num">
+                                      <p:cBhvr additive="base">
+                                        <p:cTn id="42" dur="550" fill="hold"/>
+                                        <p:tgtEl>
+                                          <p:spTgt spid="15"/>
+                                        </p:tgtEl>
+                                        <p:attrNameLst>
+                                          <p:attrName>ppt_y</p:attrName>
+                                        </p:attrNameLst>
+                                      </p:cBhvr>
+                                      <p:tavLst>
+                                        <p:tav tm="0">
+                                          <p:val>
+                                            <p:strVal val="#ppt_y+.08"/>
+                                          </p:val>
+                                        </p:tav>
+                                        <p:tav tm="100000">
+                                          <p:val>
+                                            <p:strVal val="#ppt_y"/>
+                                          </p:val>
+                                        </p:tav>
+                                      </p:tavLst>
+                                    </p:anim>
+                                  </p:childTnLst>
+                                </p:cTn>
+                              </p:par>
+                            </p:childTnLst>
+                          </p:cTn>
+                        </p:par>
+                        <p:par>
+                          <p:cTn id="43" fill="hold">
+                            <p:stCondLst>
+                              <p:cond delay="440"/>
+                            </p:stCondLst>
+                            <p:childTnLst>
+                              <p:par>
+                                <p:cTn id="44" presetID="53" presetClass="entr" presetSubtype="16" fill="hold" grpId="0" nodeType="afterEffect">
+                                  <p:stCondLst>
+                                    <p:cond delay="0"/>
+                                  </p:stCondLst>
+                                  <p:childTnLst>
+                                    <p:set>
+                                      <p:cBhvr>
+                                        <p:cTn id="45" dur="1" fill="hold">
+                                          <p:stCondLst>
+                                            <p:cond delay="0"/>
+                                          </p:stCondLst>
+                                        </p:cTn>
+                                        <p:tgtEl>
+                                          <p:spTgt spid="16"/>
+                                        </p:tgtEl>
+                                        <p:attrNameLst>
+                                          <p:attrName>style.visibility</p:attrName>
+                                        </p:attrNameLst>
+                                      </p:cBhvr>
+                                      <p:to>
+                                        <p:strVal val="visible"/>
+                                      </p:to>
+                                    </p:set>
+                                    <p:animEffect transition="in" filter="fade">
+                                      <p:cBhvr>
+                                        <p:cTn id="46" dur="550"/>
+                                        <p:tgtEl>
+                                          <p:spTgt spid="16"/>
+                                        </p:tgtEl>
+                                      </p:cBhvr>
+                                    </p:animEffect>
+                                    <p:anim calcmode="lin" valueType="num">
+                                      <p:cBhvr additive="base">
+                                        <p:cTn id="47" dur="550" fill="hold"/>
+                                        <p:tgtEl>
+                                          <p:spTgt spid="16"/>
+                                        </p:tgtEl>
+                                        <p:attrNameLst>
+                                          <p:attrName>ppt_w</p:attrName>
+                                        </p:attrNameLst>
+                                      </p:cBhvr>
+                                      <p:tavLst>
+                                        <p:tav tm="0">
+                                          <p:val>
+                                            <p:strVal val="0"/>
+                                          </p:val>
+                                        </p:tav>
+                                        <p:tav tm="100000">
+                                          <p:val>
+                                            <p:strVal val="#ppt_w"/>
+                                          </p:val>
+                                        </p:tav>
+                                      </p:tavLst>
+                                    </p:anim>
+                                    <p:anim calcmode="lin" valueType="num">
+                                      <p:cBhvr additive="base">
+                                        <p:cTn id="48" dur="550" fill="hold"/>
+                                        <p:tgtEl>
+                                          <p:spTgt spid="16"/>
+                                        </p:tgtEl>
+                                        <p:attrNameLst>
+                                          <p:attrName>ppt_h</p:attrName>
+                                        </p:attrNameLst>
+                                      </p:cBhvr>
+                                      <p:tavLst>
+                                        <p:tav tm="0">
+                                          <p:val>
+                                            <p:strVal val="0"/>
+                                          </p:val>
+                                        </p:tav>
+                                        <p:tav tm="100000">
+                                          <p:val>
+                                            <p:strVal val="#ppt_h"/>
+                                          </p:val>
+                                        </p:tav>
+                                      </p:tavLst>
+                                    </p:anim>
+                                  </p:childTnLst>
+                                </p:cTn>
+                              </p:par>
+                            </p:childTnLst>
+                          </p:cTn>
+                        </p:par>
+                        <p:par>
+                          <p:cTn id="49" fill="hold">
+                            <p:stCondLst>
+                              <p:cond delay="440"/>
+                            </p:stCondLst>
+                            <p:childTnLst>
+                              <p:par>
+                                <p:cTn id="50" presetID="42" presetClass="entr" presetSubtype="0" fill="hold" grpId="0" nodeType="afterEffect">
+                                  <p:stCondLst>
+                                    <p:cond delay="0"/>
+                                  </p:stCondLst>
+                                  <p:childTnLst>
+                                    <p:set>
+                                      <p:cBhvr>
+                                        <p:cTn id="51" dur="1" fill="hold">
+                                          <p:stCondLst>
+                                            <p:cond delay="0"/>
+                                          </p:stCondLst>
+                                        </p:cTn>
+                                        <p:tgtEl>
+                                          <p:spTgt spid="17"/>
+                                        </p:tgtEl>
+                                        <p:attrNameLst>
+                                          <p:attrName>style.visibility</p:attrName>
+                                        </p:attrNameLst>
+                                      </p:cBhvr>
+                                      <p:to>
+                                        <p:strVal val="visible"/>
+                                      </p:to>
+                                    </p:set>
+                                    <p:animEffect transition="in" filter="fade">
+                                      <p:cBhvr>
+                                        <p:cTn id="52" dur="550"/>
+                                        <p:tgtEl>
+                                          <p:spTgt spid="17"/>
+                                        </p:tgtEl>
+                                      </p:cBhvr>
+                                    </p:animEffect>
+                                    <p:anim calcmode="lin" valueType="num">
+                                      <p:cBhvr additive="base">
+                                        <p:cTn id="53" dur="550" fill="hold"/>
+                                        <p:tgtEl>
+                                          <p:spTgt spid="17"/>
+                                        </p:tgtEl>
+                                        <p:attrNameLst>
+                                          <p:attrName>ppt_x</p:attrName>
+                                        </p:attrNameLst>
+                                      </p:cBhvr>
+                                      <p:tavLst>
+                                        <p:tav tm="0">
+                                          <p:val>
+                                            <p:strVal val="#ppt_x"/>
+                                          </p:val>
+                                        </p:tav>
+                                        <p:tav tm="100000">
+                                          <p:val>
+                                            <p:strVal val="#ppt_x"/>
+                                          </p:val>
+                                        </p:tav>
+                                      </p:tavLst>
+                                    </p:anim>
+                                    <p:anim calcmode="lin" valueType="num">
+                                      <p:cBhvr additive="base">
+                                        <p:cTn id="54" dur="550" fill="hold"/>
+                                        <p:tgtEl>
+                                          <p:spTgt spid="17"/>
+                                        </p:tgtEl>
+                                        <p:attrNameLst>
+                                          <p:attrName>ppt_y</p:attrName>
+                                        </p:attrNameLst>
+                                      </p:cBhvr>
+                                      <p:tavLst>
+                                        <p:tav tm="0">
+                                          <p:val>
+                                            <p:strVal val="#ppt_y+.08"/>
+                                          </p:val>
+                                        </p:tav>
+                                        <p:tav tm="100000">
+                                          <p:val>
+                                            <p:strVal val="#ppt_y"/>
+                                          </p:val>
+                                        </p:tav>
+                                      </p:tavLst>
+                                    </p:anim>
+                                  </p:childTnLst>
+                                </p:cTn>
+                              </p:par>
+                            </p:childTnLst>
+                          </p:cTn>
+                        </p:par>
+                        <p:par>
+                          <p:cTn id="55" fill="hold">
+                            <p:stCondLst>
+                              <p:cond delay="660"/>
+                            </p:stCondLst>
+                            <p:childTnLst>
+                              <p:par>
+                                <p:cTn id="56" presetID="42" presetClass="entr" presetSubtype="0" fill="hold" grpId="0" nodeType="afterEffect">
+                                  <p:stCondLst>
+                                    <p:cond delay="0"/>
+                                  </p:stCondLst>
+                                  <p:childTnLst>
+                                    <p:set>
+                                      <p:cBhvr>
+                                        <p:cTn id="57" dur="1" fill="hold">
+                                          <p:stCondLst>
+                                            <p:cond delay="0"/>
+                                          </p:stCondLst>
+                                        </p:cTn>
+                                        <p:tgtEl>
+                                          <p:spTgt spid="18"/>
+                                        </p:tgtEl>
+                                        <p:attrNameLst>
+                                          <p:attrName>style.visibility</p:attrName>
+                                        </p:attrNameLst>
+                                      </p:cBhvr>
+                                      <p:to>
+                                        <p:strVal val="visible"/>
+                                      </p:to>
+                                    </p:set>
+                                    <p:animEffect transition="in" filter="fade">
+                                      <p:cBhvr>
+                                        <p:cTn id="58" dur="550"/>
+                                        <p:tgtEl>
+                                          <p:spTgt spid="18"/>
+                                        </p:tgtEl>
+                                      </p:cBhvr>
+                                    </p:animEffect>
+                                    <p:anim calcmode="lin" valueType="num">
+                                      <p:cBhvr additive="base">
+                                        <p:cTn id="59" dur="550" fill="hold"/>
+                                        <p:tgtEl>
+                                          <p:spTgt spid="18"/>
+                                        </p:tgtEl>
+                                        <p:attrNameLst>
+                                          <p:attrName>ppt_x</p:attrName>
+                                        </p:attrNameLst>
+                                      </p:cBhvr>
+                                      <p:tavLst>
+                                        <p:tav tm="0">
+                                          <p:val>
+                                            <p:strVal val="#ppt_x"/>
+                                          </p:val>
+                                        </p:tav>
+                                        <p:tav tm="100000">
+                                          <p:val>
+                                            <p:strVal val="#ppt_x"/>
+                                          </p:val>
+                                        </p:tav>
+                                      </p:tavLst>
+                                    </p:anim>
+                                    <p:anim calcmode="lin" valueType="num">
+                                      <p:cBhvr additive="base">
+                                        <p:cTn id="60" dur="550" fill="hold"/>
+                                        <p:tgtEl>
+                                          <p:spTgt spid="18"/>
+                                        </p:tgtEl>
+                                        <p:attrNameLst>
+                                          <p:attrName>ppt_y</p:attrName>
+                                        </p:attrNameLst>
+                                      </p:cBhvr>
+                                      <p:tavLst>
+                                        <p:tav tm="0">
+                                          <p:val>
+                                            <p:strVal val="#ppt_y+.08"/>
+                                          </p:val>
+                                        </p:tav>
+                                        <p:tav tm="100000">
+                                          <p:val>
+                                            <p:strVal val="#ppt_y"/>
+                                          </p:val>
+                                        </p:tav>
+                                      </p:tavLst>
+                                    </p:anim>
+                                  </p:childTnLst>
+                                </p:cTn>
+                              </p:par>
+                            </p:childTnLst>
+                          </p:cTn>
+                        </p:par>
+                        <p:par>
+                          <p:cTn id="61" fill="hold">
+                            <p:stCondLst>
+                              <p:cond delay="660"/>
+                            </p:stCondLst>
+                            <p:childTnLst>
+                              <p:par>
+                                <p:cTn id="62" presetID="42" presetClass="entr" presetSubtype="0" fill="hold" grpId="0" nodeType="afterEffect">
+                                  <p:stCondLst>
+                                    <p:cond delay="0"/>
+                                  </p:stCondLst>
+                                  <p:childTnLst>
+                                    <p:set>
+                                      <p:cBhvr>
+                                        <p:cTn id="63" dur="1" fill="hold">
+                                          <p:stCondLst>
+                                            <p:cond delay="0"/>
+                                          </p:stCondLst>
+                                        </p:cTn>
+                                        <p:tgtEl>
+                                          <p:spTgt spid="19"/>
+                                        </p:tgtEl>
+                                        <p:attrNameLst>
+                                          <p:attrName>style.visibility</p:attrName>
+                                        </p:attrNameLst>
+                                      </p:cBhvr>
+                                      <p:to>
+                                        <p:strVal val="visible"/>
+                                      </p:to>
+                                    </p:set>
+                                    <p:animEffect transition="in" filter="fade">
+                                      <p:cBhvr>
+                                        <p:cTn id="64" dur="550"/>
+                                        <p:tgtEl>
+                                          <p:spTgt spid="19"/>
+                                        </p:tgtEl>
+                                      </p:cBhvr>
+                                    </p:animEffect>
+                                    <p:anim calcmode="lin" valueType="num">
+                                      <p:cBhvr additive="base">
+                                        <p:cTn id="65" dur="550" fill="hold"/>
+                                        <p:tgtEl>
+                                          <p:spTgt spid="19"/>
+                                        </p:tgtEl>
+                                        <p:attrNameLst>
+                                          <p:attrName>ppt_x</p:attrName>
+                                        </p:attrNameLst>
+                                      </p:cBhvr>
+                                      <p:tavLst>
+                                        <p:tav tm="0">
+                                          <p:val>
+                                            <p:strVal val="#ppt_x"/>
+                                          </p:val>
+                                        </p:tav>
+                                        <p:tav tm="100000">
+                                          <p:val>
+                                            <p:strVal val="#ppt_x"/>
+                                          </p:val>
+                                        </p:tav>
+                                      </p:tavLst>
+                                    </p:anim>
+                                    <p:anim calcmode="lin" valueType="num">
+                                      <p:cBhvr additive="base">
+                                        <p:cTn id="66" dur="550" fill="hold"/>
+                                        <p:tgtEl>
+                                          <p:spTgt spid="19"/>
+                                        </p:tgtEl>
+                                        <p:attrNameLst>
+                                          <p:attrName>ppt_y</p:attrName>
+                                        </p:attrNameLst>
+                                      </p:cBhvr>
+                                      <p:tavLst>
+                                        <p:tav tm="0">
+                                          <p:val>
+                                            <p:strVal val="#ppt_y+.08"/>
+                                          </p:val>
+                                        </p:tav>
+                                        <p:tav tm="100000">
+                                          <p:val>
+                                            <p:strVal val="#ppt_y"/>
+                                          </p:val>
+                                        </p:tav>
+                                      </p:tavLst>
+                                    </p:anim>
+                                  </p:childTnLst>
+                                </p:cTn>
+                              </p:par>
+                            </p:childTnLst>
+                          </p:cTn>
+                        </p:par>
+                        <p:par>
+                          <p:cTn id="67" fill="hold">
+                            <p:stCondLst>
+                              <p:cond delay="660"/>
+                            </p:stCondLst>
+                            <p:childTnLst>
+                              <p:par>
+                                <p:cTn id="68" presetID="53" presetClass="entr" presetSubtype="16" fill="hold" grpId="0" nodeType="afterEffect">
+                                  <p:stCondLst>
+                                    <p:cond delay="0"/>
+                                  </p:stCondLst>
+                                  <p:childTnLst>
+                                    <p:set>
+                                      <p:cBhvr>
+                                        <p:cTn id="69" dur="1" fill="hold">
+                                          <p:stCondLst>
+                                            <p:cond delay="0"/>
+                                          </p:stCondLst>
+                                        </p:cTn>
+                                        <p:tgtEl>
+                                          <p:spTgt spid="20"/>
+                                        </p:tgtEl>
+                                        <p:attrNameLst>
+                                          <p:attrName>style.visibility</p:attrName>
+                                        </p:attrNameLst>
+                                      </p:cBhvr>
+                                      <p:to>
+                                        <p:strVal val="visible"/>
+                                      </p:to>
+                                    </p:set>
+                                    <p:animEffect transition="in" filter="fade">
+                                      <p:cBhvr>
+                                        <p:cTn id="70" dur="550"/>
+                                        <p:tgtEl>
+                                          <p:spTgt spid="20"/>
+                                        </p:tgtEl>
+                                      </p:cBhvr>
+                                    </p:animEffect>
+                                    <p:anim calcmode="lin" valueType="num">
+                                      <p:cBhvr additive="base">
+                                        <p:cTn id="71" dur="550" fill="hold"/>
+                                        <p:tgtEl>
+                                          <p:spTgt spid="20"/>
+                                        </p:tgtEl>
+                                        <p:attrNameLst>
+                                          <p:attrName>ppt_w</p:attrName>
+                                        </p:attrNameLst>
+                                      </p:cBhvr>
+                                      <p:tavLst>
+                                        <p:tav tm="0">
+                                          <p:val>
+                                            <p:strVal val="0"/>
+                                          </p:val>
+                                        </p:tav>
+                                        <p:tav tm="100000">
+                                          <p:val>
+                                            <p:strVal val="#ppt_w"/>
+                                          </p:val>
+                                        </p:tav>
+                                      </p:tavLst>
+                                    </p:anim>
+                                    <p:anim calcmode="lin" valueType="num">
+                                      <p:cBhvr additive="base">
+                                        <p:cTn id="72" dur="550" fill="hold"/>
+                                        <p:tgtEl>
+                                          <p:spTgt spid="20"/>
+                                        </p:tgtEl>
+                                        <p:attrNameLst>
+                                          <p:attrName>ppt_h</p:attrName>
+                                        </p:attrNameLst>
+                                      </p:cBhvr>
+                                      <p:tavLst>
+                                        <p:tav tm="0">
+                                          <p:val>
+                                            <p:strVal val="0"/>
+                                          </p:val>
+                                        </p:tav>
+                                        <p:tav tm="100000">
+                                          <p:val>
+                                            <p:strVal val="#ppt_h"/>
+                                          </p:val>
+                                        </p:tav>
+                                      </p:tavLst>
+                                    </p:anim>
+                                  </p:childTnLst>
+                                </p:cTn>
+                              </p:par>
+                            </p:childTnLst>
+                          </p:cTn>
+                        </p:par>
+                        <p:par>
+                          <p:cTn id="73" fill="hold">
+                            <p:stCondLst>
+                              <p:cond delay="660"/>
+                            </p:stCondLst>
+                            <p:childTnLst>
+                              <p:par>
+                                <p:cTn id="74" presetID="42" presetClass="entr" presetSubtype="0" fill="hold" grpId="0" nodeType="afterEffect">
+                                  <p:stCondLst>
+                                    <p:cond delay="0"/>
+                                  </p:stCondLst>
+                                  <p:childTnLst>
+                                    <p:set>
+                                      <p:cBhvr>
+                                        <p:cTn id="75" dur="1" fill="hold">
+                                          <p:stCondLst>
+                                            <p:cond delay="0"/>
+                                          </p:stCondLst>
+                                        </p:cTn>
+                                        <p:tgtEl>
+                                          <p:spTgt spid="21"/>
+                                        </p:tgtEl>
+                                        <p:attrNameLst>
+                                          <p:attrName>style.visibility</p:attrName>
+                                        </p:attrNameLst>
+                                      </p:cBhvr>
+                                      <p:to>
+                                        <p:strVal val="visible"/>
+                                      </p:to>
+                                    </p:set>
+                                    <p:animEffect transition="in" filter="fade">
+                                      <p:cBhvr>
+                                        <p:cTn id="76" dur="550"/>
+                                        <p:tgtEl>
+                                          <p:spTgt spid="21"/>
+                                        </p:tgtEl>
+                                      </p:cBhvr>
+                                    </p:animEffect>
+                                    <p:anim calcmode="lin" valueType="num">
+                                      <p:cBhvr additive="base">
+                                        <p:cTn id="77" dur="550" fill="hold"/>
+                                        <p:tgtEl>
+                                          <p:spTgt spid="21"/>
+                                        </p:tgtEl>
+                                        <p:attrNameLst>
+                                          <p:attrName>ppt_x</p:attrName>
+                                        </p:attrNameLst>
+                                      </p:cBhvr>
+                                      <p:tavLst>
+                                        <p:tav tm="0">
+                                          <p:val>
+                                            <p:strVal val="#ppt_x"/>
+                                          </p:val>
+                                        </p:tav>
+                                        <p:tav tm="100000">
+                                          <p:val>
+                                            <p:strVal val="#ppt_x"/>
+                                          </p:val>
+                                        </p:tav>
+                                      </p:tavLst>
+                                    </p:anim>
+                                    <p:anim calcmode="lin" valueType="num">
+                                      <p:cBhvr additive="base">
+                                        <p:cTn id="78" dur="550" fill="hold"/>
+                                        <p:tgtEl>
+                                          <p:spTgt spid="21"/>
+                                        </p:tgtEl>
+                                        <p:attrNameLst>
+                                          <p:attrName>ppt_y</p:attrName>
+                                        </p:attrNameLst>
+                                      </p:cBhvr>
+                                      <p:tavLst>
+                                        <p:tav tm="0">
+                                          <p:val>
+                                            <p:strVal val="#ppt_y+.08"/>
+                                          </p:val>
+                                        </p:tav>
+                                        <p:tav tm="100000">
+                                          <p:val>
+                                            <p:strVal val="#ppt_y"/>
+                                          </p:val>
+                                        </p:tav>
+                                      </p:tavLst>
+                                    </p:anim>
+                                  </p:childTnLst>
+                                </p:cTn>
+                              </p:par>
+                            </p:childTnLst>
+                          </p:cTn>
+                        </p:par>
+                      </p:childTnLst>
+                    </p:cTn>
+                  </p:par>
+                </p:childTnLst>
+              </p:cTn>
+              <p:prevCondLst>
+                <p:cond evt="onPrev" delay="0">
+                  <p:tgtEl>
+                    <p:sldTgt/>
+                  </p:tgtEl>
+                </p:cond>
+              </p:prevCondLst>
+              <p:nextCondLst>
+                <p:cond evt="onNext" delay="0">
+                  <p:tgtEl>
+                    <p:sldTgt/>
+                  </p:tgtEl>
+                </p:cond>
+              </p:nextCondLst>
+            </p:seq>
+          </p:childTnLst>
+        </p:cTn>
+      </p:par>
+    </p:tnLst>
+    <p:bldLst>
+      <p:bldP spid="6" grpId="0" animBg="1"/>
+      <p:bldP spid="10" grpId="0" animBg="1"/>
+      <p:bldP spid="11" grpId="0" animBg="1"/>
+      <p:bldP spid="12" grpId="0" animBg="1"/>
+      <p:bldP spid="13" grpId="0" animBg="1"/>
+      <p:bldP spid="14" grpId="0" animBg="1"/>
+      <p:bldP spid="15" grpId="0" animBg="1"/>
+      <p:bldP spid="16" grpId="0" animBg="1"/>
+      <p:bldP spid="17" grpId="0" animBg="1"/>
+      <p:bldP spid="18" grpId="0" animBg="1"/>
+      <p:bldP spid="19" grpId="0" animBg="1"/>
+      <p:bldP spid="20" grpId="0" animBg="1"/>
+      <p:bldP spid="21" grpId="0" animBg="1"/>
+    </p:bldLst>
+  </p:timing>
+</p:sld>
+</file>
+
+<file path=ppt/slides/slide11.xml><?xml version="1.0" encoding="utf-8"?>
+<p:sld xmlns:a="http://schemas.openxmlformats.org/drawingml/2006/main" xmlns:p="http://schemas.openxmlformats.org/presentationml/2006/main" xmlns:r="http://schemas.openxmlformats.org/officeDocument/2006/relationships">
+  <p:cSld>
+    <p:spTree>
+      <p:nvGrpSpPr>
+        <p:cNvPr id="1" name=""/>
+        <p:cNvGrpSpPr/>
+        <p:nvPr/>
+      </p:nvGrpSpPr>
+      <p:grpSpPr/>
+      <p:sp>
+        <p:nvSpPr>
+          <p:cNvPr id="2" name="Rectangle 1"/>
+          <p:cNvSpPr/>
+          <p:nvPr/>
+        </p:nvSpPr>
+        <p:spPr>
+          <a:xfrm>
+            <a:off x="0" y="0"/>
+            <a:ext cx="12192000" cy="1000000"/>
+          </a:xfrm>
+          <a:prstGeom prst="rect">
+            <a:avLst/>
+          </a:prstGeom>
+          <a:gradFill rotWithShape="1">
+            <a:gsLst>
+              <a:gs pos="0">
+                <a:srgbClr val="1F3A5F"/>
+              </a:gs>
+              <a:gs pos="100000">
+                <a:srgbClr val="2D5C8F"/>
+              </a:gs>
+            </a:gsLst>
+            <a:lin scaled="0" ang="0"/>
+          </a:gradFill>
+          <a:ln>
+            <a:noFill/>
+          </a:ln>
+          <a:effectLst/>
+        </p:spPr>
+        <p:style>
+          <a:lnRef idx="1">
+            <a:schemeClr val="accent1"/>
+          </a:lnRef>
+          <a:fillRef idx="3">
+            <a:schemeClr val="accent1"/>
+          </a:fillRef>
+          <a:effectRef idx="2">
+            <a:schemeClr val="accent1"/>
+          </a:effectRef>
+          <a:fontRef idx="minor">
+            <a:schemeClr val="lt1"/>
+          </a:fontRef>
+        </p:style>
+        <p:txBody>
+          <a:bodyPr rtlCol="0" anchor="ctr"/>
+          <a:lstStyle/>
+          <a:p>
+            <a:pPr algn="ctr"/>
+          </a:p>
+        </p:txBody>
+      </p:sp>
+      <p:sp>
+        <p:nvSpPr>
+          <p:cNvPr id="3" name="Oval 2"/>
+          <p:cNvSpPr/>
+          <p:nvPr/>
+        </p:nvSpPr>
+        <p:spPr>
+          <a:xfrm>
+            <a:off x="11050000" y="-350000"/>
+            <a:ext cx="900000" cy="900000"/>
+          </a:xfrm>
+          <a:prstGeom prst="ellipse">
+            <a:avLst/>
+          </a:prstGeom>
+          <a:solidFill>
+            <a:srgbClr val="3B6EA5"/>
+          </a:solidFill>
+          <a:ln>
+            <a:noFill/>
+          </a:ln>
+          <a:effectLst/>
+        </p:spPr>
+        <p:style>
+          <a:lnRef idx="1">
+            <a:schemeClr val="accent1"/>
+          </a:lnRef>
+          <a:fillRef idx="3">
+            <a:schemeClr val="accent1"/>
+          </a:fillRef>
+          <a:effectRef idx="2">
+            <a:schemeClr val="accent1"/>
+          </a:effectRef>
+          <a:fontRef idx="minor">
+            <a:schemeClr val="lt1"/>
+          </a:fontRef>
+        </p:style>
+        <p:txBody>
+          <a:bodyPr rtlCol="0" anchor="ctr"/>
+          <a:lstStyle/>
+          <a:p>
+            <a:pPr algn="ctr"/>
+          </a:p>
+        </p:txBody>
+      </p:sp>
+      <p:sp>
+        <p:nvSpPr>
+          <p:cNvPr id="4" name="Oval 3"/>
+          <p:cNvSpPr/>
+          <p:nvPr/>
+        </p:nvSpPr>
+        <p:spPr>
+          <a:xfrm>
+            <a:off x="11550000" y="450000"/>
+            <a:ext cx="420000" cy="420000"/>
+          </a:xfrm>
+          <a:prstGeom prst="ellipse">
+            <a:avLst/>
+          </a:prstGeom>
+          <a:solidFill>
+            <a:srgbClr val="0F8B8D"/>
+          </a:solidFill>
+          <a:ln>
+            <a:noFill/>
+          </a:ln>
+          <a:effectLst/>
+        </p:spPr>
+        <p:style>
+          <a:lnRef idx="1">
+            <a:schemeClr val="accent1"/>
+          </a:lnRef>
+          <a:fillRef idx="3">
+            <a:schemeClr val="accent1"/>
+          </a:fillRef>
+          <a:effectRef idx="2">
+            <a:schemeClr val="accent1"/>
+          </a:effectRef>
+          <a:fontRef idx="minor">
+            <a:schemeClr val="lt1"/>
+          </a:fontRef>
+        </p:style>
+        <p:txBody>
+          <a:bodyPr rtlCol="0" anchor="ctr"/>
+          <a:lstStyle/>
+          <a:p>
+            <a:pPr algn="ctr"/>
+          </a:p>
+        </p:txBody>
+      </p:sp>
+      <p:sp>
+        <p:nvSpPr>
+          <p:cNvPr id="5" name="TextBox 4"/>
+          <p:cNvSpPr txBox="1"/>
+          <p:nvPr/>
+        </p:nvSpPr>
+        <p:spPr>
+          <a:xfrm>
+            <a:off x="500000" y="110000"/>
+            <a:ext cx="10300000" cy="300000"/>
+          </a:xfrm>
+          <a:prstGeom prst="rect">
+            <a:avLst/>
+          </a:prstGeom>
+          <a:noFill/>
+        </p:spPr>
+        <p:txBody>
+          <a:bodyPr wrap="square" anchor="t" lIns="50800" rIns="50800">
+            <a:spAutoFit/>
+          </a:bodyPr>
+          <a:lstStyle/>
+          <a:p>
+            <a:pPr algn="l"/>
+            <a:r>
+              <a:rPr sz="1200" b="1">
+                <a:solidFill>
+                  <a:srgbClr val="A9C4E6"/>
+                </a:solidFill>
+                <a:latin typeface="Calibri"/>
+              </a:rPr>
+              <a:t>3-REJA</a:t>
+            </a:r>
+          </a:p>
+        </p:txBody>
+      </p:sp>
+      <p:sp>
+        <p:nvSpPr>
+          <p:cNvPr id="6" name="TextBox 5"/>
+          <p:cNvSpPr txBox="1"/>
+          <p:nvPr/>
+        </p:nvSpPr>
+        <p:spPr>
+          <a:xfrm>
+            <a:off x="500000" y="330000"/>
+            <a:ext cx="10400000" cy="650000"/>
+          </a:xfrm>
+          <a:prstGeom prst="rect">
+            <a:avLst/>
+          </a:prstGeom>
+          <a:noFill/>
+        </p:spPr>
+        <p:txBody>
+          <a:bodyPr wrap="square" anchor="ctr" lIns="50800" rIns="50800">
+            <a:spAutoFit/>
+          </a:bodyPr>
+          <a:lstStyle/>
+          <a:p>
+            <a:pPr algn="l"/>
+            <a:r>
+              <a:rPr sz="2600" b="1">
+                <a:solidFill>
+                  <a:srgbClr val="FFFFFF"/>
+                </a:solidFill>
+                <a:latin typeface="Calibri"/>
+              </a:rPr>
+              <a:t>Retrieval-Augmented Generation va vektor bazalar</a:t>
+            </a:r>
+          </a:p>
+        </p:txBody>
+      </p:sp>
+      <p:sp>
+        <p:nvSpPr>
+          <p:cNvPr id="7" name="Rectangle 6"/>
+          <p:cNvSpPr/>
+          <p:nvPr/>
+        </p:nvSpPr>
+        <p:spPr>
+          <a:xfrm>
+            <a:off x="0" y="1000000"/>
+            <a:ext cx="12192000" cy="45000"/>
+          </a:xfrm>
+          <a:prstGeom prst="rect">
+            <a:avLst/>
+          </a:prstGeom>
+          <a:solidFill>
+            <a:srgbClr val="0F8B8D"/>
+          </a:solidFill>
+          <a:ln>
+            <a:noFill/>
+          </a:ln>
+          <a:effectLst/>
+        </p:spPr>
+        <p:style>
+          <a:lnRef idx="1">
+            <a:schemeClr val="accent1"/>
+          </a:lnRef>
+          <a:fillRef idx="3">
+            <a:schemeClr val="accent1"/>
+          </a:fillRef>
+          <a:effectRef idx="2">
+            <a:schemeClr val="accent1"/>
+          </a:effectRef>
+          <a:fontRef idx="minor">
+            <a:schemeClr val="lt1"/>
+          </a:fontRef>
+        </p:style>
+        <p:txBody>
+          <a:bodyPr rtlCol="0" anchor="ctr"/>
+          <a:lstStyle/>
+          <a:p>
+            <a:pPr algn="ctr"/>
+          </a:p>
+        </p:txBody>
+      </p:sp>
+      <p:sp>
+        <p:nvSpPr>
+          <p:cNvPr id="8" name="TextBox 7"/>
+          <p:cNvSpPr txBox="1"/>
+          <p:nvPr/>
+        </p:nvSpPr>
+        <p:spPr>
+          <a:xfrm>
+            <a:off x="500000" y="6420000"/>
+            <a:ext cx="9500000" cy="300000"/>
+          </a:xfrm>
+          <a:prstGeom prst="rect">
+            <a:avLst/>
+          </a:prstGeom>
+          <a:noFill/>
+        </p:spPr>
+        <p:txBody>
+          <a:bodyPr wrap="square" anchor="t" lIns="50800" rIns="50800">
+            <a:spAutoFit/>
+          </a:bodyPr>
+          <a:lstStyle/>
+          <a:p>
+            <a:pPr algn="l"/>
+            <a:r>
+              <a:rPr sz="1000" b="0">
+                <a:solidFill>
+                  <a:srgbClr val="5B6878"/>
+                </a:solidFill>
+                <a:latin typeface="Calibri"/>
+              </a:rPr>
+              <a:t>M11 · Katta til modellari uchun kompyuter tizimlari va hisoblash infratuzilmasi</a:t>
+            </a:r>
+          </a:p>
+        </p:txBody>
+      </p:sp>
+      <p:sp>
+        <p:nvSpPr>
+          <p:cNvPr id="9" name="TextBox 8"/>
+          <p:cNvSpPr txBox="1"/>
+          <p:nvPr/>
+        </p:nvSpPr>
+        <p:spPr>
+          <a:xfrm>
+            <a:off x="10600000" y="6420000"/>
+            <a:ext cx="1100000" cy="300000"/>
+          </a:xfrm>
+          <a:prstGeom prst="rect">
+            <a:avLst/>
+          </a:prstGeom>
+          <a:noFill/>
+        </p:spPr>
+        <p:txBody>
+          <a:bodyPr wrap="square" anchor="t" lIns="50800" rIns="50800">
+            <a:spAutoFit/>
+          </a:bodyPr>
+          <a:lstStyle/>
+          <a:p>
+            <a:pPr algn="r"/>
+            <a:r>
+              <a:rPr sz="1000" b="0">
+                <a:solidFill>
+                  <a:srgbClr val="5B6878"/>
+                </a:solidFill>
+                <a:latin typeface="Calibri"/>
+              </a:rPr>
+              <a:t>11</a:t>
             </a:r>
           </a:p>
         </p:txBody>
@@ -6489,7 +8683,7 @@
 </p:sld>
 </file>
 
-<file path=ppt/slides/slide11.xml><?xml version="1.0" encoding="utf-8"?>
+<file path=ppt/slides/slide12.xml><?xml version="1.0" encoding="utf-8"?>
 <p:sld xmlns:a="http://schemas.openxmlformats.org/drawingml/2006/main" xmlns:p="http://schemas.openxmlformats.org/presentationml/2006/main" xmlns:r="http://schemas.openxmlformats.org/officeDocument/2006/relationships">
   <p:cSld>
     <p:spTree>
@@ -7401,7 +9595,7 @@
 </p:sld>
 </file>
 
-<file path=ppt/slides/slide12.xml><?xml version="1.0" encoding="utf-8"?>
+<file path=ppt/slides/slide13.xml><?xml version="1.0" encoding="utf-8"?>
 <p:sld xmlns:a="http://schemas.openxmlformats.org/drawingml/2006/main" xmlns:p="http://schemas.openxmlformats.org/presentationml/2006/main" xmlns:r="http://schemas.openxmlformats.org/officeDocument/2006/relationships">
   <p:cSld>
     <p:spTree>
@@ -7730,7 +9924,7 @@
                 </a:solidFill>
                 <a:latin typeface="Calibri"/>
               </a:rPr>
-              <a:t>12</a:t>
+              <a:t>13</a:t>
             </a:r>
           </a:p>
         </p:txBody>
@@ -7743,12 +9937,12 @@
         </p:nvSpPr>
         <p:spPr>
           <a:xfrm>
-            <a:off x="550000" y="2076666"/>
-            <a:ext cx="11100000" cy="1250000"/>
+            <a:off x="550000" y="2132700"/>
+            <a:ext cx="11100000" cy="1587300"/>
           </a:xfrm>
           <a:prstGeom prst="roundRect">
             <a:avLst>
-              <a:gd name="adj" fmla="val 18000"/>
+              <a:gd name="adj" fmla="val 8000"/>
             </a:avLst>
           </a:prstGeom>
           <a:solidFill>
@@ -7789,8 +9983,8 @@
         </p:nvSpPr>
         <p:spPr>
           <a:xfrm>
-            <a:off x="550000" y="2076666"/>
-            <a:ext cx="70000" cy="1250000"/>
+            <a:off x="550000" y="2132700"/>
+            <a:ext cx="70000" cy="1587300"/>
           </a:xfrm>
           <a:prstGeom prst="rect">
             <a:avLst/>
@@ -7833,8 +10027,8 @@
         </p:nvSpPr>
         <p:spPr>
           <a:xfrm>
-            <a:off x="800000" y="2471666"/>
-            <a:ext cx="460000" cy="460000"/>
+            <a:off x="780000" y="2716350"/>
+            <a:ext cx="420000" cy="420000"/>
           </a:xfrm>
           <a:prstGeom prst="ellipse">
             <a:avLst/>
@@ -7867,7 +10061,7 @@
           <a:p>
             <a:pPr algn="ctr"/>
             <a:r>
-              <a:rPr sz="1600" b="1">
+              <a:rPr sz="1400" b="1">
                 <a:solidFill>
                   <a:srgbClr val="FFFFFF"/>
                 </a:solidFill>
@@ -7886,8 +10080,8 @@
         </p:nvSpPr>
         <p:spPr>
           <a:xfrm>
-            <a:off x="1450000" y="2076666"/>
-            <a:ext cx="10050000" cy="1250000"/>
+            <a:off x="1380000" y="2172700"/>
+            <a:ext cx="10150000" cy="1507300"/>
           </a:xfrm>
           <a:prstGeom prst="rect">
             <a:avLst/>
@@ -7895,20 +10089,35 @@
           <a:noFill/>
         </p:spPr>
         <p:txBody>
-          <a:bodyPr wrap="square" anchor="ctr" lIns="50800" rIns="50800">
+          <a:bodyPr wrap="square" anchor="ctr">
             <a:spAutoFit/>
           </a:bodyPr>
           <a:lstStyle/>
           <a:p>
-            <a:pPr algn="l"/>
             <a:r>
-              <a:rPr sz="1600" b="0">
+              <a:rPr sz="1600" b="1">
                 <a:solidFill>
-                  <a:srgbClr val="1B2430"/>
+                  <a:srgbClr val="1F3A5F"/>
                 </a:solidFill>
                 <a:latin typeface="Calibri"/>
               </a:rPr>
-              <a:t>Agent — LLM'ni qaror qabul qiluvchi «miya» sifatida ishlatuvchi, vositalar (tools) bilan muhit bilan o'zaro ta'sir qiluvchi va ko'p qadamli vazifalarni bajaruvchi tizim. ReAct naqshi (reasoning + acting) asosiy sikl: model fikrlaydi, vosita chaqiruvini…</a:t>
+              <a:t>Agent — LLM'ni qaror qabul qiluvchi «miya» sifatida ishlatuvchi, vositalar (tools) bilan muhit bilan o'zaro ta'sir qiluvchi va ko'p qadamli vazifalarni bajaruvchi tizim.</a:t>
+            </a:r>
+          </a:p>
+          <a:p>
+            <a:pPr>
+              <a:spcBef>
+                <a:spcPts val="400"/>
+              </a:spcBef>
+            </a:pPr>
+            <a:r>
+              <a:rPr sz="1500">
+                <a:solidFill>
+                  <a:srgbClr val="334055"/>
+                </a:solidFill>
+                <a:latin typeface="Calibri"/>
+              </a:rPr>
+              <a:t>ReAct naqshi (reasoning + acting) asosiy sikl: model fikrlaydi, vosita chaqiruvini tuziladigan formatda (JSON) chiqaradi, tizim vositani bajaradi (qidiruv, kod, SQL, API), natija promptga qaytariladi, sikl takrorlanadi.</a:t>
             </a:r>
           </a:p>
         </p:txBody>
@@ -7921,12 +10130,12 @@
         </p:nvSpPr>
         <p:spPr>
           <a:xfrm>
-            <a:off x="550000" y="3446666"/>
-            <a:ext cx="11100000" cy="1250000"/>
+            <a:off x="550000" y="3830000"/>
+            <a:ext cx="11100000" cy="1587300"/>
           </a:xfrm>
           <a:prstGeom prst="roundRect">
             <a:avLst>
-              <a:gd name="adj" fmla="val 18000"/>
+              <a:gd name="adj" fmla="val 8000"/>
             </a:avLst>
           </a:prstGeom>
           <a:solidFill>
@@ -7967,8 +10176,8 @@
         </p:nvSpPr>
         <p:spPr>
           <a:xfrm>
-            <a:off x="550000" y="3446666"/>
-            <a:ext cx="70000" cy="1250000"/>
+            <a:off x="550000" y="3830000"/>
+            <a:ext cx="70000" cy="1587300"/>
           </a:xfrm>
           <a:prstGeom prst="rect">
             <a:avLst/>
@@ -8011,8 +10220,8 @@
         </p:nvSpPr>
         <p:spPr>
           <a:xfrm>
-            <a:off x="800000" y="3841666"/>
-            <a:ext cx="460000" cy="460000"/>
+            <a:off x="780000" y="4413650"/>
+            <a:ext cx="420000" cy="420000"/>
           </a:xfrm>
           <a:prstGeom prst="ellipse">
             <a:avLst/>
@@ -8045,7 +10254,7 @@
           <a:p>
             <a:pPr algn="ctr"/>
             <a:r>
-              <a:rPr sz="1600" b="1">
+              <a:rPr sz="1400" b="1">
                 <a:solidFill>
                   <a:srgbClr val="FFFFFF"/>
                 </a:solidFill>
@@ -8064,8 +10273,8 @@
         </p:nvSpPr>
         <p:spPr>
           <a:xfrm>
-            <a:off x="1450000" y="3446666"/>
-            <a:ext cx="10050000" cy="1250000"/>
+            <a:off x="1380000" y="3870000"/>
+            <a:ext cx="10150000" cy="1507300"/>
           </a:xfrm>
           <a:prstGeom prst="rect">
             <a:avLst/>
@@ -8073,20 +10282,35 @@
           <a:noFill/>
         </p:spPr>
         <p:txBody>
-          <a:bodyPr wrap="square" anchor="ctr" lIns="50800" rIns="50800">
+          <a:bodyPr wrap="square" anchor="ctr">
             <a:spAutoFit/>
           </a:bodyPr>
           <a:lstStyle/>
           <a:p>
-            <a:pPr algn="l"/>
             <a:r>
-              <a:rPr sz="1600" b="0">
+              <a:rPr sz="1600" b="1">
                 <a:solidFill>
-                  <a:srgbClr val="1B2430"/>
+                  <a:srgbClr val="1F3A5F"/>
                 </a:solidFill>
                 <a:latin typeface="Calibri"/>
               </a:rPr>
-              <a:t>Infratuzilma nuqtai nazaridan agentlar uch yangi talab qo'yadi. Birinchidan, kechikish zanjiri: bitta foydalanuvchi vazifasi 5–20 ta LLM chaqiruvi va vosita bajarilishidan iborat, umumiy vaqt o'nlab soniya; shuning uchun har chaqiruvning TTFT va prefiks…</a:t>
+              <a:t>Infratuzilma nuqtai nazaridan agentlar uch yangi talab qo'yadi.</a:t>
+            </a:r>
+          </a:p>
+          <a:p>
+            <a:pPr>
+              <a:spcBef>
+                <a:spcPts val="400"/>
+              </a:spcBef>
+            </a:pPr>
+            <a:r>
+              <a:rPr sz="1500">
+                <a:solidFill>
+                  <a:srgbClr val="334055"/>
+                </a:solidFill>
+                <a:latin typeface="Calibri"/>
+              </a:rPr>
+              <a:t>Birinchidan, kechikish zanjiri: bitta foydalanuvchi vazifasi 5–20 ta LLM chaqiruvi va vosita bajarilishidan iborat, umumiy vaqt o'nlab soniya; shuning uchun har chaqiruvning TTFT va prefiks keshlash hal qiluvchi, oqimli (streaming) javob va parallel vosita chaqiruvi zarur.</a:t>
             </a:r>
           </a:p>
         </p:txBody>
@@ -8919,7 +11143,7 @@
 </p:sld>
 </file>
 
-<file path=ppt/slides/slide13.xml><?xml version="1.0" encoding="utf-8"?>
+<file path=ppt/slides/slide14.xml><?xml version="1.0" encoding="utf-8"?>
 <p:sld xmlns:a="http://schemas.openxmlformats.org/drawingml/2006/main" xmlns:p="http://schemas.openxmlformats.org/presentationml/2006/main" xmlns:r="http://schemas.openxmlformats.org/officeDocument/2006/relationships">
   <p:cSld>
     <p:spTree>
@@ -9831,7 +12055,7 @@
 </p:sld>
 </file>
 
-<file path=ppt/slides/slide14.xml><?xml version="1.0" encoding="utf-8"?>
+<file path=ppt/slides/slide15.xml><?xml version="1.0" encoding="utf-8"?>
 <p:sld xmlns:a="http://schemas.openxmlformats.org/drawingml/2006/main" xmlns:p="http://schemas.openxmlformats.org/presentationml/2006/main" xmlns:r="http://schemas.openxmlformats.org/officeDocument/2006/relationships">
   <p:cSld>
     <p:spTree>
@@ -10160,7 +12384,7 @@
                 </a:solidFill>
                 <a:latin typeface="Calibri"/>
               </a:rPr>
-              <a:t>14</a:t>
+              <a:t>15</a:t>
             </a:r>
           </a:p>
         </p:txBody>
@@ -10173,12 +12397,12 @@
         </p:nvSpPr>
         <p:spPr>
           <a:xfrm>
-            <a:off x="550000" y="1620000"/>
-            <a:ext cx="11100000" cy="1250000"/>
+            <a:off x="550000" y="1661240"/>
+            <a:ext cx="11100000" cy="1335840"/>
           </a:xfrm>
           <a:prstGeom prst="roundRect">
             <a:avLst>
-              <a:gd name="adj" fmla="val 18000"/>
+              <a:gd name="adj" fmla="val 8000"/>
             </a:avLst>
           </a:prstGeom>
           <a:solidFill>
@@ -10219,8 +12443,8 @@
         </p:nvSpPr>
         <p:spPr>
           <a:xfrm>
-            <a:off x="550000" y="1620000"/>
-            <a:ext cx="70000" cy="1250000"/>
+            <a:off x="550000" y="1661240"/>
+            <a:ext cx="70000" cy="1335840"/>
           </a:xfrm>
           <a:prstGeom prst="rect">
             <a:avLst/>
@@ -10263,8 +12487,8 @@
         </p:nvSpPr>
         <p:spPr>
           <a:xfrm>
-            <a:off x="800000" y="2015000"/>
-            <a:ext cx="460000" cy="460000"/>
+            <a:off x="780000" y="2119160"/>
+            <a:ext cx="420000" cy="420000"/>
           </a:xfrm>
           <a:prstGeom prst="ellipse">
             <a:avLst/>
@@ -10297,7 +12521,7 @@
           <a:p>
             <a:pPr algn="ctr"/>
             <a:r>
-              <a:rPr sz="1600" b="1">
+              <a:rPr sz="1400" b="1">
                 <a:solidFill>
                   <a:srgbClr val="FFFFFF"/>
                 </a:solidFill>
@@ -10316,8 +12540,8 @@
         </p:nvSpPr>
         <p:spPr>
           <a:xfrm>
-            <a:off x="1450000" y="1620000"/>
-            <a:ext cx="10050000" cy="1250000"/>
+            <a:off x="1380000" y="1701240"/>
+            <a:ext cx="10150000" cy="1255840"/>
           </a:xfrm>
           <a:prstGeom prst="rect">
             <a:avLst/>
@@ -10325,20 +12549,35 @@
           <a:noFill/>
         </p:spPr>
         <p:txBody>
-          <a:bodyPr wrap="square" anchor="ctr" lIns="50800" rIns="50800">
+          <a:bodyPr wrap="square" anchor="ctr">
             <a:spAutoFit/>
           </a:bodyPr>
           <a:lstStyle/>
           <a:p>
-            <a:pPr algn="l"/>
             <a:r>
-              <a:rPr sz="1600" b="0">
+              <a:rPr sz="1600" b="1">
                 <a:solidFill>
-                  <a:srgbClr val="1B2430"/>
+                  <a:srgbClr val="1F3A5F"/>
                 </a:solidFill>
                 <a:latin typeface="Calibri"/>
               </a:rPr>
-              <a:t>LLM infratuzilmasini loyihalash to'rt resursni muvozanatlashdan boshlanadi: GPU xotirasi, hisoblash, tugunlar ichidagi va orasidagi tarmoq, saqlash. Xotira talabi inferens uchun: og'irliklar (P × bayt) + KV-kesh (foydalanuvchilar × kontekst × token boshiga…</a:t>
+              <a:t>LLM infratuzilmasini loyihalash to'rt resursni muvozanatlashdan boshlanadi: GPU xotirasi, hisoblash, tugunlar ichidagi va orasidagi tarmoq, saqlash.</a:t>
+            </a:r>
+          </a:p>
+          <a:p>
+            <a:pPr>
+              <a:spcBef>
+                <a:spcPts val="400"/>
+              </a:spcBef>
+            </a:pPr>
+            <a:r>
+              <a:rPr sz="1500">
+                <a:solidFill>
+                  <a:srgbClr val="334055"/>
+                </a:solidFill>
+                <a:latin typeface="Calibri"/>
+              </a:rPr>
+              <a:t>Xotira talabi inferens uchun: og'irliklar (P × bayt) + KV-kesh (foydalanuvchilar × kontekst × token boshiga KB) + faollashuvlar (5–10 %).</a:t>
             </a:r>
           </a:p>
         </p:txBody>
@@ -10351,12 +12590,12 @@
         </p:nvSpPr>
         <p:spPr>
           <a:xfrm>
-            <a:off x="550000" y="2990000"/>
-            <a:ext cx="11100000" cy="1250000"/>
+            <a:off x="550000" y="3107080"/>
+            <a:ext cx="11100000" cy="1335840"/>
           </a:xfrm>
           <a:prstGeom prst="roundRect">
             <a:avLst>
-              <a:gd name="adj" fmla="val 18000"/>
+              <a:gd name="adj" fmla="val 8000"/>
             </a:avLst>
           </a:prstGeom>
           <a:solidFill>
@@ -10397,8 +12636,8 @@
         </p:nvSpPr>
         <p:spPr>
           <a:xfrm>
-            <a:off x="550000" y="2990000"/>
-            <a:ext cx="70000" cy="1250000"/>
+            <a:off x="550000" y="3107080"/>
+            <a:ext cx="70000" cy="1335840"/>
           </a:xfrm>
           <a:prstGeom prst="rect">
             <a:avLst/>
@@ -10441,8 +12680,8 @@
         </p:nvSpPr>
         <p:spPr>
           <a:xfrm>
-            <a:off x="800000" y="3385000"/>
-            <a:ext cx="460000" cy="460000"/>
+            <a:off x="780000" y="3565000"/>
+            <a:ext cx="420000" cy="420000"/>
           </a:xfrm>
           <a:prstGeom prst="ellipse">
             <a:avLst/>
@@ -10475,7 +12714,7 @@
           <a:p>
             <a:pPr algn="ctr"/>
             <a:r>
-              <a:rPr sz="1600" b="1">
+              <a:rPr sz="1400" b="1">
                 <a:solidFill>
                   <a:srgbClr val="FFFFFF"/>
                 </a:solidFill>
@@ -10494,8 +12733,8 @@
         </p:nvSpPr>
         <p:spPr>
           <a:xfrm>
-            <a:off x="1450000" y="2990000"/>
-            <a:ext cx="10050000" cy="1250000"/>
+            <a:off x="1380000" y="3147080"/>
+            <a:ext cx="10150000" cy="1255840"/>
           </a:xfrm>
           <a:prstGeom prst="rect">
             <a:avLst/>
@@ -10503,20 +12742,19 @@
           <a:noFill/>
         </p:spPr>
         <p:txBody>
-          <a:bodyPr wrap="square" anchor="ctr" lIns="50800" rIns="50800">
+          <a:bodyPr wrap="square" anchor="ctr">
             <a:spAutoFit/>
           </a:bodyPr>
           <a:lstStyle/>
           <a:p>
-            <a:pPr algn="l"/>
             <a:r>
-              <a:rPr sz="1600" b="0">
+              <a:rPr sz="1500" b="0">
                 <a:solidFill>
                   <a:srgbClr val="1B2430"/>
                 </a:solidFill>
                 <a:latin typeface="Calibri"/>
               </a:rPr>
-              <a:t>O'qitish klasteri uchun tugun — standart birlik: DGX H100 (8 × H100 SXM 80 GB, NVSwitch orqali to'liq bog'langan, 2 × Intel Xeon, 2 TB RAM, 8 × 400 Gb/s InfiniBand NDR adapter — har GPU'ga bittadan, ≈ 10 kW). Tugunlar orasidagi tarmoq ma'lumot…</a:t>
+              <a:t>O'qitish klasteri uchun tugun — standart birlik: DGX H100 (8 × H100 SXM 80 GB, NVSwitch orqali to'liq bog'langan, 2 × Intel Xeon, 2 TB RAM, 8 × 400 Gb/s InfiniBand NDR adapter — har GPU'ga bittadan, ≈ 10 kW).</a:t>
             </a:r>
           </a:p>
         </p:txBody>
@@ -10529,12 +12767,12 @@
         </p:nvSpPr>
         <p:spPr>
           <a:xfrm>
-            <a:off x="550000" y="4360000"/>
-            <a:ext cx="11100000" cy="1250000"/>
+            <a:off x="550000" y="4552920"/>
+            <a:ext cx="11100000" cy="1335840"/>
           </a:xfrm>
           <a:prstGeom prst="roundRect">
             <a:avLst>
-              <a:gd name="adj" fmla="val 18000"/>
+              <a:gd name="adj" fmla="val 8000"/>
             </a:avLst>
           </a:prstGeom>
           <a:solidFill>
@@ -10575,8 +12813,8 @@
         </p:nvSpPr>
         <p:spPr>
           <a:xfrm>
-            <a:off x="550000" y="4360000"/>
-            <a:ext cx="70000" cy="1250000"/>
+            <a:off x="550000" y="4552920"/>
+            <a:ext cx="70000" cy="1335840"/>
           </a:xfrm>
           <a:prstGeom prst="rect">
             <a:avLst/>
@@ -10619,8 +12857,8 @@
         </p:nvSpPr>
         <p:spPr>
           <a:xfrm>
-            <a:off x="800000" y="4755000"/>
-            <a:ext cx="460000" cy="460000"/>
+            <a:off x="780000" y="5010840"/>
+            <a:ext cx="420000" cy="420000"/>
           </a:xfrm>
           <a:prstGeom prst="ellipse">
             <a:avLst/>
@@ -10653,7 +12891,7 @@
           <a:p>
             <a:pPr algn="ctr"/>
             <a:r>
-              <a:rPr sz="1600" b="1">
+              <a:rPr sz="1400" b="1">
                 <a:solidFill>
                   <a:srgbClr val="FFFFFF"/>
                 </a:solidFill>
@@ -10672,8 +12910,8 @@
         </p:nvSpPr>
         <p:spPr>
           <a:xfrm>
-            <a:off x="1450000" y="4360000"/>
-            <a:ext cx="10050000" cy="1250000"/>
+            <a:off x="1380000" y="4592920"/>
+            <a:ext cx="10150000" cy="1255840"/>
           </a:xfrm>
           <a:prstGeom prst="rect">
             <a:avLst/>
@@ -10681,20 +12919,19 @@
           <a:noFill/>
         </p:spPr>
         <p:txBody>
-          <a:bodyPr wrap="square" anchor="ctr" lIns="50800" rIns="50800">
+          <a:bodyPr wrap="square" anchor="ctr">
             <a:spAutoFit/>
           </a:bodyPr>
           <a:lstStyle/>
           <a:p>
-            <a:pPr algn="l"/>
             <a:r>
-              <a:rPr sz="1600" b="0">
+              <a:rPr sz="1500" b="0">
                 <a:solidFill>
                   <a:srgbClr val="1B2430"/>
                 </a:solidFill>
                 <a:latin typeface="Calibri"/>
               </a:rPr>
-              <a:t>Energiya va joylashtirish: 1 000 ta H100 ≈ 1,3 MW IT quvvat, PUE 1,2 bilan 1,6 MW; suyuqlik sovutish 700 vattlik GPU'lar uchun standartga aylanmoqda. Dasturiy stek: konteynerlar (NVIDIA NGC obrazlari), orkestratsiya (Slurm — HPC an'anasi, Kubernetes + GPU…</a:t>
+              <a:t>Energiya va joylashtirish: 1 000 ta H100 ≈ 1,3 MW IT quvvat, PUE 1,2 bilan 1,6 MW; suyuqlik sovutish 700 vattlik GPU'lar uchun standartga aylanmoqda.</a:t>
             </a:r>
           </a:p>
         </p:txBody>
@@ -11891,7 +14128,7 @@
 </p:sld>
 </file>
 
-<file path=ppt/slides/slide15.xml><?xml version="1.0" encoding="utf-8"?>
+<file path=ppt/slides/slide16.xml><?xml version="1.0" encoding="utf-8"?>
 <p:sld xmlns:a="http://schemas.openxmlformats.org/drawingml/2006/main" xmlns:p="http://schemas.openxmlformats.org/presentationml/2006/main" xmlns:r="http://schemas.openxmlformats.org/officeDocument/2006/relationships">
   <p:cSld>
     <p:spTree>
@@ -12817,8 +15054,8 @@
         </p:nvSpPr>
         <p:spPr>
           <a:xfrm>
-            <a:off x="550000" y="1300000"/>
-            <a:ext cx="11100000" cy="894000"/>
+            <a:off x="550000" y="2255000"/>
+            <a:ext cx="11100000" cy="520000"/>
           </a:xfrm>
           <a:prstGeom prst="roundRect">
             <a:avLst>
@@ -12863,8 +15100,8 @@
         </p:nvSpPr>
         <p:spPr>
           <a:xfrm>
-            <a:off x="550000" y="1300000"/>
-            <a:ext cx="70000" cy="894000"/>
+            <a:off x="550000" y="2255000"/>
+            <a:ext cx="70000" cy="520000"/>
           </a:xfrm>
           <a:prstGeom prst="rect">
             <a:avLst/>
@@ -12907,8 +15144,8 @@
         </p:nvSpPr>
         <p:spPr>
           <a:xfrm>
-            <a:off x="800000" y="1517000"/>
-            <a:ext cx="460000" cy="460000"/>
+            <a:off x="780000" y="2325000"/>
+            <a:ext cx="380000" cy="380000"/>
           </a:xfrm>
           <a:prstGeom prst="ellipse">
             <a:avLst/>
@@ -12941,7 +15178,7 @@
           <a:p>
             <a:pPr algn="ctr"/>
             <a:r>
-              <a:rPr sz="1600" b="1">
+              <a:rPr sz="1400" b="1">
                 <a:solidFill>
                   <a:srgbClr val="FFFFFF"/>
                 </a:solidFill>
@@ -12960,8 +15197,8 @@
         </p:nvSpPr>
         <p:spPr>
           <a:xfrm>
-            <a:off x="1450000" y="1300000"/>
-            <a:ext cx="10050000" cy="894000"/>
+            <a:off x="1380000" y="2295000"/>
+            <a:ext cx="10150000" cy="440000"/>
           </a:xfrm>
           <a:prstGeom prst="rect">
             <a:avLst/>
@@ -12969,14 +15206,13 @@
           <a:noFill/>
         </p:spPr>
         <p:txBody>
-          <a:bodyPr wrap="square" anchor="ctr" lIns="50800" rIns="50800">
+          <a:bodyPr wrap="square" anchor="ctr">
             <a:spAutoFit/>
           </a:bodyPr>
           <a:lstStyle/>
           <a:p>
-            <a:pPr algn="l"/>
             <a:r>
-              <a:rPr sz="1900" b="0">
+              <a:rPr sz="1600" b="0">
                 <a:solidFill>
                   <a:srgbClr val="1B2430"/>
                 </a:solidFill>
@@ -12995,8 +15231,8 @@
         </p:nvSpPr>
         <p:spPr>
           <a:xfrm>
-            <a:off x="550000" y="2314000"/>
-            <a:ext cx="11100000" cy="894000"/>
+            <a:off x="550000" y="2885000"/>
+            <a:ext cx="11100000" cy="520000"/>
           </a:xfrm>
           <a:prstGeom prst="roundRect">
             <a:avLst>
@@ -13041,8 +15277,8 @@
         </p:nvSpPr>
         <p:spPr>
           <a:xfrm>
-            <a:off x="550000" y="2314000"/>
-            <a:ext cx="70000" cy="894000"/>
+            <a:off x="550000" y="2885000"/>
+            <a:ext cx="70000" cy="520000"/>
           </a:xfrm>
           <a:prstGeom prst="rect">
             <a:avLst/>
@@ -13085,8 +15321,8 @@
         </p:nvSpPr>
         <p:spPr>
           <a:xfrm>
-            <a:off x="800000" y="2531000"/>
-            <a:ext cx="460000" cy="460000"/>
+            <a:off x="780000" y="2955000"/>
+            <a:ext cx="380000" cy="380000"/>
           </a:xfrm>
           <a:prstGeom prst="ellipse">
             <a:avLst/>
@@ -13119,7 +15355,7 @@
           <a:p>
             <a:pPr algn="ctr"/>
             <a:r>
-              <a:rPr sz="1600" b="1">
+              <a:rPr sz="1400" b="1">
                 <a:solidFill>
                   <a:srgbClr val="FFFFFF"/>
                 </a:solidFill>
@@ -13138,8 +15374,8 @@
         </p:nvSpPr>
         <p:spPr>
           <a:xfrm>
-            <a:off x="1450000" y="2314000"/>
-            <a:ext cx="10050000" cy="894000"/>
+            <a:off x="1380000" y="2925000"/>
+            <a:ext cx="10150000" cy="440000"/>
           </a:xfrm>
           <a:prstGeom prst="rect">
             <a:avLst/>
@@ -13147,14 +15383,13 @@
           <a:noFill/>
         </p:spPr>
         <p:txBody>
-          <a:bodyPr wrap="square" anchor="ctr" lIns="50800" rIns="50800">
+          <a:bodyPr wrap="square" anchor="ctr">
             <a:spAutoFit/>
           </a:bodyPr>
           <a:lstStyle/>
           <a:p>
-            <a:pPr algn="l"/>
             <a:r>
-              <a:rPr sz="1900" b="0">
+              <a:rPr sz="1600" b="0">
                 <a:solidFill>
                   <a:srgbClr val="1B2430"/>
                 </a:solidFill>
@@ -13173,8 +15408,8 @@
         </p:nvSpPr>
         <p:spPr>
           <a:xfrm>
-            <a:off x="550000" y="3328000"/>
-            <a:ext cx="11100000" cy="894000"/>
+            <a:off x="550000" y="3515000"/>
+            <a:ext cx="11100000" cy="520000"/>
           </a:xfrm>
           <a:prstGeom prst="roundRect">
             <a:avLst>
@@ -13219,8 +15454,8 @@
         </p:nvSpPr>
         <p:spPr>
           <a:xfrm>
-            <a:off x="550000" y="3328000"/>
-            <a:ext cx="70000" cy="894000"/>
+            <a:off x="550000" y="3515000"/>
+            <a:ext cx="70000" cy="520000"/>
           </a:xfrm>
           <a:prstGeom prst="rect">
             <a:avLst/>
@@ -13263,8 +15498,8 @@
         </p:nvSpPr>
         <p:spPr>
           <a:xfrm>
-            <a:off x="800000" y="3545000"/>
-            <a:ext cx="460000" cy="460000"/>
+            <a:off x="780000" y="3585000"/>
+            <a:ext cx="380000" cy="380000"/>
           </a:xfrm>
           <a:prstGeom prst="ellipse">
             <a:avLst/>
@@ -13297,7 +15532,7 @@
           <a:p>
             <a:pPr algn="ctr"/>
             <a:r>
-              <a:rPr sz="1600" b="1">
+              <a:rPr sz="1400" b="1">
                 <a:solidFill>
                   <a:srgbClr val="FFFFFF"/>
                 </a:solidFill>
@@ -13316,8 +15551,8 @@
         </p:nvSpPr>
         <p:spPr>
           <a:xfrm>
-            <a:off x="1450000" y="3328000"/>
-            <a:ext cx="10050000" cy="894000"/>
+            <a:off x="1380000" y="3555000"/>
+            <a:ext cx="10150000" cy="440000"/>
           </a:xfrm>
           <a:prstGeom prst="rect">
             <a:avLst/>
@@ -13325,14 +15560,13 @@
           <a:noFill/>
         </p:spPr>
         <p:txBody>
-          <a:bodyPr wrap="square" anchor="ctr" lIns="50800" rIns="50800">
+          <a:bodyPr wrap="square" anchor="ctr">
             <a:spAutoFit/>
           </a:bodyPr>
           <a:lstStyle/>
           <a:p>
-            <a:pPr algn="l"/>
             <a:r>
-              <a:rPr sz="1900" b="0">
+              <a:rPr sz="1600" b="0">
                 <a:solidFill>
                   <a:srgbClr val="1B2430"/>
                 </a:solidFill>
@@ -13351,8 +15585,8 @@
         </p:nvSpPr>
         <p:spPr>
           <a:xfrm>
-            <a:off x="550000" y="4342000"/>
-            <a:ext cx="11100000" cy="894000"/>
+            <a:off x="550000" y="4145000"/>
+            <a:ext cx="11100000" cy="520000"/>
           </a:xfrm>
           <a:prstGeom prst="roundRect">
             <a:avLst>
@@ -13397,8 +15631,8 @@
         </p:nvSpPr>
         <p:spPr>
           <a:xfrm>
-            <a:off x="550000" y="4342000"/>
-            <a:ext cx="70000" cy="894000"/>
+            <a:off x="550000" y="4145000"/>
+            <a:ext cx="70000" cy="520000"/>
           </a:xfrm>
           <a:prstGeom prst="rect">
             <a:avLst/>
@@ -13441,8 +15675,8 @@
         </p:nvSpPr>
         <p:spPr>
           <a:xfrm>
-            <a:off x="800000" y="4559000"/>
-            <a:ext cx="460000" cy="460000"/>
+            <a:off x="780000" y="4215000"/>
+            <a:ext cx="380000" cy="380000"/>
           </a:xfrm>
           <a:prstGeom prst="ellipse">
             <a:avLst/>
@@ -13475,7 +15709,7 @@
           <a:p>
             <a:pPr algn="ctr"/>
             <a:r>
-              <a:rPr sz="1600" b="1">
+              <a:rPr sz="1400" b="1">
                 <a:solidFill>
                   <a:srgbClr val="FFFFFF"/>
                 </a:solidFill>
@@ -13494,8 +15728,8 @@
         </p:nvSpPr>
         <p:spPr>
           <a:xfrm>
-            <a:off x="1450000" y="4342000"/>
-            <a:ext cx="10050000" cy="894000"/>
+            <a:off x="1380000" y="4185000"/>
+            <a:ext cx="10150000" cy="440000"/>
           </a:xfrm>
           <a:prstGeom prst="rect">
             <a:avLst/>
@@ -13503,14 +15737,13 @@
           <a:noFill/>
         </p:spPr>
         <p:txBody>
-          <a:bodyPr wrap="square" anchor="ctr" lIns="50800" rIns="50800">
+          <a:bodyPr wrap="square" anchor="ctr">
             <a:spAutoFit/>
           </a:bodyPr>
           <a:lstStyle/>
           <a:p>
-            <a:pPr algn="l"/>
             <a:r>
-              <a:rPr sz="1900" b="0">
+              <a:rPr sz="1600" b="0">
                 <a:solidFill>
                   <a:srgbClr val="1B2430"/>
                 </a:solidFill>
@@ -13529,8 +15762,8 @@
         </p:nvSpPr>
         <p:spPr>
           <a:xfrm>
-            <a:off x="550000" y="5356000"/>
-            <a:ext cx="11100000" cy="894000"/>
+            <a:off x="550000" y="4775000"/>
+            <a:ext cx="11100000" cy="520000"/>
           </a:xfrm>
           <a:prstGeom prst="roundRect">
             <a:avLst>
@@ -13575,8 +15808,8 @@
         </p:nvSpPr>
         <p:spPr>
           <a:xfrm>
-            <a:off x="550000" y="5356000"/>
-            <a:ext cx="70000" cy="894000"/>
+            <a:off x="550000" y="4775000"/>
+            <a:ext cx="70000" cy="520000"/>
           </a:xfrm>
           <a:prstGeom prst="rect">
             <a:avLst/>
@@ -13619,8 +15852,8 @@
         </p:nvSpPr>
         <p:spPr>
           <a:xfrm>
-            <a:off x="800000" y="5573000"/>
-            <a:ext cx="460000" cy="460000"/>
+            <a:off x="780000" y="4845000"/>
+            <a:ext cx="380000" cy="380000"/>
           </a:xfrm>
           <a:prstGeom prst="ellipse">
             <a:avLst/>
@@ -13653,7 +15886,7 @@
           <a:p>
             <a:pPr algn="ctr"/>
             <a:r>
-              <a:rPr sz="1600" b="1">
+              <a:rPr sz="1400" b="1">
                 <a:solidFill>
                   <a:srgbClr val="FFFFFF"/>
                 </a:solidFill>
@@ -13672,8 +15905,8 @@
         </p:nvSpPr>
         <p:spPr>
           <a:xfrm>
-            <a:off x="1450000" y="5356000"/>
-            <a:ext cx="10050000" cy="894000"/>
+            <a:off x="1380000" y="4815000"/>
+            <a:ext cx="10150000" cy="440000"/>
           </a:xfrm>
           <a:prstGeom prst="rect">
             <a:avLst/>
@@ -13681,14 +15914,13 @@
           <a:noFill/>
         </p:spPr>
         <p:txBody>
-          <a:bodyPr wrap="square" anchor="ctr" lIns="50800" rIns="50800">
+          <a:bodyPr wrap="square" anchor="ctr">
             <a:spAutoFit/>
           </a:bodyPr>
           <a:lstStyle/>
           <a:p>
-            <a:pPr algn="l"/>
             <a:r>
-              <a:rPr sz="1900" b="0">
+              <a:rPr sz="1600" b="0">
                 <a:solidFill>
                   <a:srgbClr val="1B2430"/>
                 </a:solidFill>
@@ -16873,12 +19105,12 @@
         </p:nvSpPr>
         <p:spPr>
           <a:xfrm>
-            <a:off x="550000" y="1620000"/>
-            <a:ext cx="11100000" cy="1250000"/>
+            <a:off x="550000" y="1761824"/>
+            <a:ext cx="11100000" cy="1268784"/>
           </a:xfrm>
           <a:prstGeom prst="roundRect">
             <a:avLst>
-              <a:gd name="adj" fmla="val 18000"/>
+              <a:gd name="adj" fmla="val 8000"/>
             </a:avLst>
           </a:prstGeom>
           <a:solidFill>
@@ -16919,8 +19151,8 @@
         </p:nvSpPr>
         <p:spPr>
           <a:xfrm>
-            <a:off x="550000" y="1620000"/>
-            <a:ext cx="70000" cy="1250000"/>
+            <a:off x="550000" y="1761824"/>
+            <a:ext cx="70000" cy="1268784"/>
           </a:xfrm>
           <a:prstGeom prst="rect">
             <a:avLst/>
@@ -16963,8 +19195,8 @@
         </p:nvSpPr>
         <p:spPr>
           <a:xfrm>
-            <a:off x="800000" y="2015000"/>
-            <a:ext cx="460000" cy="460000"/>
+            <a:off x="780000" y="2186216"/>
+            <a:ext cx="420000" cy="420000"/>
           </a:xfrm>
           <a:prstGeom prst="ellipse">
             <a:avLst/>
@@ -16997,7 +19229,7 @@
           <a:p>
             <a:pPr algn="ctr"/>
             <a:r>
-              <a:rPr sz="1600" b="1">
+              <a:rPr sz="1400" b="1">
                 <a:solidFill>
                   <a:srgbClr val="FFFFFF"/>
                 </a:solidFill>
@@ -17016,8 +19248,8 @@
         </p:nvSpPr>
         <p:spPr>
           <a:xfrm>
-            <a:off x="1450000" y="1620000"/>
-            <a:ext cx="10050000" cy="1250000"/>
+            <a:off x="1380000" y="1801824"/>
+            <a:ext cx="10150000" cy="1188784"/>
           </a:xfrm>
           <a:prstGeom prst="rect">
             <a:avLst/>
@@ -17025,20 +19257,35 @@
           <a:noFill/>
         </p:spPr>
         <p:txBody>
-          <a:bodyPr wrap="square" anchor="ctr" lIns="50800" rIns="50800">
+          <a:bodyPr wrap="square" anchor="ctr">
             <a:spAutoFit/>
           </a:bodyPr>
           <a:lstStyle/>
           <a:p>
-            <a:pPr algn="l"/>
             <a:r>
-              <a:rPr sz="1600" b="0">
+              <a:rPr sz="1500" b="1">
                 <a:solidFill>
-                  <a:srgbClr val="1B2430"/>
+                  <a:srgbClr val="1F3A5F"/>
                 </a:solidFill>
                 <a:latin typeface="Calibri"/>
               </a:rPr>
-              <a:t>Dekoder-only Transformer (zamonaviy LLM'larning aksariyati shu turda) L ta bir xil blokdan iborat. Har blok ikki qismdan tuziladi: ko'p boshli o'z-o'ziga diqqat (multi-head self-attention) va pozitsiya bo'yicha to'liq bog'langan tarmoq (feed-forward network,…</a:t>
+              <a:t>Dekoder-only Transformer (zamonaviy LLM'larning aksariyati shu turda) L ta bir xil blokdan iborat.</a:t>
+            </a:r>
+          </a:p>
+          <a:p>
+            <a:pPr>
+              <a:spcBef>
+                <a:spcPts val="400"/>
+              </a:spcBef>
+            </a:pPr>
+            <a:r>
+              <a:rPr sz="1400">
+                <a:solidFill>
+                  <a:srgbClr val="334055"/>
+                </a:solidFill>
+                <a:latin typeface="Calibri"/>
+              </a:rPr>
+              <a:t>Har blok ikki qismdan tuziladi: ko'p boshli o'z-o'ziga diqqat (multi-head self-attention) va pozitsiya bo'yicha to'liq bog'langan tarmoq (feed-forward network, FFN), har biri qoldiq bog'lanish (residual) va normalizatsiya (LayerNorm yoki RMSNorm) bilan o'ralgan.</a:t>
             </a:r>
           </a:p>
         </p:txBody>
@@ -17051,12 +19298,12 @@
         </p:nvSpPr>
         <p:spPr>
           <a:xfrm>
-            <a:off x="550000" y="2990000"/>
-            <a:ext cx="11100000" cy="1250000"/>
+            <a:off x="550000" y="3140608"/>
+            <a:ext cx="11100000" cy="1268784"/>
           </a:xfrm>
           <a:prstGeom prst="roundRect">
             <a:avLst>
-              <a:gd name="adj" fmla="val 18000"/>
+              <a:gd name="adj" fmla="val 8000"/>
             </a:avLst>
           </a:prstGeom>
           <a:solidFill>
@@ -17097,8 +19344,8 @@
         </p:nvSpPr>
         <p:spPr>
           <a:xfrm>
-            <a:off x="550000" y="2990000"/>
-            <a:ext cx="70000" cy="1250000"/>
+            <a:off x="550000" y="3140608"/>
+            <a:ext cx="70000" cy="1268784"/>
           </a:xfrm>
           <a:prstGeom prst="rect">
             <a:avLst/>
@@ -17141,8 +19388,8 @@
         </p:nvSpPr>
         <p:spPr>
           <a:xfrm>
-            <a:off x="800000" y="3385000"/>
-            <a:ext cx="460000" cy="460000"/>
+            <a:off x="780000" y="3565000"/>
+            <a:ext cx="420000" cy="420000"/>
           </a:xfrm>
           <a:prstGeom prst="ellipse">
             <a:avLst/>
@@ -17175,7 +19422,7 @@
           <a:p>
             <a:pPr algn="ctr"/>
             <a:r>
-              <a:rPr sz="1600" b="1">
+              <a:rPr sz="1400" b="1">
                 <a:solidFill>
                   <a:srgbClr val="FFFFFF"/>
                 </a:solidFill>
@@ -17194,8 +19441,8 @@
         </p:nvSpPr>
         <p:spPr>
           <a:xfrm>
-            <a:off x="1450000" y="2990000"/>
-            <a:ext cx="10050000" cy="1250000"/>
+            <a:off x="1380000" y="3180608"/>
+            <a:ext cx="10150000" cy="1188784"/>
           </a:xfrm>
           <a:prstGeom prst="rect">
             <a:avLst/>
@@ -17203,20 +19450,35 @@
           <a:noFill/>
         </p:spPr>
         <p:txBody>
-          <a:bodyPr wrap="square" anchor="ctr" lIns="50800" rIns="50800">
+          <a:bodyPr wrap="square" anchor="ctr">
             <a:spAutoFit/>
           </a:bodyPr>
           <a:lstStyle/>
           <a:p>
-            <a:pPr algn="l"/>
             <a:r>
-              <a:rPr sz="1600" b="0">
+              <a:rPr sz="1500" b="1">
                 <a:solidFill>
-                  <a:srgbClr val="1B2430"/>
+                  <a:srgbClr val="1F3A5F"/>
                 </a:solidFill>
                 <a:latin typeface="Calibri"/>
               </a:rPr>
-              <a:t>Parametrlar soni taxminan P ≈ 12 · L · d_model² (diqqat 4·d², FFN 8·d²) plus embedding V · d_model. Masalan, Llama 2 7B: L = 32, d_model = 4096 → 12 · 32 · 4096² ≈ 6,4 milliard, embedding bilan ≈ 6,7 milliard.</a:t>
+              <a:t>Parametrlar soni taxminan P ≈ 12 · L · d_model² (diqqat 4·d², FFN 8·d²) plus embedding V · d_model.</a:t>
+            </a:r>
+          </a:p>
+          <a:p>
+            <a:pPr>
+              <a:spcBef>
+                <a:spcPts val="400"/>
+              </a:spcBef>
+            </a:pPr>
+            <a:r>
+              <a:rPr sz="1400">
+                <a:solidFill>
+                  <a:srgbClr val="334055"/>
+                </a:solidFill>
+                <a:latin typeface="Calibri"/>
+              </a:rPr>
+              <a:t>Masalan, Llama 2 7B: L = 32, d_model = 4096 → 12 · 32 · 4096² ≈ 6,4 milliard, embedding bilan ≈ 6,7 milliard. Token boshiga hisoblash: har parametr bitta ko'paytirish-qo'shish, ya'ni ≈ 2P FLOP (oldinga), o'qitishda orqaga tarqatish bilan ≈ 6P FLOP.</a:t>
             </a:r>
           </a:p>
         </p:txBody>
@@ -17229,12 +19491,12 @@
         </p:nvSpPr>
         <p:spPr>
           <a:xfrm>
-            <a:off x="550000" y="4360000"/>
-            <a:ext cx="11100000" cy="1250000"/>
+            <a:off x="550000" y="4519392"/>
+            <a:ext cx="11100000" cy="1268784"/>
           </a:xfrm>
           <a:prstGeom prst="roundRect">
             <a:avLst>
-              <a:gd name="adj" fmla="val 18000"/>
+              <a:gd name="adj" fmla="val 8000"/>
             </a:avLst>
           </a:prstGeom>
           <a:solidFill>
@@ -17275,8 +19537,8 @@
         </p:nvSpPr>
         <p:spPr>
           <a:xfrm>
-            <a:off x="550000" y="4360000"/>
-            <a:ext cx="70000" cy="1250000"/>
+            <a:off x="550000" y="4519392"/>
+            <a:ext cx="70000" cy="1268784"/>
           </a:xfrm>
           <a:prstGeom prst="rect">
             <a:avLst/>
@@ -17319,8 +19581,8 @@
         </p:nvSpPr>
         <p:spPr>
           <a:xfrm>
-            <a:off x="800000" y="4755000"/>
-            <a:ext cx="460000" cy="460000"/>
+            <a:off x="780000" y="4943784"/>
+            <a:ext cx="420000" cy="420000"/>
           </a:xfrm>
           <a:prstGeom prst="ellipse">
             <a:avLst/>
@@ -17353,7 +19615,7 @@
           <a:p>
             <a:pPr algn="ctr"/>
             <a:r>
-              <a:rPr sz="1600" b="1">
+              <a:rPr sz="1400" b="1">
                 <a:solidFill>
                   <a:srgbClr val="FFFFFF"/>
                 </a:solidFill>
@@ -17372,8 +19634,8 @@
         </p:nvSpPr>
         <p:spPr>
           <a:xfrm>
-            <a:off x="1450000" y="4360000"/>
-            <a:ext cx="10050000" cy="1250000"/>
+            <a:off x="1380000" y="4559392"/>
+            <a:ext cx="10150000" cy="1188784"/>
           </a:xfrm>
           <a:prstGeom prst="rect">
             <a:avLst/>
@@ -17381,20 +19643,19 @@
           <a:noFill/>
         </p:spPr>
         <p:txBody>
-          <a:bodyPr wrap="square" anchor="ctr" lIns="50800" rIns="50800">
+          <a:bodyPr wrap="square" anchor="ctr">
             <a:spAutoFit/>
           </a:bodyPr>
           <a:lstStyle/>
           <a:p>
-            <a:pPr algn="l"/>
             <a:r>
-              <a:rPr sz="1600" b="0">
+              <a:rPr sz="1400" b="0">
                 <a:solidFill>
                   <a:srgbClr val="1B2430"/>
                 </a:solidFill>
                 <a:latin typeface="Calibri"/>
               </a:rPr>
-              <a:t>Zamonaviy modellarda KV-keshni kamaytirish uchun guruhlangan so'rov diqqati (grouped-query attention, GQA) ishlatiladi: 32 ta Q boshiga atigi 8 ta K/V boshi to'g'ri keladi (Llama 3, Mistral). Aralash ekspertlar (mixture of experts, MoE) arxitekturasida FFN…</a:t>
+              <a:t>Zamonaviy modellarda KV-keshni kamaytirish uchun guruhlangan so'rov diqqati (grouped-query attention, GQA) ishlatiladi: 32 ta Q boshiga atigi 8 ta K/V boshi to'g'ri keladi (Llama 3, Mistral).</a:t>
             </a:r>
           </a:p>
         </p:txBody>
@@ -19845,12 +22106,12 @@
         </p:nvSpPr>
         <p:spPr>
           <a:xfrm>
-            <a:off x="550000" y="1300000"/>
-            <a:ext cx="11100000" cy="1147500"/>
+            <a:off x="550000" y="1409780"/>
+            <a:ext cx="11100000" cy="1503480"/>
           </a:xfrm>
           <a:prstGeom prst="roundRect">
             <a:avLst>
-              <a:gd name="adj" fmla="val 18000"/>
+              <a:gd name="adj" fmla="val 8000"/>
             </a:avLst>
           </a:prstGeom>
           <a:solidFill>
@@ -19891,8 +22152,8 @@
         </p:nvSpPr>
         <p:spPr>
           <a:xfrm>
-            <a:off x="550000" y="1300000"/>
-            <a:ext cx="70000" cy="1147500"/>
+            <a:off x="550000" y="1409780"/>
+            <a:ext cx="70000" cy="1503480"/>
           </a:xfrm>
           <a:prstGeom prst="rect">
             <a:avLst/>
@@ -19935,8 +22196,8 @@
         </p:nvSpPr>
         <p:spPr>
           <a:xfrm>
-            <a:off x="800000" y="1643750"/>
-            <a:ext cx="460000" cy="460000"/>
+            <a:off x="780000" y="1951520"/>
+            <a:ext cx="420000" cy="420000"/>
           </a:xfrm>
           <a:prstGeom prst="ellipse">
             <a:avLst/>
@@ -19969,7 +22230,7 @@
           <a:p>
             <a:pPr algn="ctr"/>
             <a:r>
-              <a:rPr sz="1600" b="1">
+              <a:rPr sz="1400" b="1">
                 <a:solidFill>
                   <a:srgbClr val="FFFFFF"/>
                 </a:solidFill>
@@ -19988,8 +22249,8 @@
         </p:nvSpPr>
         <p:spPr>
           <a:xfrm>
-            <a:off x="1450000" y="1300000"/>
-            <a:ext cx="10050000" cy="1147500"/>
+            <a:off x="1380000" y="1449780"/>
+            <a:ext cx="10150000" cy="1423480"/>
           </a:xfrm>
           <a:prstGeom prst="rect">
             <a:avLst/>
@@ -19997,22 +22258,37 @@
           <a:noFill/>
         </p:spPr>
         <p:txBody>
-          <a:bodyPr wrap="square" anchor="ctr" lIns="50800" rIns="50800">
+          <a:bodyPr wrap="square" anchor="ctr">
             <a:spAutoFit/>
           </a:bodyPr>
           <a:lstStyle/>
           <a:p>
-            <a:pPr algn="l"/>
             <a:r>
-              <a:rPr sz="1400" b="0">
+              <a:rPr sz="1500" b="1">
                 <a:solidFill>
-                  <a:srgbClr val="1B2430"/>
+                  <a:srgbClr val="1F3A5F"/>
                 </a:solidFill>
                 <a:latin typeface="Calibri"/>
               </a:rPr>
               <a:t>O'qitish narxi oddiy formula bilan baholanadi: C ≈ 6 · P · D FLOP, bu yerda D — o'qitish tokenlari soni.</a:t>
             </a:r>
           </a:p>
+          <a:p>
+            <a:pPr>
+              <a:spcBef>
+                <a:spcPts val="400"/>
+              </a:spcBef>
+            </a:pPr>
+            <a:r>
+              <a:rPr sz="1400">
+                <a:solidFill>
+                  <a:srgbClr val="334055"/>
+                </a:solidFill>
+                <a:latin typeface="Calibri"/>
+              </a:rPr>
+              <a:t>Chinchilla tadqiqoti (Hoffmann va boshq., 2022) berilgan hisoblash byudjetida optimal nisbat D ≈ 20 · P ekanini ko'rsatdi, biroq inferens narxini hisobga olgan zamonaviy modellar ancha ko'proq tokenda o'qitiladi (Llama 3 8B — 15 trillion, ya'ni D ≈ 1900 · P).</a:t>
+            </a:r>
+          </a:p>
         </p:txBody>
       </p:sp>
       <p:sp>
@@ -20023,12 +22299,12 @@
         </p:nvSpPr>
         <p:spPr>
           <a:xfrm>
-            <a:off x="550000" y="2567500"/>
-            <a:ext cx="11100000" cy="1147500"/>
+            <a:off x="550000" y="3023260"/>
+            <a:ext cx="11100000" cy="1503480"/>
           </a:xfrm>
           <a:prstGeom prst="roundRect">
             <a:avLst>
-              <a:gd name="adj" fmla="val 18000"/>
+              <a:gd name="adj" fmla="val 8000"/>
             </a:avLst>
           </a:prstGeom>
           <a:solidFill>
@@ -20069,8 +22345,8 @@
         </p:nvSpPr>
         <p:spPr>
           <a:xfrm>
-            <a:off x="550000" y="2567500"/>
-            <a:ext cx="70000" cy="1147500"/>
+            <a:off x="550000" y="3023260"/>
+            <a:ext cx="70000" cy="1503480"/>
           </a:xfrm>
           <a:prstGeom prst="rect">
             <a:avLst/>
@@ -20113,8 +22389,8 @@
         </p:nvSpPr>
         <p:spPr>
           <a:xfrm>
-            <a:off x="800000" y="2911250"/>
-            <a:ext cx="460000" cy="460000"/>
+            <a:off x="780000" y="3565000"/>
+            <a:ext cx="420000" cy="420000"/>
           </a:xfrm>
           <a:prstGeom prst="ellipse">
             <a:avLst/>
@@ -20147,7 +22423,7 @@
           <a:p>
             <a:pPr algn="ctr"/>
             <a:r>
-              <a:rPr sz="1600" b="1">
+              <a:rPr sz="1400" b="1">
                 <a:solidFill>
                   <a:srgbClr val="FFFFFF"/>
                 </a:solidFill>
@@ -20166,8 +22442,8 @@
         </p:nvSpPr>
         <p:spPr>
           <a:xfrm>
-            <a:off x="1450000" y="2567500"/>
-            <a:ext cx="10050000" cy="1147500"/>
+            <a:off x="1380000" y="3063260"/>
+            <a:ext cx="10150000" cy="1423480"/>
           </a:xfrm>
           <a:prstGeom prst="rect">
             <a:avLst/>
@@ -20175,20 +22451,35 @@
           <a:noFill/>
         </p:spPr>
         <p:txBody>
-          <a:bodyPr wrap="square" anchor="ctr" lIns="50800" rIns="50800">
+          <a:bodyPr wrap="square" anchor="ctr">
             <a:spAutoFit/>
           </a:bodyPr>
           <a:lstStyle/>
           <a:p>
-            <a:pPr algn="l"/>
             <a:r>
-              <a:rPr sz="1400" b="0">
+              <a:rPr sz="1500" b="1">
                 <a:solidFill>
-                  <a:srgbClr val="1B2430"/>
+                  <a:srgbClr val="1F3A5F"/>
                 </a:solidFill>
                 <a:latin typeface="Calibri"/>
               </a:rPr>
-              <a:t>Inferens ikki fazadan iborat. Prefill — promptning barcha tokenlarini bir vaqtda qayta ishlash: n_prompt tokenli prompt uchun 2 · P · n_prompt FLOP, katta matritsalar, compute-bound; u…</a:t>
+              <a:t>Inferens ikki fazadan iborat.</a:t>
+            </a:r>
+          </a:p>
+          <a:p>
+            <a:pPr>
+              <a:spcBef>
+                <a:spcPts val="400"/>
+              </a:spcBef>
+            </a:pPr>
+            <a:r>
+              <a:rPr sz="1400">
+                <a:solidFill>
+                  <a:srgbClr val="334055"/>
+                </a:solidFill>
+                <a:latin typeface="Calibri"/>
+              </a:rPr>
+              <a:t>Prefill — promptning barcha tokenlarini bir vaqtda qayta ishlash: n_prompt tokenli prompt uchun 2 · P · n_prompt FLOP, katta matritsalar, compute-bound; u birinchi tokengacha vaqtni (TTFT) belgilaydi. Decode — har qadamda bitta token generatsiya: 2P FLOP, lekin barcha og'irliklar (2P bayt FP16'da) va KV-kesh o'qiladi, memory-bound; u tokenlar orasidagi vaqtni belgilaydi.</a:t>
             </a:r>
           </a:p>
         </p:txBody>
@@ -20201,12 +22492,12 @@
         </p:nvSpPr>
         <p:spPr>
           <a:xfrm>
-            <a:off x="550000" y="3835000"/>
-            <a:ext cx="11100000" cy="1147500"/>
+            <a:off x="550000" y="4636740"/>
+            <a:ext cx="11100000" cy="1503480"/>
           </a:xfrm>
           <a:prstGeom prst="roundRect">
             <a:avLst>
-              <a:gd name="adj" fmla="val 18000"/>
+              <a:gd name="adj" fmla="val 8000"/>
             </a:avLst>
           </a:prstGeom>
           <a:solidFill>
@@ -20247,8 +22538,8 @@
         </p:nvSpPr>
         <p:spPr>
           <a:xfrm>
-            <a:off x="550000" y="3835000"/>
-            <a:ext cx="70000" cy="1147500"/>
+            <a:off x="550000" y="4636740"/>
+            <a:ext cx="70000" cy="1503480"/>
           </a:xfrm>
           <a:prstGeom prst="rect">
             <a:avLst/>
@@ -20291,8 +22582,8 @@
         </p:nvSpPr>
         <p:spPr>
           <a:xfrm>
-            <a:off x="800000" y="4178750"/>
-            <a:ext cx="460000" cy="460000"/>
+            <a:off x="780000" y="5178480"/>
+            <a:ext cx="420000" cy="420000"/>
           </a:xfrm>
           <a:prstGeom prst="ellipse">
             <a:avLst/>
@@ -20325,7 +22616,7 @@
           <a:p>
             <a:pPr algn="ctr"/>
             <a:r>
-              <a:rPr sz="1600" b="1">
+              <a:rPr sz="1400" b="1">
                 <a:solidFill>
                   <a:srgbClr val="FFFFFF"/>
                 </a:solidFill>
@@ -20344,8 +22635,8 @@
         </p:nvSpPr>
         <p:spPr>
           <a:xfrm>
-            <a:off x="1450000" y="3835000"/>
-            <a:ext cx="10050000" cy="1147500"/>
+            <a:off x="1380000" y="4676740"/>
+            <a:ext cx="10150000" cy="1423480"/>
           </a:xfrm>
           <a:prstGeom prst="rect">
             <a:avLst/>
@@ -20353,198 +22644,35 @@
           <a:noFill/>
         </p:spPr>
         <p:txBody>
-          <a:bodyPr wrap="square" anchor="ctr" lIns="50800" rIns="50800">
+          <a:bodyPr wrap="square" anchor="ctr">
             <a:spAutoFit/>
           </a:bodyPr>
           <a:lstStyle/>
           <a:p>
-            <a:pPr algn="l"/>
             <a:r>
-              <a:rPr sz="1400" b="0">
+              <a:rPr sz="1500" b="1">
                 <a:solidFill>
-                  <a:srgbClr val="1B2430"/>
+                  <a:srgbClr val="1F3A5F"/>
                 </a:solidFill>
                 <a:latin typeface="Calibri"/>
               </a:rPr>
               <a:t>KV-kesh — dekodlashda har qadamda oldingi tokenlarning K va V vektorlarini qayta hisoblamaslik uchun saqlanadigan xotira.</a:t>
             </a:r>
           </a:p>
-        </p:txBody>
-      </p:sp>
-      <p:sp>
-        <p:nvSpPr>
-          <p:cNvPr id="22" name="Rounded Rectangle 21"/>
-          <p:cNvSpPr/>
-          <p:nvPr/>
-        </p:nvSpPr>
-        <p:spPr>
-          <a:xfrm>
-            <a:off x="550000" y="5102500"/>
-            <a:ext cx="11100000" cy="1147500"/>
-          </a:xfrm>
-          <a:prstGeom prst="roundRect">
-            <a:avLst>
-              <a:gd name="adj" fmla="val 18000"/>
-            </a:avLst>
-          </a:prstGeom>
-          <a:solidFill>
-            <a:srgbClr val="F5F8FC"/>
-          </a:solidFill>
-          <a:ln>
-            <a:noFill/>
-          </a:ln>
-          <a:effectLst/>
-        </p:spPr>
-        <p:style>
-          <a:lnRef idx="1">
-            <a:schemeClr val="accent1"/>
-          </a:lnRef>
-          <a:fillRef idx="3">
-            <a:schemeClr val="accent1"/>
-          </a:fillRef>
-          <a:effectRef idx="2">
-            <a:schemeClr val="accent1"/>
-          </a:effectRef>
-          <a:fontRef idx="minor">
-            <a:schemeClr val="lt1"/>
-          </a:fontRef>
-        </p:style>
-        <p:txBody>
-          <a:bodyPr rtlCol="0" anchor="ctr"/>
-          <a:lstStyle/>
-          <a:p>
-            <a:pPr algn="ctr"/>
-          </a:p>
-        </p:txBody>
-      </p:sp>
-      <p:sp>
-        <p:nvSpPr>
-          <p:cNvPr id="23" name="Rectangle 22"/>
-          <p:cNvSpPr/>
-          <p:nvPr/>
-        </p:nvSpPr>
-        <p:spPr>
-          <a:xfrm>
-            <a:off x="550000" y="5102500"/>
-            <a:ext cx="70000" cy="1147500"/>
-          </a:xfrm>
-          <a:prstGeom prst="rect">
-            <a:avLst/>
-          </a:prstGeom>
-          <a:solidFill>
-            <a:srgbClr val="B7791F"/>
-          </a:solidFill>
-          <a:ln>
-            <a:noFill/>
-          </a:ln>
-          <a:effectLst/>
-        </p:spPr>
-        <p:style>
-          <a:lnRef idx="1">
-            <a:schemeClr val="accent1"/>
-          </a:lnRef>
-          <a:fillRef idx="3">
-            <a:schemeClr val="accent1"/>
-          </a:fillRef>
-          <a:effectRef idx="2">
-            <a:schemeClr val="accent1"/>
-          </a:effectRef>
-          <a:fontRef idx="minor">
-            <a:schemeClr val="lt1"/>
-          </a:fontRef>
-        </p:style>
-        <p:txBody>
-          <a:bodyPr rtlCol="0" anchor="ctr"/>
-          <a:lstStyle/>
-          <a:p>
-            <a:pPr algn="ctr"/>
-          </a:p>
-        </p:txBody>
-      </p:sp>
-      <p:sp>
-        <p:nvSpPr>
-          <p:cNvPr id="24" name="Oval 23"/>
-          <p:cNvSpPr/>
-          <p:nvPr/>
-        </p:nvSpPr>
-        <p:spPr>
-          <a:xfrm>
-            <a:off x="800000" y="5446250"/>
-            <a:ext cx="460000" cy="460000"/>
-          </a:xfrm>
-          <a:prstGeom prst="ellipse">
-            <a:avLst/>
-          </a:prstGeom>
-          <a:solidFill>
-            <a:srgbClr val="B7791F"/>
-          </a:solidFill>
-          <a:ln>
-            <a:noFill/>
-          </a:ln>
-          <a:effectLst/>
-        </p:spPr>
-        <p:style>
-          <a:lnRef idx="1">
-            <a:schemeClr val="accent1"/>
-          </a:lnRef>
-          <a:fillRef idx="3">
-            <a:schemeClr val="accent1"/>
-          </a:fillRef>
-          <a:effectRef idx="2">
-            <a:schemeClr val="accent1"/>
-          </a:effectRef>
-          <a:fontRef idx="minor">
-            <a:schemeClr val="lt1"/>
-          </a:fontRef>
-        </p:style>
-        <p:txBody>
-          <a:bodyPr rtlCol="0" anchor="ctr" lIns="0" rIns="0"/>
-          <a:lstStyle/>
-          <a:p>
-            <a:pPr algn="ctr"/>
+          <a:p>
+            <a:pPr>
+              <a:spcBef>
+                <a:spcPts val="400"/>
+              </a:spcBef>
+            </a:pPr>
             <a:r>
-              <a:rPr sz="1600" b="1">
+              <a:rPr sz="1400">
                 <a:solidFill>
-                  <a:srgbClr val="FFFFFF"/>
+                  <a:srgbClr val="334055"/>
                 </a:solidFill>
                 <a:latin typeface="Calibri"/>
               </a:rPr>
-              <a:t>4</a:t>
-            </a:r>
-          </a:p>
-        </p:txBody>
-      </p:sp>
-      <p:sp>
-        <p:nvSpPr>
-          <p:cNvPr id="25" name="TextBox 24"/>
-          <p:cNvSpPr txBox="1"/>
-          <p:nvPr/>
-        </p:nvSpPr>
-        <p:spPr>
-          <a:xfrm>
-            <a:off x="1450000" y="5102500"/>
-            <a:ext cx="10050000" cy="1147500"/>
-          </a:xfrm>
-          <a:prstGeom prst="rect">
-            <a:avLst/>
-          </a:prstGeom>
-          <a:noFill/>
-        </p:spPr>
-        <p:txBody>
-          <a:bodyPr wrap="square" anchor="ctr" lIns="50800" rIns="50800">
-            <a:spAutoFit/>
-          </a:bodyPr>
-          <a:lstStyle/>
-          <a:p>
-            <a:pPr algn="l"/>
-            <a:r>
-              <a:rPr sz="1400" b="0">
-                <a:solidFill>
-                  <a:srgbClr val="1B2430"/>
-                </a:solidFill>
-                <a:latin typeface="Calibri"/>
-              </a:rPr>
-              <a:t>Ikkinchi asosiy optimallashtirish — uzluksiz partiyalash (continuous batching, Orca tizimidan): partiya butun so'rovlar darajasida emas, iteratsiya darajasida tuziladi; bitta ketma-ketlik…</a:t>
+              <a:t>Token boshiga hajmi: 2 · L · n_kv_heads · d_head · bayt. Llama 2 7B (MHA, 32 bosh): 2 · 32 · 32 · 128 · 2 = 512 KB/token; Llama 3.1 8B (GQA, 8 bosh): 2 · 32 · 8 · 128 · 2 = 128 KB/token; Llama 3.1 70B: 2 · 80 · 8 · 128 · 2 = 320 KB/token.</a:t>
             </a:r>
           </a:p>
         </p:txBody>
@@ -20566,7 +22694,7 @@
               <p:cTn id="2" dur="indefinite" nodeType="mainSeq">
                 <p:childTnLst>
                   <p:par>
-                    <p:cTn id="103" fill="hold">
+                    <p:cTn id="79" fill="hold">
                       <p:stCondLst>
                         <p:cond delay="indefinite"/>
                         <p:cond evt="onBegin" delay="0">
@@ -21674,366 +23802,6 @@
                                         <p:cTn id="78" dur="550" fill="hold"/>
                                         <p:tgtEl>
                                           <p:spTgt spid="21"/>
-                                        </p:tgtEl>
-                                        <p:attrNameLst>
-                                          <p:attrName>ppt_y</p:attrName>
-                                        </p:attrNameLst>
-                                      </p:cBhvr>
-                                      <p:tavLst>
-                                        <p:tav tm="0">
-                                          <p:val>
-                                            <p:strVal val="#ppt_y+.08"/>
-                                          </p:val>
-                                        </p:tav>
-                                        <p:tav tm="100000">
-                                          <p:val>
-                                            <p:strVal val="#ppt_y"/>
-                                          </p:val>
-                                        </p:tav>
-                                      </p:tavLst>
-                                    </p:anim>
-                                  </p:childTnLst>
-                                </p:cTn>
-                              </p:par>
-                            </p:childTnLst>
-                          </p:cTn>
-                        </p:par>
-                        <p:par>
-                          <p:cTn id="79" fill="hold">
-                            <p:stCondLst>
-                              <p:cond delay="880"/>
-                            </p:stCondLst>
-                            <p:childTnLst>
-                              <p:par>
-                                <p:cTn id="80" presetID="42" presetClass="entr" presetSubtype="0" fill="hold" grpId="0" nodeType="afterEffect">
-                                  <p:stCondLst>
-                                    <p:cond delay="0"/>
-                                  </p:stCondLst>
-                                  <p:childTnLst>
-                                    <p:set>
-                                      <p:cBhvr>
-                                        <p:cTn id="81" dur="1" fill="hold">
-                                          <p:stCondLst>
-                                            <p:cond delay="0"/>
-                                          </p:stCondLst>
-                                        </p:cTn>
-                                        <p:tgtEl>
-                                          <p:spTgt spid="22"/>
-                                        </p:tgtEl>
-                                        <p:attrNameLst>
-                                          <p:attrName>style.visibility</p:attrName>
-                                        </p:attrNameLst>
-                                      </p:cBhvr>
-                                      <p:to>
-                                        <p:strVal val="visible"/>
-                                      </p:to>
-                                    </p:set>
-                                    <p:animEffect transition="in" filter="fade">
-                                      <p:cBhvr>
-                                        <p:cTn id="82" dur="550"/>
-                                        <p:tgtEl>
-                                          <p:spTgt spid="22"/>
-                                        </p:tgtEl>
-                                      </p:cBhvr>
-                                    </p:animEffect>
-                                    <p:anim calcmode="lin" valueType="num">
-                                      <p:cBhvr additive="base">
-                                        <p:cTn id="83" dur="550" fill="hold"/>
-                                        <p:tgtEl>
-                                          <p:spTgt spid="22"/>
-                                        </p:tgtEl>
-                                        <p:attrNameLst>
-                                          <p:attrName>ppt_x</p:attrName>
-                                        </p:attrNameLst>
-                                      </p:cBhvr>
-                                      <p:tavLst>
-                                        <p:tav tm="0">
-                                          <p:val>
-                                            <p:strVal val="#ppt_x"/>
-                                          </p:val>
-                                        </p:tav>
-                                        <p:tav tm="100000">
-                                          <p:val>
-                                            <p:strVal val="#ppt_x"/>
-                                          </p:val>
-                                        </p:tav>
-                                      </p:tavLst>
-                                    </p:anim>
-                                    <p:anim calcmode="lin" valueType="num">
-                                      <p:cBhvr additive="base">
-                                        <p:cTn id="84" dur="550" fill="hold"/>
-                                        <p:tgtEl>
-                                          <p:spTgt spid="22"/>
-                                        </p:tgtEl>
-                                        <p:attrNameLst>
-                                          <p:attrName>ppt_y</p:attrName>
-                                        </p:attrNameLst>
-                                      </p:cBhvr>
-                                      <p:tavLst>
-                                        <p:tav tm="0">
-                                          <p:val>
-                                            <p:strVal val="#ppt_y+.08"/>
-                                          </p:val>
-                                        </p:tav>
-                                        <p:tav tm="100000">
-                                          <p:val>
-                                            <p:strVal val="#ppt_y"/>
-                                          </p:val>
-                                        </p:tav>
-                                      </p:tavLst>
-                                    </p:anim>
-                                  </p:childTnLst>
-                                </p:cTn>
-                              </p:par>
-                            </p:childTnLst>
-                          </p:cTn>
-                        </p:par>
-                        <p:par>
-                          <p:cTn id="85" fill="hold">
-                            <p:stCondLst>
-                              <p:cond delay="880"/>
-                            </p:stCondLst>
-                            <p:childTnLst>
-                              <p:par>
-                                <p:cTn id="86" presetID="42" presetClass="entr" presetSubtype="0" fill="hold" grpId="0" nodeType="afterEffect">
-                                  <p:stCondLst>
-                                    <p:cond delay="0"/>
-                                  </p:stCondLst>
-                                  <p:childTnLst>
-                                    <p:set>
-                                      <p:cBhvr>
-                                        <p:cTn id="87" dur="1" fill="hold">
-                                          <p:stCondLst>
-                                            <p:cond delay="0"/>
-                                          </p:stCondLst>
-                                        </p:cTn>
-                                        <p:tgtEl>
-                                          <p:spTgt spid="23"/>
-                                        </p:tgtEl>
-                                        <p:attrNameLst>
-                                          <p:attrName>style.visibility</p:attrName>
-                                        </p:attrNameLst>
-                                      </p:cBhvr>
-                                      <p:to>
-                                        <p:strVal val="visible"/>
-                                      </p:to>
-                                    </p:set>
-                                    <p:animEffect transition="in" filter="fade">
-                                      <p:cBhvr>
-                                        <p:cTn id="88" dur="550"/>
-                                        <p:tgtEl>
-                                          <p:spTgt spid="23"/>
-                                        </p:tgtEl>
-                                      </p:cBhvr>
-                                    </p:animEffect>
-                                    <p:anim calcmode="lin" valueType="num">
-                                      <p:cBhvr additive="base">
-                                        <p:cTn id="89" dur="550" fill="hold"/>
-                                        <p:tgtEl>
-                                          <p:spTgt spid="23"/>
-                                        </p:tgtEl>
-                                        <p:attrNameLst>
-                                          <p:attrName>ppt_x</p:attrName>
-                                        </p:attrNameLst>
-                                      </p:cBhvr>
-                                      <p:tavLst>
-                                        <p:tav tm="0">
-                                          <p:val>
-                                            <p:strVal val="#ppt_x"/>
-                                          </p:val>
-                                        </p:tav>
-                                        <p:tav tm="100000">
-                                          <p:val>
-                                            <p:strVal val="#ppt_x"/>
-                                          </p:val>
-                                        </p:tav>
-                                      </p:tavLst>
-                                    </p:anim>
-                                    <p:anim calcmode="lin" valueType="num">
-                                      <p:cBhvr additive="base">
-                                        <p:cTn id="90" dur="550" fill="hold"/>
-                                        <p:tgtEl>
-                                          <p:spTgt spid="23"/>
-                                        </p:tgtEl>
-                                        <p:attrNameLst>
-                                          <p:attrName>ppt_y</p:attrName>
-                                        </p:attrNameLst>
-                                      </p:cBhvr>
-                                      <p:tavLst>
-                                        <p:tav tm="0">
-                                          <p:val>
-                                            <p:strVal val="#ppt_y+.08"/>
-                                          </p:val>
-                                        </p:tav>
-                                        <p:tav tm="100000">
-                                          <p:val>
-                                            <p:strVal val="#ppt_y"/>
-                                          </p:val>
-                                        </p:tav>
-                                      </p:tavLst>
-                                    </p:anim>
-                                  </p:childTnLst>
-                                </p:cTn>
-                              </p:par>
-                            </p:childTnLst>
-                          </p:cTn>
-                        </p:par>
-                        <p:par>
-                          <p:cTn id="91" fill="hold">
-                            <p:stCondLst>
-                              <p:cond delay="880"/>
-                            </p:stCondLst>
-                            <p:childTnLst>
-                              <p:par>
-                                <p:cTn id="92" presetID="53" presetClass="entr" presetSubtype="16" fill="hold" grpId="0" nodeType="afterEffect">
-                                  <p:stCondLst>
-                                    <p:cond delay="0"/>
-                                  </p:stCondLst>
-                                  <p:childTnLst>
-                                    <p:set>
-                                      <p:cBhvr>
-                                        <p:cTn id="93" dur="1" fill="hold">
-                                          <p:stCondLst>
-                                            <p:cond delay="0"/>
-                                          </p:stCondLst>
-                                        </p:cTn>
-                                        <p:tgtEl>
-                                          <p:spTgt spid="24"/>
-                                        </p:tgtEl>
-                                        <p:attrNameLst>
-                                          <p:attrName>style.visibility</p:attrName>
-                                        </p:attrNameLst>
-                                      </p:cBhvr>
-                                      <p:to>
-                                        <p:strVal val="visible"/>
-                                      </p:to>
-                                    </p:set>
-                                    <p:animEffect transition="in" filter="fade">
-                                      <p:cBhvr>
-                                        <p:cTn id="94" dur="550"/>
-                                        <p:tgtEl>
-                                          <p:spTgt spid="24"/>
-                                        </p:tgtEl>
-                                      </p:cBhvr>
-                                    </p:animEffect>
-                                    <p:anim calcmode="lin" valueType="num">
-                                      <p:cBhvr additive="base">
-                                        <p:cTn id="95" dur="550" fill="hold"/>
-                                        <p:tgtEl>
-                                          <p:spTgt spid="24"/>
-                                        </p:tgtEl>
-                                        <p:attrNameLst>
-                                          <p:attrName>ppt_w</p:attrName>
-                                        </p:attrNameLst>
-                                      </p:cBhvr>
-                                      <p:tavLst>
-                                        <p:tav tm="0">
-                                          <p:val>
-                                            <p:strVal val="0"/>
-                                          </p:val>
-                                        </p:tav>
-                                        <p:tav tm="100000">
-                                          <p:val>
-                                            <p:strVal val="#ppt_w"/>
-                                          </p:val>
-                                        </p:tav>
-                                      </p:tavLst>
-                                    </p:anim>
-                                    <p:anim calcmode="lin" valueType="num">
-                                      <p:cBhvr additive="base">
-                                        <p:cTn id="96" dur="550" fill="hold"/>
-                                        <p:tgtEl>
-                                          <p:spTgt spid="24"/>
-                                        </p:tgtEl>
-                                        <p:attrNameLst>
-                                          <p:attrName>ppt_h</p:attrName>
-                                        </p:attrNameLst>
-                                      </p:cBhvr>
-                                      <p:tavLst>
-                                        <p:tav tm="0">
-                                          <p:val>
-                                            <p:strVal val="0"/>
-                                          </p:val>
-                                        </p:tav>
-                                        <p:tav tm="100000">
-                                          <p:val>
-                                            <p:strVal val="#ppt_h"/>
-                                          </p:val>
-                                        </p:tav>
-                                      </p:tavLst>
-                                    </p:anim>
-                                  </p:childTnLst>
-                                </p:cTn>
-                              </p:par>
-                            </p:childTnLst>
-                          </p:cTn>
-                        </p:par>
-                        <p:par>
-                          <p:cTn id="97" fill="hold">
-                            <p:stCondLst>
-                              <p:cond delay="880"/>
-                            </p:stCondLst>
-                            <p:childTnLst>
-                              <p:par>
-                                <p:cTn id="98" presetID="42" presetClass="entr" presetSubtype="0" fill="hold" grpId="0" nodeType="afterEffect">
-                                  <p:stCondLst>
-                                    <p:cond delay="0"/>
-                                  </p:stCondLst>
-                                  <p:childTnLst>
-                                    <p:set>
-                                      <p:cBhvr>
-                                        <p:cTn id="99" dur="1" fill="hold">
-                                          <p:stCondLst>
-                                            <p:cond delay="0"/>
-                                          </p:stCondLst>
-                                        </p:cTn>
-                                        <p:tgtEl>
-                                          <p:spTgt spid="25"/>
-                                        </p:tgtEl>
-                                        <p:attrNameLst>
-                                          <p:attrName>style.visibility</p:attrName>
-                                        </p:attrNameLst>
-                                      </p:cBhvr>
-                                      <p:to>
-                                        <p:strVal val="visible"/>
-                                      </p:to>
-                                    </p:set>
-                                    <p:animEffect transition="in" filter="fade">
-                                      <p:cBhvr>
-                                        <p:cTn id="100" dur="550"/>
-                                        <p:tgtEl>
-                                          <p:spTgt spid="25"/>
-                                        </p:tgtEl>
-                                      </p:cBhvr>
-                                    </p:animEffect>
-                                    <p:anim calcmode="lin" valueType="num">
-                                      <p:cBhvr additive="base">
-                                        <p:cTn id="101" dur="550" fill="hold"/>
-                                        <p:tgtEl>
-                                          <p:spTgt spid="25"/>
-                                        </p:tgtEl>
-                                        <p:attrNameLst>
-                                          <p:attrName>ppt_x</p:attrName>
-                                        </p:attrNameLst>
-                                      </p:cBhvr>
-                                      <p:tavLst>
-                                        <p:tav tm="0">
-                                          <p:val>
-                                            <p:strVal val="#ppt_x"/>
-                                          </p:val>
-                                        </p:tav>
-                                        <p:tav tm="100000">
-                                          <p:val>
-                                            <p:strVal val="#ppt_x"/>
-                                          </p:val>
-                                        </p:tav>
-                                      </p:tavLst>
-                                    </p:anim>
-                                    <p:anim calcmode="lin" valueType="num">
-                                      <p:cBhvr additive="base">
-                                        <p:cTn id="102" dur="550" fill="hold"/>
-                                        <p:tgtEl>
-                                          <p:spTgt spid="25"/>
                                         </p:tgtEl>
                                         <p:attrNameLst>
                                           <p:attrName>ppt_y</p:attrName>
@@ -22096,10 +23864,6 @@
       <p:bldP spid="19" grpId="0" animBg="1"/>
       <p:bldP spid="20" grpId="0" animBg="1"/>
       <p:bldP spid="21" grpId="0" animBg="1"/>
-      <p:bldP spid="22" grpId="0" animBg="1"/>
-      <p:bldP spid="23" grpId="0" animBg="1"/>
-      <p:bldP spid="24" grpId="0" animBg="1"/>
-      <p:bldP spid="25" grpId="0" animBg="1"/>
     </p:bldLst>
   </p:timing>
 </p:sld>
@@ -22435,6 +24199,981 @@
                 <a:latin typeface="Calibri"/>
               </a:rPr>
               <a:t>7</a:t>
+            </a:r>
+          </a:p>
+        </p:txBody>
+      </p:sp>
+      <p:sp>
+        <p:nvSpPr>
+          <p:cNvPr id="10" name="Rounded Rectangle 9"/>
+          <p:cNvSpPr/>
+          <p:nvPr/>
+        </p:nvSpPr>
+        <p:spPr>
+          <a:xfrm>
+            <a:off x="550000" y="3182518"/>
+            <a:ext cx="11100000" cy="1184964"/>
+          </a:xfrm>
+          <a:prstGeom prst="roundRect">
+            <a:avLst>
+              <a:gd name="adj" fmla="val 8000"/>
+            </a:avLst>
+          </a:prstGeom>
+          <a:solidFill>
+            <a:srgbClr val="F5F8FC"/>
+          </a:solidFill>
+          <a:ln>
+            <a:noFill/>
+          </a:ln>
+          <a:effectLst/>
+        </p:spPr>
+        <p:style>
+          <a:lnRef idx="1">
+            <a:schemeClr val="accent1"/>
+          </a:lnRef>
+          <a:fillRef idx="3">
+            <a:schemeClr val="accent1"/>
+          </a:fillRef>
+          <a:effectRef idx="2">
+            <a:schemeClr val="accent1"/>
+          </a:effectRef>
+          <a:fontRef idx="minor">
+            <a:schemeClr val="lt1"/>
+          </a:fontRef>
+        </p:style>
+        <p:txBody>
+          <a:bodyPr rtlCol="0" anchor="ctr"/>
+          <a:lstStyle/>
+          <a:p>
+            <a:pPr algn="ctr"/>
+          </a:p>
+        </p:txBody>
+      </p:sp>
+      <p:sp>
+        <p:nvSpPr>
+          <p:cNvPr id="11" name="Rectangle 10"/>
+          <p:cNvSpPr/>
+          <p:nvPr/>
+        </p:nvSpPr>
+        <p:spPr>
+          <a:xfrm>
+            <a:off x="550000" y="3182518"/>
+            <a:ext cx="70000" cy="1184964"/>
+          </a:xfrm>
+          <a:prstGeom prst="rect">
+            <a:avLst/>
+          </a:prstGeom>
+          <a:solidFill>
+            <a:srgbClr val="B7791F"/>
+          </a:solidFill>
+          <a:ln>
+            <a:noFill/>
+          </a:ln>
+          <a:effectLst/>
+        </p:spPr>
+        <p:style>
+          <a:lnRef idx="1">
+            <a:schemeClr val="accent1"/>
+          </a:lnRef>
+          <a:fillRef idx="3">
+            <a:schemeClr val="accent1"/>
+          </a:fillRef>
+          <a:effectRef idx="2">
+            <a:schemeClr val="accent1"/>
+          </a:effectRef>
+          <a:fontRef idx="minor">
+            <a:schemeClr val="lt1"/>
+          </a:fontRef>
+        </p:style>
+        <p:txBody>
+          <a:bodyPr rtlCol="0" anchor="ctr"/>
+          <a:lstStyle/>
+          <a:p>
+            <a:pPr algn="ctr"/>
+          </a:p>
+        </p:txBody>
+      </p:sp>
+      <p:sp>
+        <p:nvSpPr>
+          <p:cNvPr id="12" name="Oval 11"/>
+          <p:cNvSpPr/>
+          <p:nvPr/>
+        </p:nvSpPr>
+        <p:spPr>
+          <a:xfrm>
+            <a:off x="780000" y="3565000"/>
+            <a:ext cx="420000" cy="420000"/>
+          </a:xfrm>
+          <a:prstGeom prst="ellipse">
+            <a:avLst/>
+          </a:prstGeom>
+          <a:solidFill>
+            <a:srgbClr val="B7791F"/>
+          </a:solidFill>
+          <a:ln>
+            <a:noFill/>
+          </a:ln>
+          <a:effectLst/>
+        </p:spPr>
+        <p:style>
+          <a:lnRef idx="1">
+            <a:schemeClr val="accent1"/>
+          </a:lnRef>
+          <a:fillRef idx="3">
+            <a:schemeClr val="accent1"/>
+          </a:fillRef>
+          <a:effectRef idx="2">
+            <a:schemeClr val="accent1"/>
+          </a:effectRef>
+          <a:fontRef idx="minor">
+            <a:schemeClr val="lt1"/>
+          </a:fontRef>
+        </p:style>
+        <p:txBody>
+          <a:bodyPr rtlCol="0" anchor="ctr" lIns="0" rIns="0"/>
+          <a:lstStyle/>
+          <a:p>
+            <a:pPr algn="ctr"/>
+            <a:r>
+              <a:rPr sz="1400" b="1">
+                <a:solidFill>
+                  <a:srgbClr val="FFFFFF"/>
+                </a:solidFill>
+                <a:latin typeface="Calibri"/>
+              </a:rPr>
+              <a:t>4</a:t>
+            </a:r>
+          </a:p>
+        </p:txBody>
+      </p:sp>
+      <p:sp>
+        <p:nvSpPr>
+          <p:cNvPr id="13" name="TextBox 12"/>
+          <p:cNvSpPr txBox="1"/>
+          <p:nvPr/>
+        </p:nvSpPr>
+        <p:spPr>
+          <a:xfrm>
+            <a:off x="1380000" y="3222518"/>
+            <a:ext cx="10150000" cy="1104964"/>
+          </a:xfrm>
+          <a:prstGeom prst="rect">
+            <a:avLst/>
+          </a:prstGeom>
+          <a:noFill/>
+        </p:spPr>
+        <p:txBody>
+          <a:bodyPr wrap="square" anchor="ctr">
+            <a:spAutoFit/>
+          </a:bodyPr>
+          <a:lstStyle/>
+          <a:p>
+            <a:r>
+              <a:rPr sz="1700" b="0">
+                <a:solidFill>
+                  <a:srgbClr val="1B2430"/>
+                </a:solidFill>
+                <a:latin typeface="Calibri"/>
+              </a:rPr>
+              <a:t>Ikkinchi asosiy optimallashtirish — uzluksiz partiyalash (continuous batching, Orca tizimidan): partiya butun so'rovlar darajasida emas, iteratsiya darajasida tuziladi; bitta ketma-ketlik tugashi bilan uning o'rnini navbatdagi so'rov egallaydi, GPU hech…</a:t>
+            </a:r>
+          </a:p>
+        </p:txBody>
+      </p:sp>
+    </p:spTree>
+  </p:cSld>
+  <p:clrMapOvr>
+    <a:masterClrMapping/>
+  </p:clrMapOvr>
+  <p:transition spd="med">
+    <p:fade/>
+  </p:transition>
+  <p:timing>
+    <p:tnLst>
+      <p:par>
+        <p:cTn id="1" dur="indefinite" restart="never" nodeType="tmRoot">
+          <p:childTnLst>
+            <p:seq concurrent="1" nextAc="seek">
+              <p:cTn id="2" dur="indefinite" nodeType="mainSeq">
+                <p:childTnLst>
+                  <p:par>
+                    <p:cTn id="31" fill="hold">
+                      <p:stCondLst>
+                        <p:cond delay="indefinite"/>
+                        <p:cond evt="onBegin" delay="0">
+                          <p:tn val="2"/>
+                        </p:cond>
+                      </p:stCondLst>
+                      <p:childTnLst>
+                        <p:par>
+                          <p:cTn id="3" fill="hold">
+                            <p:stCondLst>
+                              <p:cond delay="0"/>
+                            </p:stCondLst>
+                            <p:childTnLst>
+                              <p:par>
+                                <p:cTn id="4" presetID="10" presetClass="entr" presetSubtype="0" fill="hold" grpId="0" nodeType="withEffect">
+                                  <p:stCondLst>
+                                    <p:cond delay="0"/>
+                                  </p:stCondLst>
+                                  <p:childTnLst>
+                                    <p:set>
+                                      <p:cBhvr>
+                                        <p:cTn id="5" dur="1" fill="hold">
+                                          <p:stCondLst>
+                                            <p:cond delay="0"/>
+                                          </p:stCondLst>
+                                        </p:cTn>
+                                        <p:tgtEl>
+                                          <p:spTgt spid="6"/>
+                                        </p:tgtEl>
+                                        <p:attrNameLst>
+                                          <p:attrName>style.visibility</p:attrName>
+                                        </p:attrNameLst>
+                                      </p:cBhvr>
+                                      <p:to>
+                                        <p:strVal val="visible"/>
+                                      </p:to>
+                                    </p:set>
+                                    <p:animEffect transition="in" filter="fade">
+                                      <p:cBhvr>
+                                        <p:cTn id="6" dur="550"/>
+                                        <p:tgtEl>
+                                          <p:spTgt spid="6"/>
+                                        </p:tgtEl>
+                                      </p:cBhvr>
+                                    </p:animEffect>
+                                  </p:childTnLst>
+                                </p:cTn>
+                              </p:par>
+                            </p:childTnLst>
+                          </p:cTn>
+                        </p:par>
+                        <p:par>
+                          <p:cTn id="7" fill="hold">
+                            <p:stCondLst>
+                              <p:cond delay="220"/>
+                            </p:stCondLst>
+                            <p:childTnLst>
+                              <p:par>
+                                <p:cTn id="8" presetID="42" presetClass="entr" presetSubtype="0" fill="hold" grpId="0" nodeType="afterEffect">
+                                  <p:stCondLst>
+                                    <p:cond delay="0"/>
+                                  </p:stCondLst>
+                                  <p:childTnLst>
+                                    <p:set>
+                                      <p:cBhvr>
+                                        <p:cTn id="9" dur="1" fill="hold">
+                                          <p:stCondLst>
+                                            <p:cond delay="0"/>
+                                          </p:stCondLst>
+                                        </p:cTn>
+                                        <p:tgtEl>
+                                          <p:spTgt spid="10"/>
+                                        </p:tgtEl>
+                                        <p:attrNameLst>
+                                          <p:attrName>style.visibility</p:attrName>
+                                        </p:attrNameLst>
+                                      </p:cBhvr>
+                                      <p:to>
+                                        <p:strVal val="visible"/>
+                                      </p:to>
+                                    </p:set>
+                                    <p:animEffect transition="in" filter="fade">
+                                      <p:cBhvr>
+                                        <p:cTn id="10" dur="550"/>
+                                        <p:tgtEl>
+                                          <p:spTgt spid="10"/>
+                                        </p:tgtEl>
+                                      </p:cBhvr>
+                                    </p:animEffect>
+                                    <p:anim calcmode="lin" valueType="num">
+                                      <p:cBhvr additive="base">
+                                        <p:cTn id="11" dur="550" fill="hold"/>
+                                        <p:tgtEl>
+                                          <p:spTgt spid="10"/>
+                                        </p:tgtEl>
+                                        <p:attrNameLst>
+                                          <p:attrName>ppt_x</p:attrName>
+                                        </p:attrNameLst>
+                                      </p:cBhvr>
+                                      <p:tavLst>
+                                        <p:tav tm="0">
+                                          <p:val>
+                                            <p:strVal val="#ppt_x"/>
+                                          </p:val>
+                                        </p:tav>
+                                        <p:tav tm="100000">
+                                          <p:val>
+                                            <p:strVal val="#ppt_x"/>
+                                          </p:val>
+                                        </p:tav>
+                                      </p:tavLst>
+                                    </p:anim>
+                                    <p:anim calcmode="lin" valueType="num">
+                                      <p:cBhvr additive="base">
+                                        <p:cTn id="12" dur="550" fill="hold"/>
+                                        <p:tgtEl>
+                                          <p:spTgt spid="10"/>
+                                        </p:tgtEl>
+                                        <p:attrNameLst>
+                                          <p:attrName>ppt_y</p:attrName>
+                                        </p:attrNameLst>
+                                      </p:cBhvr>
+                                      <p:tavLst>
+                                        <p:tav tm="0">
+                                          <p:val>
+                                            <p:strVal val="#ppt_y+.08"/>
+                                          </p:val>
+                                        </p:tav>
+                                        <p:tav tm="100000">
+                                          <p:val>
+                                            <p:strVal val="#ppt_y"/>
+                                          </p:val>
+                                        </p:tav>
+                                      </p:tavLst>
+                                    </p:anim>
+                                  </p:childTnLst>
+                                </p:cTn>
+                              </p:par>
+                            </p:childTnLst>
+                          </p:cTn>
+                        </p:par>
+                        <p:par>
+                          <p:cTn id="13" fill="hold">
+                            <p:stCondLst>
+                              <p:cond delay="220"/>
+                            </p:stCondLst>
+                            <p:childTnLst>
+                              <p:par>
+                                <p:cTn id="14" presetID="42" presetClass="entr" presetSubtype="0" fill="hold" grpId="0" nodeType="afterEffect">
+                                  <p:stCondLst>
+                                    <p:cond delay="0"/>
+                                  </p:stCondLst>
+                                  <p:childTnLst>
+                                    <p:set>
+                                      <p:cBhvr>
+                                        <p:cTn id="15" dur="1" fill="hold">
+                                          <p:stCondLst>
+                                            <p:cond delay="0"/>
+                                          </p:stCondLst>
+                                        </p:cTn>
+                                        <p:tgtEl>
+                                          <p:spTgt spid="11"/>
+                                        </p:tgtEl>
+                                        <p:attrNameLst>
+                                          <p:attrName>style.visibility</p:attrName>
+                                        </p:attrNameLst>
+                                      </p:cBhvr>
+                                      <p:to>
+                                        <p:strVal val="visible"/>
+                                      </p:to>
+                                    </p:set>
+                                    <p:animEffect transition="in" filter="fade">
+                                      <p:cBhvr>
+                                        <p:cTn id="16" dur="550"/>
+                                        <p:tgtEl>
+                                          <p:spTgt spid="11"/>
+                                        </p:tgtEl>
+                                      </p:cBhvr>
+                                    </p:animEffect>
+                                    <p:anim calcmode="lin" valueType="num">
+                                      <p:cBhvr additive="base">
+                                        <p:cTn id="17" dur="550" fill="hold"/>
+                                        <p:tgtEl>
+                                          <p:spTgt spid="11"/>
+                                        </p:tgtEl>
+                                        <p:attrNameLst>
+                                          <p:attrName>ppt_x</p:attrName>
+                                        </p:attrNameLst>
+                                      </p:cBhvr>
+                                      <p:tavLst>
+                                        <p:tav tm="0">
+                                          <p:val>
+                                            <p:strVal val="#ppt_x"/>
+                                          </p:val>
+                                        </p:tav>
+                                        <p:tav tm="100000">
+                                          <p:val>
+                                            <p:strVal val="#ppt_x"/>
+                                          </p:val>
+                                        </p:tav>
+                                      </p:tavLst>
+                                    </p:anim>
+                                    <p:anim calcmode="lin" valueType="num">
+                                      <p:cBhvr additive="base">
+                                        <p:cTn id="18" dur="550" fill="hold"/>
+                                        <p:tgtEl>
+                                          <p:spTgt spid="11"/>
+                                        </p:tgtEl>
+                                        <p:attrNameLst>
+                                          <p:attrName>ppt_y</p:attrName>
+                                        </p:attrNameLst>
+                                      </p:cBhvr>
+                                      <p:tavLst>
+                                        <p:tav tm="0">
+                                          <p:val>
+                                            <p:strVal val="#ppt_y+.08"/>
+                                          </p:val>
+                                        </p:tav>
+                                        <p:tav tm="100000">
+                                          <p:val>
+                                            <p:strVal val="#ppt_y"/>
+                                          </p:val>
+                                        </p:tav>
+                                      </p:tavLst>
+                                    </p:anim>
+                                  </p:childTnLst>
+                                </p:cTn>
+                              </p:par>
+                            </p:childTnLst>
+                          </p:cTn>
+                        </p:par>
+                        <p:par>
+                          <p:cTn id="19" fill="hold">
+                            <p:stCondLst>
+                              <p:cond delay="220"/>
+                            </p:stCondLst>
+                            <p:childTnLst>
+                              <p:par>
+                                <p:cTn id="20" presetID="53" presetClass="entr" presetSubtype="16" fill="hold" grpId="0" nodeType="afterEffect">
+                                  <p:stCondLst>
+                                    <p:cond delay="0"/>
+                                  </p:stCondLst>
+                                  <p:childTnLst>
+                                    <p:set>
+                                      <p:cBhvr>
+                                        <p:cTn id="21" dur="1" fill="hold">
+                                          <p:stCondLst>
+                                            <p:cond delay="0"/>
+                                          </p:stCondLst>
+                                        </p:cTn>
+                                        <p:tgtEl>
+                                          <p:spTgt spid="12"/>
+                                        </p:tgtEl>
+                                        <p:attrNameLst>
+                                          <p:attrName>style.visibility</p:attrName>
+                                        </p:attrNameLst>
+                                      </p:cBhvr>
+                                      <p:to>
+                                        <p:strVal val="visible"/>
+                                      </p:to>
+                                    </p:set>
+                                    <p:animEffect transition="in" filter="fade">
+                                      <p:cBhvr>
+                                        <p:cTn id="22" dur="550"/>
+                                        <p:tgtEl>
+                                          <p:spTgt spid="12"/>
+                                        </p:tgtEl>
+                                      </p:cBhvr>
+                                    </p:animEffect>
+                                    <p:anim calcmode="lin" valueType="num">
+                                      <p:cBhvr additive="base">
+                                        <p:cTn id="23" dur="550" fill="hold"/>
+                                        <p:tgtEl>
+                                          <p:spTgt spid="12"/>
+                                        </p:tgtEl>
+                                        <p:attrNameLst>
+                                          <p:attrName>ppt_w</p:attrName>
+                                        </p:attrNameLst>
+                                      </p:cBhvr>
+                                      <p:tavLst>
+                                        <p:tav tm="0">
+                                          <p:val>
+                                            <p:strVal val="0"/>
+                                          </p:val>
+                                        </p:tav>
+                                        <p:tav tm="100000">
+                                          <p:val>
+                                            <p:strVal val="#ppt_w"/>
+                                          </p:val>
+                                        </p:tav>
+                                      </p:tavLst>
+                                    </p:anim>
+                                    <p:anim calcmode="lin" valueType="num">
+                                      <p:cBhvr additive="base">
+                                        <p:cTn id="24" dur="550" fill="hold"/>
+                                        <p:tgtEl>
+                                          <p:spTgt spid="12"/>
+                                        </p:tgtEl>
+                                        <p:attrNameLst>
+                                          <p:attrName>ppt_h</p:attrName>
+                                        </p:attrNameLst>
+                                      </p:cBhvr>
+                                      <p:tavLst>
+                                        <p:tav tm="0">
+                                          <p:val>
+                                            <p:strVal val="0"/>
+                                          </p:val>
+                                        </p:tav>
+                                        <p:tav tm="100000">
+                                          <p:val>
+                                            <p:strVal val="#ppt_h"/>
+                                          </p:val>
+                                        </p:tav>
+                                      </p:tavLst>
+                                    </p:anim>
+                                  </p:childTnLst>
+                                </p:cTn>
+                              </p:par>
+                            </p:childTnLst>
+                          </p:cTn>
+                        </p:par>
+                        <p:par>
+                          <p:cTn id="25" fill="hold">
+                            <p:stCondLst>
+                              <p:cond delay="220"/>
+                            </p:stCondLst>
+                            <p:childTnLst>
+                              <p:par>
+                                <p:cTn id="26" presetID="42" presetClass="entr" presetSubtype="0" fill="hold" grpId="0" nodeType="afterEffect">
+                                  <p:stCondLst>
+                                    <p:cond delay="0"/>
+                                  </p:stCondLst>
+                                  <p:childTnLst>
+                                    <p:set>
+                                      <p:cBhvr>
+                                        <p:cTn id="27" dur="1" fill="hold">
+                                          <p:stCondLst>
+                                            <p:cond delay="0"/>
+                                          </p:stCondLst>
+                                        </p:cTn>
+                                        <p:tgtEl>
+                                          <p:spTgt spid="13"/>
+                                        </p:tgtEl>
+                                        <p:attrNameLst>
+                                          <p:attrName>style.visibility</p:attrName>
+                                        </p:attrNameLst>
+                                      </p:cBhvr>
+                                      <p:to>
+                                        <p:strVal val="visible"/>
+                                      </p:to>
+                                    </p:set>
+                                    <p:animEffect transition="in" filter="fade">
+                                      <p:cBhvr>
+                                        <p:cTn id="28" dur="550"/>
+                                        <p:tgtEl>
+                                          <p:spTgt spid="13"/>
+                                        </p:tgtEl>
+                                      </p:cBhvr>
+                                    </p:animEffect>
+                                    <p:anim calcmode="lin" valueType="num">
+                                      <p:cBhvr additive="base">
+                                        <p:cTn id="29" dur="550" fill="hold"/>
+                                        <p:tgtEl>
+                                          <p:spTgt spid="13"/>
+                                        </p:tgtEl>
+                                        <p:attrNameLst>
+                                          <p:attrName>ppt_x</p:attrName>
+                                        </p:attrNameLst>
+                                      </p:cBhvr>
+                                      <p:tavLst>
+                                        <p:tav tm="0">
+                                          <p:val>
+                                            <p:strVal val="#ppt_x"/>
+                                          </p:val>
+                                        </p:tav>
+                                        <p:tav tm="100000">
+                                          <p:val>
+                                            <p:strVal val="#ppt_x"/>
+                                          </p:val>
+                                        </p:tav>
+                                      </p:tavLst>
+                                    </p:anim>
+                                    <p:anim calcmode="lin" valueType="num">
+                                      <p:cBhvr additive="base">
+                                        <p:cTn id="30" dur="550" fill="hold"/>
+                                        <p:tgtEl>
+                                          <p:spTgt spid="13"/>
+                                        </p:tgtEl>
+                                        <p:attrNameLst>
+                                          <p:attrName>ppt_y</p:attrName>
+                                        </p:attrNameLst>
+                                      </p:cBhvr>
+                                      <p:tavLst>
+                                        <p:tav tm="0">
+                                          <p:val>
+                                            <p:strVal val="#ppt_y+.08"/>
+                                          </p:val>
+                                        </p:tav>
+                                        <p:tav tm="100000">
+                                          <p:val>
+                                            <p:strVal val="#ppt_y"/>
+                                          </p:val>
+                                        </p:tav>
+                                      </p:tavLst>
+                                    </p:anim>
+                                  </p:childTnLst>
+                                </p:cTn>
+                              </p:par>
+                            </p:childTnLst>
+                          </p:cTn>
+                        </p:par>
+                      </p:childTnLst>
+                    </p:cTn>
+                  </p:par>
+                </p:childTnLst>
+              </p:cTn>
+              <p:prevCondLst>
+                <p:cond evt="onPrev" delay="0">
+                  <p:tgtEl>
+                    <p:sldTgt/>
+                  </p:tgtEl>
+                </p:cond>
+              </p:prevCondLst>
+              <p:nextCondLst>
+                <p:cond evt="onNext" delay="0">
+                  <p:tgtEl>
+                    <p:sldTgt/>
+                  </p:tgtEl>
+                </p:cond>
+              </p:nextCondLst>
+            </p:seq>
+          </p:childTnLst>
+        </p:cTn>
+      </p:par>
+    </p:tnLst>
+    <p:bldLst>
+      <p:bldP spid="6" grpId="0" animBg="1"/>
+      <p:bldP spid="10" grpId="0" animBg="1"/>
+      <p:bldP spid="11" grpId="0" animBg="1"/>
+      <p:bldP spid="12" grpId="0" animBg="1"/>
+      <p:bldP spid="13" grpId="0" animBg="1"/>
+    </p:bldLst>
+  </p:timing>
+</p:sld>
+</file>
+
+<file path=ppt/slides/slide8.xml><?xml version="1.0" encoding="utf-8"?>
+<p:sld xmlns:a="http://schemas.openxmlformats.org/drawingml/2006/main" xmlns:p="http://schemas.openxmlformats.org/presentationml/2006/main" xmlns:r="http://schemas.openxmlformats.org/officeDocument/2006/relationships">
+  <p:cSld>
+    <p:spTree>
+      <p:nvGrpSpPr>
+        <p:cNvPr id="1" name=""/>
+        <p:cNvGrpSpPr/>
+        <p:nvPr/>
+      </p:nvGrpSpPr>
+      <p:grpSpPr/>
+      <p:sp>
+        <p:nvSpPr>
+          <p:cNvPr id="2" name="Rectangle 1"/>
+          <p:cNvSpPr/>
+          <p:nvPr/>
+        </p:nvSpPr>
+        <p:spPr>
+          <a:xfrm>
+            <a:off x="0" y="0"/>
+            <a:ext cx="12192000" cy="1000000"/>
+          </a:xfrm>
+          <a:prstGeom prst="rect">
+            <a:avLst/>
+          </a:prstGeom>
+          <a:gradFill rotWithShape="1">
+            <a:gsLst>
+              <a:gs pos="0">
+                <a:srgbClr val="1F3A5F"/>
+              </a:gs>
+              <a:gs pos="100000">
+                <a:srgbClr val="2D5C8F"/>
+              </a:gs>
+            </a:gsLst>
+            <a:lin scaled="0" ang="0"/>
+          </a:gradFill>
+          <a:ln>
+            <a:noFill/>
+          </a:ln>
+          <a:effectLst/>
+        </p:spPr>
+        <p:style>
+          <a:lnRef idx="1">
+            <a:schemeClr val="accent1"/>
+          </a:lnRef>
+          <a:fillRef idx="3">
+            <a:schemeClr val="accent1"/>
+          </a:fillRef>
+          <a:effectRef idx="2">
+            <a:schemeClr val="accent1"/>
+          </a:effectRef>
+          <a:fontRef idx="minor">
+            <a:schemeClr val="lt1"/>
+          </a:fontRef>
+        </p:style>
+        <p:txBody>
+          <a:bodyPr rtlCol="0" anchor="ctr"/>
+          <a:lstStyle/>
+          <a:p>
+            <a:pPr algn="ctr"/>
+          </a:p>
+        </p:txBody>
+      </p:sp>
+      <p:sp>
+        <p:nvSpPr>
+          <p:cNvPr id="3" name="Oval 2"/>
+          <p:cNvSpPr/>
+          <p:nvPr/>
+        </p:nvSpPr>
+        <p:spPr>
+          <a:xfrm>
+            <a:off x="11050000" y="-350000"/>
+            <a:ext cx="900000" cy="900000"/>
+          </a:xfrm>
+          <a:prstGeom prst="ellipse">
+            <a:avLst/>
+          </a:prstGeom>
+          <a:solidFill>
+            <a:srgbClr val="3B6EA5"/>
+          </a:solidFill>
+          <a:ln>
+            <a:noFill/>
+          </a:ln>
+          <a:effectLst/>
+        </p:spPr>
+        <p:style>
+          <a:lnRef idx="1">
+            <a:schemeClr val="accent1"/>
+          </a:lnRef>
+          <a:fillRef idx="3">
+            <a:schemeClr val="accent1"/>
+          </a:fillRef>
+          <a:effectRef idx="2">
+            <a:schemeClr val="accent1"/>
+          </a:effectRef>
+          <a:fontRef idx="minor">
+            <a:schemeClr val="lt1"/>
+          </a:fontRef>
+        </p:style>
+        <p:txBody>
+          <a:bodyPr rtlCol="0" anchor="ctr"/>
+          <a:lstStyle/>
+          <a:p>
+            <a:pPr algn="ctr"/>
+          </a:p>
+        </p:txBody>
+      </p:sp>
+      <p:sp>
+        <p:nvSpPr>
+          <p:cNvPr id="4" name="Oval 3"/>
+          <p:cNvSpPr/>
+          <p:nvPr/>
+        </p:nvSpPr>
+        <p:spPr>
+          <a:xfrm>
+            <a:off x="11550000" y="450000"/>
+            <a:ext cx="420000" cy="420000"/>
+          </a:xfrm>
+          <a:prstGeom prst="ellipse">
+            <a:avLst/>
+          </a:prstGeom>
+          <a:solidFill>
+            <a:srgbClr val="0F8B8D"/>
+          </a:solidFill>
+          <a:ln>
+            <a:noFill/>
+          </a:ln>
+          <a:effectLst/>
+        </p:spPr>
+        <p:style>
+          <a:lnRef idx="1">
+            <a:schemeClr val="accent1"/>
+          </a:lnRef>
+          <a:fillRef idx="3">
+            <a:schemeClr val="accent1"/>
+          </a:fillRef>
+          <a:effectRef idx="2">
+            <a:schemeClr val="accent1"/>
+          </a:effectRef>
+          <a:fontRef idx="minor">
+            <a:schemeClr val="lt1"/>
+          </a:fontRef>
+        </p:style>
+        <p:txBody>
+          <a:bodyPr rtlCol="0" anchor="ctr"/>
+          <a:lstStyle/>
+          <a:p>
+            <a:pPr algn="ctr"/>
+          </a:p>
+        </p:txBody>
+      </p:sp>
+      <p:sp>
+        <p:nvSpPr>
+          <p:cNvPr id="5" name="TextBox 4"/>
+          <p:cNvSpPr txBox="1"/>
+          <p:nvPr/>
+        </p:nvSpPr>
+        <p:spPr>
+          <a:xfrm>
+            <a:off x="500000" y="110000"/>
+            <a:ext cx="10300000" cy="300000"/>
+          </a:xfrm>
+          <a:prstGeom prst="rect">
+            <a:avLst/>
+          </a:prstGeom>
+          <a:noFill/>
+        </p:spPr>
+        <p:txBody>
+          <a:bodyPr wrap="square" anchor="t" lIns="50800" rIns="50800">
+            <a:spAutoFit/>
+          </a:bodyPr>
+          <a:lstStyle/>
+          <a:p>
+            <a:pPr algn="l"/>
+            <a:r>
+              <a:rPr sz="1200" b="1">
+                <a:solidFill>
+                  <a:srgbClr val="A9C4E6"/>
+                </a:solidFill>
+                <a:latin typeface="Calibri"/>
+              </a:rPr>
+              <a:t>2-REJA</a:t>
+            </a:r>
+          </a:p>
+        </p:txBody>
+      </p:sp>
+      <p:sp>
+        <p:nvSpPr>
+          <p:cNvPr id="6" name="TextBox 5"/>
+          <p:cNvSpPr txBox="1"/>
+          <p:nvPr/>
+        </p:nvSpPr>
+        <p:spPr>
+          <a:xfrm>
+            <a:off x="500000" y="330000"/>
+            <a:ext cx="10400000" cy="650000"/>
+          </a:xfrm>
+          <a:prstGeom prst="rect">
+            <a:avLst/>
+          </a:prstGeom>
+          <a:noFill/>
+        </p:spPr>
+        <p:txBody>
+          <a:bodyPr wrap="square" anchor="ctr" lIns="50800" rIns="50800">
+            <a:spAutoFit/>
+          </a:bodyPr>
+          <a:lstStyle/>
+          <a:p>
+            <a:pPr algn="l"/>
+            <a:r>
+              <a:rPr sz="2100" b="1">
+                <a:solidFill>
+                  <a:srgbClr val="FFFFFF"/>
+                </a:solidFill>
+                <a:latin typeface="Calibri"/>
+              </a:rPr>
+              <a:t>LLM o'qitish va inferens: masshtab, xotira va tizim optimallashtirishlari</a:t>
+            </a:r>
+          </a:p>
+        </p:txBody>
+      </p:sp>
+      <p:sp>
+        <p:nvSpPr>
+          <p:cNvPr id="7" name="Rectangle 6"/>
+          <p:cNvSpPr/>
+          <p:nvPr/>
+        </p:nvSpPr>
+        <p:spPr>
+          <a:xfrm>
+            <a:off x="0" y="1000000"/>
+            <a:ext cx="12192000" cy="45000"/>
+          </a:xfrm>
+          <a:prstGeom prst="rect">
+            <a:avLst/>
+          </a:prstGeom>
+          <a:solidFill>
+            <a:srgbClr val="0F8B8D"/>
+          </a:solidFill>
+          <a:ln>
+            <a:noFill/>
+          </a:ln>
+          <a:effectLst/>
+        </p:spPr>
+        <p:style>
+          <a:lnRef idx="1">
+            <a:schemeClr val="accent1"/>
+          </a:lnRef>
+          <a:fillRef idx="3">
+            <a:schemeClr val="accent1"/>
+          </a:fillRef>
+          <a:effectRef idx="2">
+            <a:schemeClr val="accent1"/>
+          </a:effectRef>
+          <a:fontRef idx="minor">
+            <a:schemeClr val="lt1"/>
+          </a:fontRef>
+        </p:style>
+        <p:txBody>
+          <a:bodyPr rtlCol="0" anchor="ctr"/>
+          <a:lstStyle/>
+          <a:p>
+            <a:pPr algn="ctr"/>
+          </a:p>
+        </p:txBody>
+      </p:sp>
+      <p:sp>
+        <p:nvSpPr>
+          <p:cNvPr id="8" name="TextBox 7"/>
+          <p:cNvSpPr txBox="1"/>
+          <p:nvPr/>
+        </p:nvSpPr>
+        <p:spPr>
+          <a:xfrm>
+            <a:off x="500000" y="6420000"/>
+            <a:ext cx="9500000" cy="300000"/>
+          </a:xfrm>
+          <a:prstGeom prst="rect">
+            <a:avLst/>
+          </a:prstGeom>
+          <a:noFill/>
+        </p:spPr>
+        <p:txBody>
+          <a:bodyPr wrap="square" anchor="t" lIns="50800" rIns="50800">
+            <a:spAutoFit/>
+          </a:bodyPr>
+          <a:lstStyle/>
+          <a:p>
+            <a:pPr algn="l"/>
+            <a:r>
+              <a:rPr sz="1000" b="0">
+                <a:solidFill>
+                  <a:srgbClr val="5B6878"/>
+                </a:solidFill>
+                <a:latin typeface="Calibri"/>
+              </a:rPr>
+              <a:t>M11 · Katta til modellari uchun kompyuter tizimlari va hisoblash infratuzilmasi</a:t>
+            </a:r>
+          </a:p>
+        </p:txBody>
+      </p:sp>
+      <p:sp>
+        <p:nvSpPr>
+          <p:cNvPr id="9" name="TextBox 8"/>
+          <p:cNvSpPr txBox="1"/>
+          <p:nvPr/>
+        </p:nvSpPr>
+        <p:spPr>
+          <a:xfrm>
+            <a:off x="10600000" y="6420000"/>
+            <a:ext cx="1100000" cy="300000"/>
+          </a:xfrm>
+          <a:prstGeom prst="rect">
+            <a:avLst/>
+          </a:prstGeom>
+          <a:noFill/>
+        </p:spPr>
+        <p:txBody>
+          <a:bodyPr wrap="square" anchor="t" lIns="50800" rIns="50800">
+            <a:spAutoFit/>
+          </a:bodyPr>
+          <a:lstStyle/>
+          <a:p>
+            <a:pPr algn="r"/>
+            <a:r>
+              <a:rPr sz="1000" b="0">
+                <a:solidFill>
+                  <a:srgbClr val="5B6878"/>
+                </a:solidFill>
+                <a:latin typeface="Calibri"/>
+              </a:rPr>
+              <a:t>8</a:t>
             </a:r>
           </a:p>
         </p:txBody>
@@ -23241,7 +25980,7 @@
 </p:sld>
 </file>
 
-<file path=ppt/slides/slide8.xml><?xml version="1.0" encoding="utf-8"?>
+<file path=ppt/slides/slide9.xml><?xml version="1.0" encoding="utf-8"?>
 <p:sld xmlns:a="http://schemas.openxmlformats.org/drawingml/2006/main" xmlns:p="http://schemas.openxmlformats.org/presentationml/2006/main" xmlns:r="http://schemas.openxmlformats.org/officeDocument/2006/relationships">
   <p:cSld>
     <p:spTree>
@@ -24148,2066 +26887,6 @@
       <p:bldP spid="8" grpId="0" animBg="1"/>
       <p:bldP spid="9" grpId="0" animBg="1"/>
       <p:bldP spid="10" grpId="0" animBg="1"/>
-    </p:bldLst>
-  </p:timing>
-</p:sld>
-</file>
-
-<file path=ppt/slides/slide9.xml><?xml version="1.0" encoding="utf-8"?>
-<p:sld xmlns:a="http://schemas.openxmlformats.org/drawingml/2006/main" xmlns:p="http://schemas.openxmlformats.org/presentationml/2006/main" xmlns:r="http://schemas.openxmlformats.org/officeDocument/2006/relationships">
-  <p:cSld>
-    <p:spTree>
-      <p:nvGrpSpPr>
-        <p:cNvPr id="1" name=""/>
-        <p:cNvGrpSpPr/>
-        <p:nvPr/>
-      </p:nvGrpSpPr>
-      <p:grpSpPr/>
-      <p:sp>
-        <p:nvSpPr>
-          <p:cNvPr id="2" name="Rectangle 1"/>
-          <p:cNvSpPr/>
-          <p:nvPr/>
-        </p:nvSpPr>
-        <p:spPr>
-          <a:xfrm>
-            <a:off x="0" y="0"/>
-            <a:ext cx="12192000" cy="1000000"/>
-          </a:xfrm>
-          <a:prstGeom prst="rect">
-            <a:avLst/>
-          </a:prstGeom>
-          <a:gradFill rotWithShape="1">
-            <a:gsLst>
-              <a:gs pos="0">
-                <a:srgbClr val="1F3A5F"/>
-              </a:gs>
-              <a:gs pos="100000">
-                <a:srgbClr val="2D5C8F"/>
-              </a:gs>
-            </a:gsLst>
-            <a:lin scaled="0" ang="0"/>
-          </a:gradFill>
-          <a:ln>
-            <a:noFill/>
-          </a:ln>
-          <a:effectLst/>
-        </p:spPr>
-        <p:style>
-          <a:lnRef idx="1">
-            <a:schemeClr val="accent1"/>
-          </a:lnRef>
-          <a:fillRef idx="3">
-            <a:schemeClr val="accent1"/>
-          </a:fillRef>
-          <a:effectRef idx="2">
-            <a:schemeClr val="accent1"/>
-          </a:effectRef>
-          <a:fontRef idx="minor">
-            <a:schemeClr val="lt1"/>
-          </a:fontRef>
-        </p:style>
-        <p:txBody>
-          <a:bodyPr rtlCol="0" anchor="ctr"/>
-          <a:lstStyle/>
-          <a:p>
-            <a:pPr algn="ctr"/>
-          </a:p>
-        </p:txBody>
-      </p:sp>
-      <p:sp>
-        <p:nvSpPr>
-          <p:cNvPr id="3" name="Oval 2"/>
-          <p:cNvSpPr/>
-          <p:nvPr/>
-        </p:nvSpPr>
-        <p:spPr>
-          <a:xfrm>
-            <a:off x="11050000" y="-350000"/>
-            <a:ext cx="900000" cy="900000"/>
-          </a:xfrm>
-          <a:prstGeom prst="ellipse">
-            <a:avLst/>
-          </a:prstGeom>
-          <a:solidFill>
-            <a:srgbClr val="3B6EA5"/>
-          </a:solidFill>
-          <a:ln>
-            <a:noFill/>
-          </a:ln>
-          <a:effectLst/>
-        </p:spPr>
-        <p:style>
-          <a:lnRef idx="1">
-            <a:schemeClr val="accent1"/>
-          </a:lnRef>
-          <a:fillRef idx="3">
-            <a:schemeClr val="accent1"/>
-          </a:fillRef>
-          <a:effectRef idx="2">
-            <a:schemeClr val="accent1"/>
-          </a:effectRef>
-          <a:fontRef idx="minor">
-            <a:schemeClr val="lt1"/>
-          </a:fontRef>
-        </p:style>
-        <p:txBody>
-          <a:bodyPr rtlCol="0" anchor="ctr"/>
-          <a:lstStyle/>
-          <a:p>
-            <a:pPr algn="ctr"/>
-          </a:p>
-        </p:txBody>
-      </p:sp>
-      <p:sp>
-        <p:nvSpPr>
-          <p:cNvPr id="4" name="Oval 3"/>
-          <p:cNvSpPr/>
-          <p:nvPr/>
-        </p:nvSpPr>
-        <p:spPr>
-          <a:xfrm>
-            <a:off x="11550000" y="450000"/>
-            <a:ext cx="420000" cy="420000"/>
-          </a:xfrm>
-          <a:prstGeom prst="ellipse">
-            <a:avLst/>
-          </a:prstGeom>
-          <a:solidFill>
-            <a:srgbClr val="0F8B8D"/>
-          </a:solidFill>
-          <a:ln>
-            <a:noFill/>
-          </a:ln>
-          <a:effectLst/>
-        </p:spPr>
-        <p:style>
-          <a:lnRef idx="1">
-            <a:schemeClr val="accent1"/>
-          </a:lnRef>
-          <a:fillRef idx="3">
-            <a:schemeClr val="accent1"/>
-          </a:fillRef>
-          <a:effectRef idx="2">
-            <a:schemeClr val="accent1"/>
-          </a:effectRef>
-          <a:fontRef idx="minor">
-            <a:schemeClr val="lt1"/>
-          </a:fontRef>
-        </p:style>
-        <p:txBody>
-          <a:bodyPr rtlCol="0" anchor="ctr"/>
-          <a:lstStyle/>
-          <a:p>
-            <a:pPr algn="ctr"/>
-          </a:p>
-        </p:txBody>
-      </p:sp>
-      <p:sp>
-        <p:nvSpPr>
-          <p:cNvPr id="5" name="TextBox 4"/>
-          <p:cNvSpPr txBox="1"/>
-          <p:nvPr/>
-        </p:nvSpPr>
-        <p:spPr>
-          <a:xfrm>
-            <a:off x="500000" y="110000"/>
-            <a:ext cx="10300000" cy="300000"/>
-          </a:xfrm>
-          <a:prstGeom prst="rect">
-            <a:avLst/>
-          </a:prstGeom>
-          <a:noFill/>
-        </p:spPr>
-        <p:txBody>
-          <a:bodyPr wrap="square" anchor="t" lIns="50800" rIns="50800">
-            <a:spAutoFit/>
-          </a:bodyPr>
-          <a:lstStyle/>
-          <a:p>
-            <a:pPr algn="l"/>
-            <a:r>
-              <a:rPr sz="1200" b="1">
-                <a:solidFill>
-                  <a:srgbClr val="A9C4E6"/>
-                </a:solidFill>
-                <a:latin typeface="Calibri"/>
-              </a:rPr>
-              <a:t>3-REJA</a:t>
-            </a:r>
-          </a:p>
-        </p:txBody>
-      </p:sp>
-      <p:sp>
-        <p:nvSpPr>
-          <p:cNvPr id="6" name="TextBox 5"/>
-          <p:cNvSpPr txBox="1"/>
-          <p:nvPr/>
-        </p:nvSpPr>
-        <p:spPr>
-          <a:xfrm>
-            <a:off x="500000" y="330000"/>
-            <a:ext cx="10400000" cy="650000"/>
-          </a:xfrm>
-          <a:prstGeom prst="rect">
-            <a:avLst/>
-          </a:prstGeom>
-          <a:noFill/>
-        </p:spPr>
-        <p:txBody>
-          <a:bodyPr wrap="square" anchor="ctr" lIns="50800" rIns="50800">
-            <a:spAutoFit/>
-          </a:bodyPr>
-          <a:lstStyle/>
-          <a:p>
-            <a:pPr algn="l"/>
-            <a:r>
-              <a:rPr sz="2600" b="1">
-                <a:solidFill>
-                  <a:srgbClr val="FFFFFF"/>
-                </a:solidFill>
-                <a:latin typeface="Calibri"/>
-              </a:rPr>
-              <a:t>Retrieval-Augmented Generation va vektor bazalar</a:t>
-            </a:r>
-          </a:p>
-        </p:txBody>
-      </p:sp>
-      <p:sp>
-        <p:nvSpPr>
-          <p:cNvPr id="7" name="Rectangle 6"/>
-          <p:cNvSpPr/>
-          <p:nvPr/>
-        </p:nvSpPr>
-        <p:spPr>
-          <a:xfrm>
-            <a:off x="0" y="1000000"/>
-            <a:ext cx="12192000" cy="45000"/>
-          </a:xfrm>
-          <a:prstGeom prst="rect">
-            <a:avLst/>
-          </a:prstGeom>
-          <a:solidFill>
-            <a:srgbClr val="0F8B8D"/>
-          </a:solidFill>
-          <a:ln>
-            <a:noFill/>
-          </a:ln>
-          <a:effectLst/>
-        </p:spPr>
-        <p:style>
-          <a:lnRef idx="1">
-            <a:schemeClr val="accent1"/>
-          </a:lnRef>
-          <a:fillRef idx="3">
-            <a:schemeClr val="accent1"/>
-          </a:fillRef>
-          <a:effectRef idx="2">
-            <a:schemeClr val="accent1"/>
-          </a:effectRef>
-          <a:fontRef idx="minor">
-            <a:schemeClr val="lt1"/>
-          </a:fontRef>
-        </p:style>
-        <p:txBody>
-          <a:bodyPr rtlCol="0" anchor="ctr"/>
-          <a:lstStyle/>
-          <a:p>
-            <a:pPr algn="ctr"/>
-          </a:p>
-        </p:txBody>
-      </p:sp>
-      <p:sp>
-        <p:nvSpPr>
-          <p:cNvPr id="8" name="TextBox 7"/>
-          <p:cNvSpPr txBox="1"/>
-          <p:nvPr/>
-        </p:nvSpPr>
-        <p:spPr>
-          <a:xfrm>
-            <a:off x="500000" y="6420000"/>
-            <a:ext cx="9500000" cy="300000"/>
-          </a:xfrm>
-          <a:prstGeom prst="rect">
-            <a:avLst/>
-          </a:prstGeom>
-          <a:noFill/>
-        </p:spPr>
-        <p:txBody>
-          <a:bodyPr wrap="square" anchor="t" lIns="50800" rIns="50800">
-            <a:spAutoFit/>
-          </a:bodyPr>
-          <a:lstStyle/>
-          <a:p>
-            <a:pPr algn="l"/>
-            <a:r>
-              <a:rPr sz="1000" b="0">
-                <a:solidFill>
-                  <a:srgbClr val="5B6878"/>
-                </a:solidFill>
-                <a:latin typeface="Calibri"/>
-              </a:rPr>
-              <a:t>M11 · Katta til modellari uchun kompyuter tizimlari va hisoblash infratuzilmasi</a:t>
-            </a:r>
-          </a:p>
-        </p:txBody>
-      </p:sp>
-      <p:sp>
-        <p:nvSpPr>
-          <p:cNvPr id="9" name="TextBox 8"/>
-          <p:cNvSpPr txBox="1"/>
-          <p:nvPr/>
-        </p:nvSpPr>
-        <p:spPr>
-          <a:xfrm>
-            <a:off x="10600000" y="6420000"/>
-            <a:ext cx="1100000" cy="300000"/>
-          </a:xfrm>
-          <a:prstGeom prst="rect">
-            <a:avLst/>
-          </a:prstGeom>
-          <a:noFill/>
-        </p:spPr>
-        <p:txBody>
-          <a:bodyPr wrap="square" anchor="t" lIns="50800" rIns="50800">
-            <a:spAutoFit/>
-          </a:bodyPr>
-          <a:lstStyle/>
-          <a:p>
-            <a:pPr algn="r"/>
-            <a:r>
-              <a:rPr sz="1000" b="0">
-                <a:solidFill>
-                  <a:srgbClr val="5B6878"/>
-                </a:solidFill>
-                <a:latin typeface="Calibri"/>
-              </a:rPr>
-              <a:t>9</a:t>
-            </a:r>
-          </a:p>
-        </p:txBody>
-      </p:sp>
-      <p:sp>
-        <p:nvSpPr>
-          <p:cNvPr id="10" name="Rounded Rectangle 9"/>
-          <p:cNvSpPr/>
-          <p:nvPr/>
-        </p:nvSpPr>
-        <p:spPr>
-          <a:xfrm>
-            <a:off x="550000" y="1620000"/>
-            <a:ext cx="11100000" cy="1250000"/>
-          </a:xfrm>
-          <a:prstGeom prst="roundRect">
-            <a:avLst>
-              <a:gd name="adj" fmla="val 18000"/>
-            </a:avLst>
-          </a:prstGeom>
-          <a:solidFill>
-            <a:srgbClr val="F5F8FC"/>
-          </a:solidFill>
-          <a:ln>
-            <a:noFill/>
-          </a:ln>
-          <a:effectLst/>
-        </p:spPr>
-        <p:style>
-          <a:lnRef idx="1">
-            <a:schemeClr val="accent1"/>
-          </a:lnRef>
-          <a:fillRef idx="3">
-            <a:schemeClr val="accent1"/>
-          </a:fillRef>
-          <a:effectRef idx="2">
-            <a:schemeClr val="accent1"/>
-          </a:effectRef>
-          <a:fontRef idx="minor">
-            <a:schemeClr val="lt1"/>
-          </a:fontRef>
-        </p:style>
-        <p:txBody>
-          <a:bodyPr rtlCol="0" anchor="ctr"/>
-          <a:lstStyle/>
-          <a:p>
-            <a:pPr algn="ctr"/>
-          </a:p>
-        </p:txBody>
-      </p:sp>
-      <p:sp>
-        <p:nvSpPr>
-          <p:cNvPr id="11" name="Rectangle 10"/>
-          <p:cNvSpPr/>
-          <p:nvPr/>
-        </p:nvSpPr>
-        <p:spPr>
-          <a:xfrm>
-            <a:off x="550000" y="1620000"/>
-            <a:ext cx="70000" cy="1250000"/>
-          </a:xfrm>
-          <a:prstGeom prst="rect">
-            <a:avLst/>
-          </a:prstGeom>
-          <a:solidFill>
-            <a:srgbClr val="2D5C8F"/>
-          </a:solidFill>
-          <a:ln>
-            <a:noFill/>
-          </a:ln>
-          <a:effectLst/>
-        </p:spPr>
-        <p:style>
-          <a:lnRef idx="1">
-            <a:schemeClr val="accent1"/>
-          </a:lnRef>
-          <a:fillRef idx="3">
-            <a:schemeClr val="accent1"/>
-          </a:fillRef>
-          <a:effectRef idx="2">
-            <a:schemeClr val="accent1"/>
-          </a:effectRef>
-          <a:fontRef idx="minor">
-            <a:schemeClr val="lt1"/>
-          </a:fontRef>
-        </p:style>
-        <p:txBody>
-          <a:bodyPr rtlCol="0" anchor="ctr"/>
-          <a:lstStyle/>
-          <a:p>
-            <a:pPr algn="ctr"/>
-          </a:p>
-        </p:txBody>
-      </p:sp>
-      <p:sp>
-        <p:nvSpPr>
-          <p:cNvPr id="12" name="Oval 11"/>
-          <p:cNvSpPr/>
-          <p:nvPr/>
-        </p:nvSpPr>
-        <p:spPr>
-          <a:xfrm>
-            <a:off x="800000" y="2015000"/>
-            <a:ext cx="460000" cy="460000"/>
-          </a:xfrm>
-          <a:prstGeom prst="ellipse">
-            <a:avLst/>
-          </a:prstGeom>
-          <a:solidFill>
-            <a:srgbClr val="2D5C8F"/>
-          </a:solidFill>
-          <a:ln>
-            <a:noFill/>
-          </a:ln>
-          <a:effectLst/>
-        </p:spPr>
-        <p:style>
-          <a:lnRef idx="1">
-            <a:schemeClr val="accent1"/>
-          </a:lnRef>
-          <a:fillRef idx="3">
-            <a:schemeClr val="accent1"/>
-          </a:fillRef>
-          <a:effectRef idx="2">
-            <a:schemeClr val="accent1"/>
-          </a:effectRef>
-          <a:fontRef idx="minor">
-            <a:schemeClr val="lt1"/>
-          </a:fontRef>
-        </p:style>
-        <p:txBody>
-          <a:bodyPr rtlCol="0" anchor="ctr" lIns="0" rIns="0"/>
-          <a:lstStyle/>
-          <a:p>
-            <a:pPr algn="ctr"/>
-            <a:r>
-              <a:rPr sz="1600" b="1">
-                <a:solidFill>
-                  <a:srgbClr val="FFFFFF"/>
-                </a:solidFill>
-                <a:latin typeface="Calibri"/>
-              </a:rPr>
-              <a:t>1</a:t>
-            </a:r>
-          </a:p>
-        </p:txBody>
-      </p:sp>
-      <p:sp>
-        <p:nvSpPr>
-          <p:cNvPr id="13" name="TextBox 12"/>
-          <p:cNvSpPr txBox="1"/>
-          <p:nvPr/>
-        </p:nvSpPr>
-        <p:spPr>
-          <a:xfrm>
-            <a:off x="1450000" y="1620000"/>
-            <a:ext cx="10050000" cy="1250000"/>
-          </a:xfrm>
-          <a:prstGeom prst="rect">
-            <a:avLst/>
-          </a:prstGeom>
-          <a:noFill/>
-        </p:spPr>
-        <p:txBody>
-          <a:bodyPr wrap="square" anchor="ctr" lIns="50800" rIns="50800">
-            <a:spAutoFit/>
-          </a:bodyPr>
-          <a:lstStyle/>
-          <a:p>
-            <a:pPr algn="l"/>
-            <a:r>
-              <a:rPr sz="1600" b="0">
-                <a:solidFill>
-                  <a:srgbClr val="1B2430"/>
-                </a:solidFill>
-                <a:latin typeface="Calibri"/>
-              </a:rPr>
-              <a:t>RAG (Lewis va boshq., 2020) tizimi ikki bosqichda ishlaydi. Tayyorgarlik (indekslash): hujjatlar bo'laklarga (chunk, odatda 200–1000 token, qisman ustma-ust) bo'linadi, har bo'lak embedding modeli orqali zich vektorga (384–1024 o'lcham) aylantiriladi va…</a:t>
-            </a:r>
-          </a:p>
-        </p:txBody>
-      </p:sp>
-      <p:sp>
-        <p:nvSpPr>
-          <p:cNvPr id="14" name="Rounded Rectangle 13"/>
-          <p:cNvSpPr/>
-          <p:nvPr/>
-        </p:nvSpPr>
-        <p:spPr>
-          <a:xfrm>
-            <a:off x="550000" y="2990000"/>
-            <a:ext cx="11100000" cy="1250000"/>
-          </a:xfrm>
-          <a:prstGeom prst="roundRect">
-            <a:avLst>
-              <a:gd name="adj" fmla="val 18000"/>
-            </a:avLst>
-          </a:prstGeom>
-          <a:solidFill>
-            <a:srgbClr val="F5F8FC"/>
-          </a:solidFill>
-          <a:ln>
-            <a:noFill/>
-          </a:ln>
-          <a:effectLst/>
-        </p:spPr>
-        <p:style>
-          <a:lnRef idx="1">
-            <a:schemeClr val="accent1"/>
-          </a:lnRef>
-          <a:fillRef idx="3">
-            <a:schemeClr val="accent1"/>
-          </a:fillRef>
-          <a:effectRef idx="2">
-            <a:schemeClr val="accent1"/>
-          </a:effectRef>
-          <a:fontRef idx="minor">
-            <a:schemeClr val="lt1"/>
-          </a:fontRef>
-        </p:style>
-        <p:txBody>
-          <a:bodyPr rtlCol="0" anchor="ctr"/>
-          <a:lstStyle/>
-          <a:p>
-            <a:pPr algn="ctr"/>
-          </a:p>
-        </p:txBody>
-      </p:sp>
-      <p:sp>
-        <p:nvSpPr>
-          <p:cNvPr id="15" name="Rectangle 14"/>
-          <p:cNvSpPr/>
-          <p:nvPr/>
-        </p:nvSpPr>
-        <p:spPr>
-          <a:xfrm>
-            <a:off x="550000" y="2990000"/>
-            <a:ext cx="70000" cy="1250000"/>
-          </a:xfrm>
-          <a:prstGeom prst="rect">
-            <a:avLst/>
-          </a:prstGeom>
-          <a:solidFill>
-            <a:srgbClr val="0F8B8D"/>
-          </a:solidFill>
-          <a:ln>
-            <a:noFill/>
-          </a:ln>
-          <a:effectLst/>
-        </p:spPr>
-        <p:style>
-          <a:lnRef idx="1">
-            <a:schemeClr val="accent1"/>
-          </a:lnRef>
-          <a:fillRef idx="3">
-            <a:schemeClr val="accent1"/>
-          </a:fillRef>
-          <a:effectRef idx="2">
-            <a:schemeClr val="accent1"/>
-          </a:effectRef>
-          <a:fontRef idx="minor">
-            <a:schemeClr val="lt1"/>
-          </a:fontRef>
-        </p:style>
-        <p:txBody>
-          <a:bodyPr rtlCol="0" anchor="ctr"/>
-          <a:lstStyle/>
-          <a:p>
-            <a:pPr algn="ctr"/>
-          </a:p>
-        </p:txBody>
-      </p:sp>
-      <p:sp>
-        <p:nvSpPr>
-          <p:cNvPr id="16" name="Oval 15"/>
-          <p:cNvSpPr/>
-          <p:nvPr/>
-        </p:nvSpPr>
-        <p:spPr>
-          <a:xfrm>
-            <a:off x="800000" y="3385000"/>
-            <a:ext cx="460000" cy="460000"/>
-          </a:xfrm>
-          <a:prstGeom prst="ellipse">
-            <a:avLst/>
-          </a:prstGeom>
-          <a:solidFill>
-            <a:srgbClr val="0F8B8D"/>
-          </a:solidFill>
-          <a:ln>
-            <a:noFill/>
-          </a:ln>
-          <a:effectLst/>
-        </p:spPr>
-        <p:style>
-          <a:lnRef idx="1">
-            <a:schemeClr val="accent1"/>
-          </a:lnRef>
-          <a:fillRef idx="3">
-            <a:schemeClr val="accent1"/>
-          </a:fillRef>
-          <a:effectRef idx="2">
-            <a:schemeClr val="accent1"/>
-          </a:effectRef>
-          <a:fontRef idx="minor">
-            <a:schemeClr val="lt1"/>
-          </a:fontRef>
-        </p:style>
-        <p:txBody>
-          <a:bodyPr rtlCol="0" anchor="ctr" lIns="0" rIns="0"/>
-          <a:lstStyle/>
-          <a:p>
-            <a:pPr algn="ctr"/>
-            <a:r>
-              <a:rPr sz="1600" b="1">
-                <a:solidFill>
-                  <a:srgbClr val="FFFFFF"/>
-                </a:solidFill>
-                <a:latin typeface="Calibri"/>
-              </a:rPr>
-              <a:t>2</a:t>
-            </a:r>
-          </a:p>
-        </p:txBody>
-      </p:sp>
-      <p:sp>
-        <p:nvSpPr>
-          <p:cNvPr id="17" name="TextBox 16"/>
-          <p:cNvSpPr txBox="1"/>
-          <p:nvPr/>
-        </p:nvSpPr>
-        <p:spPr>
-          <a:xfrm>
-            <a:off x="1450000" y="2990000"/>
-            <a:ext cx="10050000" cy="1250000"/>
-          </a:xfrm>
-          <a:prstGeom prst="rect">
-            <a:avLst/>
-          </a:prstGeom>
-          <a:noFill/>
-        </p:spPr>
-        <p:txBody>
-          <a:bodyPr wrap="square" anchor="ctr" lIns="50800" rIns="50800">
-            <a:spAutoFit/>
-          </a:bodyPr>
-          <a:lstStyle/>
-          <a:p>
-            <a:pPr algn="l"/>
-            <a:r>
-              <a:rPr sz="1600" b="0">
-                <a:solidFill>
-                  <a:srgbClr val="1B2430"/>
-                </a:solidFill>
-                <a:latin typeface="Calibri"/>
-              </a:rPr>
-              <a:t>Vektor qidiruvning markaziy masalasi — N ta d-o'lchamli vektor orasidan so'rovga eng yaqin k tasini tez topish. To'liq qidiruv (Flat, brute force) O(N · d) — 1 million × 768 o'lcham uchun GPU'da bir necha millisekund, lekin 100 million uchun sekin va 300 GB…</a:t>
-            </a:r>
-          </a:p>
-        </p:txBody>
-      </p:sp>
-      <p:sp>
-        <p:nvSpPr>
-          <p:cNvPr id="18" name="Rounded Rectangle 17"/>
-          <p:cNvSpPr/>
-          <p:nvPr/>
-        </p:nvSpPr>
-        <p:spPr>
-          <a:xfrm>
-            <a:off x="550000" y="4360000"/>
-            <a:ext cx="11100000" cy="1250000"/>
-          </a:xfrm>
-          <a:prstGeom prst="roundRect">
-            <a:avLst>
-              <a:gd name="adj" fmla="val 18000"/>
-            </a:avLst>
-          </a:prstGeom>
-          <a:solidFill>
-            <a:srgbClr val="F5F8FC"/>
-          </a:solidFill>
-          <a:ln>
-            <a:noFill/>
-          </a:ln>
-          <a:effectLst/>
-        </p:spPr>
-        <p:style>
-          <a:lnRef idx="1">
-            <a:schemeClr val="accent1"/>
-          </a:lnRef>
-          <a:fillRef idx="3">
-            <a:schemeClr val="accent1"/>
-          </a:fillRef>
-          <a:effectRef idx="2">
-            <a:schemeClr val="accent1"/>
-          </a:effectRef>
-          <a:fontRef idx="minor">
-            <a:schemeClr val="lt1"/>
-          </a:fontRef>
-        </p:style>
-        <p:txBody>
-          <a:bodyPr rtlCol="0" anchor="ctr"/>
-          <a:lstStyle/>
-          <a:p>
-            <a:pPr algn="ctr"/>
-          </a:p>
-        </p:txBody>
-      </p:sp>
-      <p:sp>
-        <p:nvSpPr>
-          <p:cNvPr id="19" name="Rectangle 18"/>
-          <p:cNvSpPr/>
-          <p:nvPr/>
-        </p:nvSpPr>
-        <p:spPr>
-          <a:xfrm>
-            <a:off x="550000" y="4360000"/>
-            <a:ext cx="70000" cy="1250000"/>
-          </a:xfrm>
-          <a:prstGeom prst="rect">
-            <a:avLst/>
-          </a:prstGeom>
-          <a:solidFill>
-            <a:srgbClr val="6A3FB5"/>
-          </a:solidFill>
-          <a:ln>
-            <a:noFill/>
-          </a:ln>
-          <a:effectLst/>
-        </p:spPr>
-        <p:style>
-          <a:lnRef idx="1">
-            <a:schemeClr val="accent1"/>
-          </a:lnRef>
-          <a:fillRef idx="3">
-            <a:schemeClr val="accent1"/>
-          </a:fillRef>
-          <a:effectRef idx="2">
-            <a:schemeClr val="accent1"/>
-          </a:effectRef>
-          <a:fontRef idx="minor">
-            <a:schemeClr val="lt1"/>
-          </a:fontRef>
-        </p:style>
-        <p:txBody>
-          <a:bodyPr rtlCol="0" anchor="ctr"/>
-          <a:lstStyle/>
-          <a:p>
-            <a:pPr algn="ctr"/>
-          </a:p>
-        </p:txBody>
-      </p:sp>
-      <p:sp>
-        <p:nvSpPr>
-          <p:cNvPr id="20" name="Oval 19"/>
-          <p:cNvSpPr/>
-          <p:nvPr/>
-        </p:nvSpPr>
-        <p:spPr>
-          <a:xfrm>
-            <a:off x="800000" y="4755000"/>
-            <a:ext cx="460000" cy="460000"/>
-          </a:xfrm>
-          <a:prstGeom prst="ellipse">
-            <a:avLst/>
-          </a:prstGeom>
-          <a:solidFill>
-            <a:srgbClr val="6A3FB5"/>
-          </a:solidFill>
-          <a:ln>
-            <a:noFill/>
-          </a:ln>
-          <a:effectLst/>
-        </p:spPr>
-        <p:style>
-          <a:lnRef idx="1">
-            <a:schemeClr val="accent1"/>
-          </a:lnRef>
-          <a:fillRef idx="3">
-            <a:schemeClr val="accent1"/>
-          </a:fillRef>
-          <a:effectRef idx="2">
-            <a:schemeClr val="accent1"/>
-          </a:effectRef>
-          <a:fontRef idx="minor">
-            <a:schemeClr val="lt1"/>
-          </a:fontRef>
-        </p:style>
-        <p:txBody>
-          <a:bodyPr rtlCol="0" anchor="ctr" lIns="0" rIns="0"/>
-          <a:lstStyle/>
-          <a:p>
-            <a:pPr algn="ctr"/>
-            <a:r>
-              <a:rPr sz="1600" b="1">
-                <a:solidFill>
-                  <a:srgbClr val="FFFFFF"/>
-                </a:solidFill>
-                <a:latin typeface="Calibri"/>
-              </a:rPr>
-              <a:t>3</a:t>
-            </a:r>
-          </a:p>
-        </p:txBody>
-      </p:sp>
-      <p:sp>
-        <p:nvSpPr>
-          <p:cNvPr id="21" name="TextBox 20"/>
-          <p:cNvSpPr txBox="1"/>
-          <p:nvPr/>
-        </p:nvSpPr>
-        <p:spPr>
-          <a:xfrm>
-            <a:off x="1450000" y="4360000"/>
-            <a:ext cx="10050000" cy="1250000"/>
-          </a:xfrm>
-          <a:prstGeom prst="rect">
-            <a:avLst/>
-          </a:prstGeom>
-          <a:noFill/>
-        </p:spPr>
-        <p:txBody>
-          <a:bodyPr wrap="square" anchor="ctr" lIns="50800" rIns="50800">
-            <a:spAutoFit/>
-          </a:bodyPr>
-          <a:lstStyle/>
-          <a:p>
-            <a:pPr algn="l"/>
-            <a:r>
-              <a:rPr sz="1600" b="0">
-                <a:solidFill>
-                  <a:srgbClr val="1B2430"/>
-                </a:solidFill>
-                <a:latin typeface="Calibri"/>
-              </a:rPr>
-              <a:t>Vektor baza (vector database) — indeks ustiga metama'lumot filtrlash, CRUD, persistentlik, replikatsiya va API qo'shadigan tizim. FAISS (Meta) — kutubxona, baza emas: eng tez va moslashuvchan, GPU qo'llab-quvvatlaydi, lekin saqlash va filtrlashni o'zingiz…</a:t>
-            </a:r>
-          </a:p>
-        </p:txBody>
-      </p:sp>
-    </p:spTree>
-  </p:cSld>
-  <p:clrMapOvr>
-    <a:masterClrMapping/>
-  </p:clrMapOvr>
-  <p:transition spd="med">
-    <p:fade/>
-  </p:transition>
-  <p:timing>
-    <p:tnLst>
-      <p:par>
-        <p:cTn id="1" dur="indefinite" restart="never" nodeType="tmRoot">
-          <p:childTnLst>
-            <p:seq concurrent="1" nextAc="seek">
-              <p:cTn id="2" dur="indefinite" nodeType="mainSeq">
-                <p:childTnLst>
-                  <p:par>
-                    <p:cTn id="79" fill="hold">
-                      <p:stCondLst>
-                        <p:cond delay="indefinite"/>
-                        <p:cond evt="onBegin" delay="0">
-                          <p:tn val="2"/>
-                        </p:cond>
-                      </p:stCondLst>
-                      <p:childTnLst>
-                        <p:par>
-                          <p:cTn id="3" fill="hold">
-                            <p:stCondLst>
-                              <p:cond delay="0"/>
-                            </p:stCondLst>
-                            <p:childTnLst>
-                              <p:par>
-                                <p:cTn id="4" presetID="10" presetClass="entr" presetSubtype="0" fill="hold" grpId="0" nodeType="withEffect">
-                                  <p:stCondLst>
-                                    <p:cond delay="0"/>
-                                  </p:stCondLst>
-                                  <p:childTnLst>
-                                    <p:set>
-                                      <p:cBhvr>
-                                        <p:cTn id="5" dur="1" fill="hold">
-                                          <p:stCondLst>
-                                            <p:cond delay="0"/>
-                                          </p:stCondLst>
-                                        </p:cTn>
-                                        <p:tgtEl>
-                                          <p:spTgt spid="6"/>
-                                        </p:tgtEl>
-                                        <p:attrNameLst>
-                                          <p:attrName>style.visibility</p:attrName>
-                                        </p:attrNameLst>
-                                      </p:cBhvr>
-                                      <p:to>
-                                        <p:strVal val="visible"/>
-                                      </p:to>
-                                    </p:set>
-                                    <p:animEffect transition="in" filter="fade">
-                                      <p:cBhvr>
-                                        <p:cTn id="6" dur="550"/>
-                                        <p:tgtEl>
-                                          <p:spTgt spid="6"/>
-                                        </p:tgtEl>
-                                      </p:cBhvr>
-                                    </p:animEffect>
-                                  </p:childTnLst>
-                                </p:cTn>
-                              </p:par>
-                            </p:childTnLst>
-                          </p:cTn>
-                        </p:par>
-                        <p:par>
-                          <p:cTn id="7" fill="hold">
-                            <p:stCondLst>
-                              <p:cond delay="220"/>
-                            </p:stCondLst>
-                            <p:childTnLst>
-                              <p:par>
-                                <p:cTn id="8" presetID="42" presetClass="entr" presetSubtype="0" fill="hold" grpId="0" nodeType="afterEffect">
-                                  <p:stCondLst>
-                                    <p:cond delay="0"/>
-                                  </p:stCondLst>
-                                  <p:childTnLst>
-                                    <p:set>
-                                      <p:cBhvr>
-                                        <p:cTn id="9" dur="1" fill="hold">
-                                          <p:stCondLst>
-                                            <p:cond delay="0"/>
-                                          </p:stCondLst>
-                                        </p:cTn>
-                                        <p:tgtEl>
-                                          <p:spTgt spid="10"/>
-                                        </p:tgtEl>
-                                        <p:attrNameLst>
-                                          <p:attrName>style.visibility</p:attrName>
-                                        </p:attrNameLst>
-                                      </p:cBhvr>
-                                      <p:to>
-                                        <p:strVal val="visible"/>
-                                      </p:to>
-                                    </p:set>
-                                    <p:animEffect transition="in" filter="fade">
-                                      <p:cBhvr>
-                                        <p:cTn id="10" dur="550"/>
-                                        <p:tgtEl>
-                                          <p:spTgt spid="10"/>
-                                        </p:tgtEl>
-                                      </p:cBhvr>
-                                    </p:animEffect>
-                                    <p:anim calcmode="lin" valueType="num">
-                                      <p:cBhvr additive="base">
-                                        <p:cTn id="11" dur="550" fill="hold"/>
-                                        <p:tgtEl>
-                                          <p:spTgt spid="10"/>
-                                        </p:tgtEl>
-                                        <p:attrNameLst>
-                                          <p:attrName>ppt_x</p:attrName>
-                                        </p:attrNameLst>
-                                      </p:cBhvr>
-                                      <p:tavLst>
-                                        <p:tav tm="0">
-                                          <p:val>
-                                            <p:strVal val="#ppt_x"/>
-                                          </p:val>
-                                        </p:tav>
-                                        <p:tav tm="100000">
-                                          <p:val>
-                                            <p:strVal val="#ppt_x"/>
-                                          </p:val>
-                                        </p:tav>
-                                      </p:tavLst>
-                                    </p:anim>
-                                    <p:anim calcmode="lin" valueType="num">
-                                      <p:cBhvr additive="base">
-                                        <p:cTn id="12" dur="550" fill="hold"/>
-                                        <p:tgtEl>
-                                          <p:spTgt spid="10"/>
-                                        </p:tgtEl>
-                                        <p:attrNameLst>
-                                          <p:attrName>ppt_y</p:attrName>
-                                        </p:attrNameLst>
-                                      </p:cBhvr>
-                                      <p:tavLst>
-                                        <p:tav tm="0">
-                                          <p:val>
-                                            <p:strVal val="#ppt_y+.08"/>
-                                          </p:val>
-                                        </p:tav>
-                                        <p:tav tm="100000">
-                                          <p:val>
-                                            <p:strVal val="#ppt_y"/>
-                                          </p:val>
-                                        </p:tav>
-                                      </p:tavLst>
-                                    </p:anim>
-                                  </p:childTnLst>
-                                </p:cTn>
-                              </p:par>
-                            </p:childTnLst>
-                          </p:cTn>
-                        </p:par>
-                        <p:par>
-                          <p:cTn id="13" fill="hold">
-                            <p:stCondLst>
-                              <p:cond delay="220"/>
-                            </p:stCondLst>
-                            <p:childTnLst>
-                              <p:par>
-                                <p:cTn id="14" presetID="42" presetClass="entr" presetSubtype="0" fill="hold" grpId="0" nodeType="afterEffect">
-                                  <p:stCondLst>
-                                    <p:cond delay="0"/>
-                                  </p:stCondLst>
-                                  <p:childTnLst>
-                                    <p:set>
-                                      <p:cBhvr>
-                                        <p:cTn id="15" dur="1" fill="hold">
-                                          <p:stCondLst>
-                                            <p:cond delay="0"/>
-                                          </p:stCondLst>
-                                        </p:cTn>
-                                        <p:tgtEl>
-                                          <p:spTgt spid="11"/>
-                                        </p:tgtEl>
-                                        <p:attrNameLst>
-                                          <p:attrName>style.visibility</p:attrName>
-                                        </p:attrNameLst>
-                                      </p:cBhvr>
-                                      <p:to>
-                                        <p:strVal val="visible"/>
-                                      </p:to>
-                                    </p:set>
-                                    <p:animEffect transition="in" filter="fade">
-                                      <p:cBhvr>
-                                        <p:cTn id="16" dur="550"/>
-                                        <p:tgtEl>
-                                          <p:spTgt spid="11"/>
-                                        </p:tgtEl>
-                                      </p:cBhvr>
-                                    </p:animEffect>
-                                    <p:anim calcmode="lin" valueType="num">
-                                      <p:cBhvr additive="base">
-                                        <p:cTn id="17" dur="550" fill="hold"/>
-                                        <p:tgtEl>
-                                          <p:spTgt spid="11"/>
-                                        </p:tgtEl>
-                                        <p:attrNameLst>
-                                          <p:attrName>ppt_x</p:attrName>
-                                        </p:attrNameLst>
-                                      </p:cBhvr>
-                                      <p:tavLst>
-                                        <p:tav tm="0">
-                                          <p:val>
-                                            <p:strVal val="#ppt_x"/>
-                                          </p:val>
-                                        </p:tav>
-                                        <p:tav tm="100000">
-                                          <p:val>
-                                            <p:strVal val="#ppt_x"/>
-                                          </p:val>
-                                        </p:tav>
-                                      </p:tavLst>
-                                    </p:anim>
-                                    <p:anim calcmode="lin" valueType="num">
-                                      <p:cBhvr additive="base">
-                                        <p:cTn id="18" dur="550" fill="hold"/>
-                                        <p:tgtEl>
-                                          <p:spTgt spid="11"/>
-                                        </p:tgtEl>
-                                        <p:attrNameLst>
-                                          <p:attrName>ppt_y</p:attrName>
-                                        </p:attrNameLst>
-                                      </p:cBhvr>
-                                      <p:tavLst>
-                                        <p:tav tm="0">
-                                          <p:val>
-                                            <p:strVal val="#ppt_y+.08"/>
-                                          </p:val>
-                                        </p:tav>
-                                        <p:tav tm="100000">
-                                          <p:val>
-                                            <p:strVal val="#ppt_y"/>
-                                          </p:val>
-                                        </p:tav>
-                                      </p:tavLst>
-                                    </p:anim>
-                                  </p:childTnLst>
-                                </p:cTn>
-                              </p:par>
-                            </p:childTnLst>
-                          </p:cTn>
-                        </p:par>
-                        <p:par>
-                          <p:cTn id="19" fill="hold">
-                            <p:stCondLst>
-                              <p:cond delay="220"/>
-                            </p:stCondLst>
-                            <p:childTnLst>
-                              <p:par>
-                                <p:cTn id="20" presetID="53" presetClass="entr" presetSubtype="16" fill="hold" grpId="0" nodeType="afterEffect">
-                                  <p:stCondLst>
-                                    <p:cond delay="0"/>
-                                  </p:stCondLst>
-                                  <p:childTnLst>
-                                    <p:set>
-                                      <p:cBhvr>
-                                        <p:cTn id="21" dur="1" fill="hold">
-                                          <p:stCondLst>
-                                            <p:cond delay="0"/>
-                                          </p:stCondLst>
-                                        </p:cTn>
-                                        <p:tgtEl>
-                                          <p:spTgt spid="12"/>
-                                        </p:tgtEl>
-                                        <p:attrNameLst>
-                                          <p:attrName>style.visibility</p:attrName>
-                                        </p:attrNameLst>
-                                      </p:cBhvr>
-                                      <p:to>
-                                        <p:strVal val="visible"/>
-                                      </p:to>
-                                    </p:set>
-                                    <p:animEffect transition="in" filter="fade">
-                                      <p:cBhvr>
-                                        <p:cTn id="22" dur="550"/>
-                                        <p:tgtEl>
-                                          <p:spTgt spid="12"/>
-                                        </p:tgtEl>
-                                      </p:cBhvr>
-                                    </p:animEffect>
-                                    <p:anim calcmode="lin" valueType="num">
-                                      <p:cBhvr additive="base">
-                                        <p:cTn id="23" dur="550" fill="hold"/>
-                                        <p:tgtEl>
-                                          <p:spTgt spid="12"/>
-                                        </p:tgtEl>
-                                        <p:attrNameLst>
-                                          <p:attrName>ppt_w</p:attrName>
-                                        </p:attrNameLst>
-                                      </p:cBhvr>
-                                      <p:tavLst>
-                                        <p:tav tm="0">
-                                          <p:val>
-                                            <p:strVal val="0"/>
-                                          </p:val>
-                                        </p:tav>
-                                        <p:tav tm="100000">
-                                          <p:val>
-                                            <p:strVal val="#ppt_w"/>
-                                          </p:val>
-                                        </p:tav>
-                                      </p:tavLst>
-                                    </p:anim>
-                                    <p:anim calcmode="lin" valueType="num">
-                                      <p:cBhvr additive="base">
-                                        <p:cTn id="24" dur="550" fill="hold"/>
-                                        <p:tgtEl>
-                                          <p:spTgt spid="12"/>
-                                        </p:tgtEl>
-                                        <p:attrNameLst>
-                                          <p:attrName>ppt_h</p:attrName>
-                                        </p:attrNameLst>
-                                      </p:cBhvr>
-                                      <p:tavLst>
-                                        <p:tav tm="0">
-                                          <p:val>
-                                            <p:strVal val="0"/>
-                                          </p:val>
-                                        </p:tav>
-                                        <p:tav tm="100000">
-                                          <p:val>
-                                            <p:strVal val="#ppt_h"/>
-                                          </p:val>
-                                        </p:tav>
-                                      </p:tavLst>
-                                    </p:anim>
-                                  </p:childTnLst>
-                                </p:cTn>
-                              </p:par>
-                            </p:childTnLst>
-                          </p:cTn>
-                        </p:par>
-                        <p:par>
-                          <p:cTn id="25" fill="hold">
-                            <p:stCondLst>
-                              <p:cond delay="220"/>
-                            </p:stCondLst>
-                            <p:childTnLst>
-                              <p:par>
-                                <p:cTn id="26" presetID="42" presetClass="entr" presetSubtype="0" fill="hold" grpId="0" nodeType="afterEffect">
-                                  <p:stCondLst>
-                                    <p:cond delay="0"/>
-                                  </p:stCondLst>
-                                  <p:childTnLst>
-                                    <p:set>
-                                      <p:cBhvr>
-                                        <p:cTn id="27" dur="1" fill="hold">
-                                          <p:stCondLst>
-                                            <p:cond delay="0"/>
-                                          </p:stCondLst>
-                                        </p:cTn>
-                                        <p:tgtEl>
-                                          <p:spTgt spid="13"/>
-                                        </p:tgtEl>
-                                        <p:attrNameLst>
-                                          <p:attrName>style.visibility</p:attrName>
-                                        </p:attrNameLst>
-                                      </p:cBhvr>
-                                      <p:to>
-                                        <p:strVal val="visible"/>
-                                      </p:to>
-                                    </p:set>
-                                    <p:animEffect transition="in" filter="fade">
-                                      <p:cBhvr>
-                                        <p:cTn id="28" dur="550"/>
-                                        <p:tgtEl>
-                                          <p:spTgt spid="13"/>
-                                        </p:tgtEl>
-                                      </p:cBhvr>
-                                    </p:animEffect>
-                                    <p:anim calcmode="lin" valueType="num">
-                                      <p:cBhvr additive="base">
-                                        <p:cTn id="29" dur="550" fill="hold"/>
-                                        <p:tgtEl>
-                                          <p:spTgt spid="13"/>
-                                        </p:tgtEl>
-                                        <p:attrNameLst>
-                                          <p:attrName>ppt_x</p:attrName>
-                                        </p:attrNameLst>
-                                      </p:cBhvr>
-                                      <p:tavLst>
-                                        <p:tav tm="0">
-                                          <p:val>
-                                            <p:strVal val="#ppt_x"/>
-                                          </p:val>
-                                        </p:tav>
-                                        <p:tav tm="100000">
-                                          <p:val>
-                                            <p:strVal val="#ppt_x"/>
-                                          </p:val>
-                                        </p:tav>
-                                      </p:tavLst>
-                                    </p:anim>
-                                    <p:anim calcmode="lin" valueType="num">
-                                      <p:cBhvr additive="base">
-                                        <p:cTn id="30" dur="550" fill="hold"/>
-                                        <p:tgtEl>
-                                          <p:spTgt spid="13"/>
-                                        </p:tgtEl>
-                                        <p:attrNameLst>
-                                          <p:attrName>ppt_y</p:attrName>
-                                        </p:attrNameLst>
-                                      </p:cBhvr>
-                                      <p:tavLst>
-                                        <p:tav tm="0">
-                                          <p:val>
-                                            <p:strVal val="#ppt_y+.08"/>
-                                          </p:val>
-                                        </p:tav>
-                                        <p:tav tm="100000">
-                                          <p:val>
-                                            <p:strVal val="#ppt_y"/>
-                                          </p:val>
-                                        </p:tav>
-                                      </p:tavLst>
-                                    </p:anim>
-                                  </p:childTnLst>
-                                </p:cTn>
-                              </p:par>
-                            </p:childTnLst>
-                          </p:cTn>
-                        </p:par>
-                        <p:par>
-                          <p:cTn id="31" fill="hold">
-                            <p:stCondLst>
-                              <p:cond delay="440"/>
-                            </p:stCondLst>
-                            <p:childTnLst>
-                              <p:par>
-                                <p:cTn id="32" presetID="42" presetClass="entr" presetSubtype="0" fill="hold" grpId="0" nodeType="afterEffect">
-                                  <p:stCondLst>
-                                    <p:cond delay="0"/>
-                                  </p:stCondLst>
-                                  <p:childTnLst>
-                                    <p:set>
-                                      <p:cBhvr>
-                                        <p:cTn id="33" dur="1" fill="hold">
-                                          <p:stCondLst>
-                                            <p:cond delay="0"/>
-                                          </p:stCondLst>
-                                        </p:cTn>
-                                        <p:tgtEl>
-                                          <p:spTgt spid="14"/>
-                                        </p:tgtEl>
-                                        <p:attrNameLst>
-                                          <p:attrName>style.visibility</p:attrName>
-                                        </p:attrNameLst>
-                                      </p:cBhvr>
-                                      <p:to>
-                                        <p:strVal val="visible"/>
-                                      </p:to>
-                                    </p:set>
-                                    <p:animEffect transition="in" filter="fade">
-                                      <p:cBhvr>
-                                        <p:cTn id="34" dur="550"/>
-                                        <p:tgtEl>
-                                          <p:spTgt spid="14"/>
-                                        </p:tgtEl>
-                                      </p:cBhvr>
-                                    </p:animEffect>
-                                    <p:anim calcmode="lin" valueType="num">
-                                      <p:cBhvr additive="base">
-                                        <p:cTn id="35" dur="550" fill="hold"/>
-                                        <p:tgtEl>
-                                          <p:spTgt spid="14"/>
-                                        </p:tgtEl>
-                                        <p:attrNameLst>
-                                          <p:attrName>ppt_x</p:attrName>
-                                        </p:attrNameLst>
-                                      </p:cBhvr>
-                                      <p:tavLst>
-                                        <p:tav tm="0">
-                                          <p:val>
-                                            <p:strVal val="#ppt_x"/>
-                                          </p:val>
-                                        </p:tav>
-                                        <p:tav tm="100000">
-                                          <p:val>
-                                            <p:strVal val="#ppt_x"/>
-                                          </p:val>
-                                        </p:tav>
-                                      </p:tavLst>
-                                    </p:anim>
-                                    <p:anim calcmode="lin" valueType="num">
-                                      <p:cBhvr additive="base">
-                                        <p:cTn id="36" dur="550" fill="hold"/>
-                                        <p:tgtEl>
-                                          <p:spTgt spid="14"/>
-                                        </p:tgtEl>
-                                        <p:attrNameLst>
-                                          <p:attrName>ppt_y</p:attrName>
-                                        </p:attrNameLst>
-                                      </p:cBhvr>
-                                      <p:tavLst>
-                                        <p:tav tm="0">
-                                          <p:val>
-                                            <p:strVal val="#ppt_y+.08"/>
-                                          </p:val>
-                                        </p:tav>
-                                        <p:tav tm="100000">
-                                          <p:val>
-                                            <p:strVal val="#ppt_y"/>
-                                          </p:val>
-                                        </p:tav>
-                                      </p:tavLst>
-                                    </p:anim>
-                                  </p:childTnLst>
-                                </p:cTn>
-                              </p:par>
-                            </p:childTnLst>
-                          </p:cTn>
-                        </p:par>
-                        <p:par>
-                          <p:cTn id="37" fill="hold">
-                            <p:stCondLst>
-                              <p:cond delay="440"/>
-                            </p:stCondLst>
-                            <p:childTnLst>
-                              <p:par>
-                                <p:cTn id="38" presetID="42" presetClass="entr" presetSubtype="0" fill="hold" grpId="0" nodeType="afterEffect">
-                                  <p:stCondLst>
-                                    <p:cond delay="0"/>
-                                  </p:stCondLst>
-                                  <p:childTnLst>
-                                    <p:set>
-                                      <p:cBhvr>
-                                        <p:cTn id="39" dur="1" fill="hold">
-                                          <p:stCondLst>
-                                            <p:cond delay="0"/>
-                                          </p:stCondLst>
-                                        </p:cTn>
-                                        <p:tgtEl>
-                                          <p:spTgt spid="15"/>
-                                        </p:tgtEl>
-                                        <p:attrNameLst>
-                                          <p:attrName>style.visibility</p:attrName>
-                                        </p:attrNameLst>
-                                      </p:cBhvr>
-                                      <p:to>
-                                        <p:strVal val="visible"/>
-                                      </p:to>
-                                    </p:set>
-                                    <p:animEffect transition="in" filter="fade">
-                                      <p:cBhvr>
-                                        <p:cTn id="40" dur="550"/>
-                                        <p:tgtEl>
-                                          <p:spTgt spid="15"/>
-                                        </p:tgtEl>
-                                      </p:cBhvr>
-                                    </p:animEffect>
-                                    <p:anim calcmode="lin" valueType="num">
-                                      <p:cBhvr additive="base">
-                                        <p:cTn id="41" dur="550" fill="hold"/>
-                                        <p:tgtEl>
-                                          <p:spTgt spid="15"/>
-                                        </p:tgtEl>
-                                        <p:attrNameLst>
-                                          <p:attrName>ppt_x</p:attrName>
-                                        </p:attrNameLst>
-                                      </p:cBhvr>
-                                      <p:tavLst>
-                                        <p:tav tm="0">
-                                          <p:val>
-                                            <p:strVal val="#ppt_x"/>
-                                          </p:val>
-                                        </p:tav>
-                                        <p:tav tm="100000">
-                                          <p:val>
-                                            <p:strVal val="#ppt_x"/>
-                                          </p:val>
-                                        </p:tav>
-                                      </p:tavLst>
-                                    </p:anim>
-                                    <p:anim calcmode="lin" valueType="num">
-                                      <p:cBhvr additive="base">
-                                        <p:cTn id="42" dur="550" fill="hold"/>
-                                        <p:tgtEl>
-                                          <p:spTgt spid="15"/>
-                                        </p:tgtEl>
-                                        <p:attrNameLst>
-                                          <p:attrName>ppt_y</p:attrName>
-                                        </p:attrNameLst>
-                                      </p:cBhvr>
-                                      <p:tavLst>
-                                        <p:tav tm="0">
-                                          <p:val>
-                                            <p:strVal val="#ppt_y+.08"/>
-                                          </p:val>
-                                        </p:tav>
-                                        <p:tav tm="100000">
-                                          <p:val>
-                                            <p:strVal val="#ppt_y"/>
-                                          </p:val>
-                                        </p:tav>
-                                      </p:tavLst>
-                                    </p:anim>
-                                  </p:childTnLst>
-                                </p:cTn>
-                              </p:par>
-                            </p:childTnLst>
-                          </p:cTn>
-                        </p:par>
-                        <p:par>
-                          <p:cTn id="43" fill="hold">
-                            <p:stCondLst>
-                              <p:cond delay="440"/>
-                            </p:stCondLst>
-                            <p:childTnLst>
-                              <p:par>
-                                <p:cTn id="44" presetID="53" presetClass="entr" presetSubtype="16" fill="hold" grpId="0" nodeType="afterEffect">
-                                  <p:stCondLst>
-                                    <p:cond delay="0"/>
-                                  </p:stCondLst>
-                                  <p:childTnLst>
-                                    <p:set>
-                                      <p:cBhvr>
-                                        <p:cTn id="45" dur="1" fill="hold">
-                                          <p:stCondLst>
-                                            <p:cond delay="0"/>
-                                          </p:stCondLst>
-                                        </p:cTn>
-                                        <p:tgtEl>
-                                          <p:spTgt spid="16"/>
-                                        </p:tgtEl>
-                                        <p:attrNameLst>
-                                          <p:attrName>style.visibility</p:attrName>
-                                        </p:attrNameLst>
-                                      </p:cBhvr>
-                                      <p:to>
-                                        <p:strVal val="visible"/>
-                                      </p:to>
-                                    </p:set>
-                                    <p:animEffect transition="in" filter="fade">
-                                      <p:cBhvr>
-                                        <p:cTn id="46" dur="550"/>
-                                        <p:tgtEl>
-                                          <p:spTgt spid="16"/>
-                                        </p:tgtEl>
-                                      </p:cBhvr>
-                                    </p:animEffect>
-                                    <p:anim calcmode="lin" valueType="num">
-                                      <p:cBhvr additive="base">
-                                        <p:cTn id="47" dur="550" fill="hold"/>
-                                        <p:tgtEl>
-                                          <p:spTgt spid="16"/>
-                                        </p:tgtEl>
-                                        <p:attrNameLst>
-                                          <p:attrName>ppt_w</p:attrName>
-                                        </p:attrNameLst>
-                                      </p:cBhvr>
-                                      <p:tavLst>
-                                        <p:tav tm="0">
-                                          <p:val>
-                                            <p:strVal val="0"/>
-                                          </p:val>
-                                        </p:tav>
-                                        <p:tav tm="100000">
-                                          <p:val>
-                                            <p:strVal val="#ppt_w"/>
-                                          </p:val>
-                                        </p:tav>
-                                      </p:tavLst>
-                                    </p:anim>
-                                    <p:anim calcmode="lin" valueType="num">
-                                      <p:cBhvr additive="base">
-                                        <p:cTn id="48" dur="550" fill="hold"/>
-                                        <p:tgtEl>
-                                          <p:spTgt spid="16"/>
-                                        </p:tgtEl>
-                                        <p:attrNameLst>
-                                          <p:attrName>ppt_h</p:attrName>
-                                        </p:attrNameLst>
-                                      </p:cBhvr>
-                                      <p:tavLst>
-                                        <p:tav tm="0">
-                                          <p:val>
-                                            <p:strVal val="0"/>
-                                          </p:val>
-                                        </p:tav>
-                                        <p:tav tm="100000">
-                                          <p:val>
-                                            <p:strVal val="#ppt_h"/>
-                                          </p:val>
-                                        </p:tav>
-                                      </p:tavLst>
-                                    </p:anim>
-                                  </p:childTnLst>
-                                </p:cTn>
-                              </p:par>
-                            </p:childTnLst>
-                          </p:cTn>
-                        </p:par>
-                        <p:par>
-                          <p:cTn id="49" fill="hold">
-                            <p:stCondLst>
-                              <p:cond delay="440"/>
-                            </p:stCondLst>
-                            <p:childTnLst>
-                              <p:par>
-                                <p:cTn id="50" presetID="42" presetClass="entr" presetSubtype="0" fill="hold" grpId="0" nodeType="afterEffect">
-                                  <p:stCondLst>
-                                    <p:cond delay="0"/>
-                                  </p:stCondLst>
-                                  <p:childTnLst>
-                                    <p:set>
-                                      <p:cBhvr>
-                                        <p:cTn id="51" dur="1" fill="hold">
-                                          <p:stCondLst>
-                                            <p:cond delay="0"/>
-                                          </p:stCondLst>
-                                        </p:cTn>
-                                        <p:tgtEl>
-                                          <p:spTgt spid="17"/>
-                                        </p:tgtEl>
-                                        <p:attrNameLst>
-                                          <p:attrName>style.visibility</p:attrName>
-                                        </p:attrNameLst>
-                                      </p:cBhvr>
-                                      <p:to>
-                                        <p:strVal val="visible"/>
-                                      </p:to>
-                                    </p:set>
-                                    <p:animEffect transition="in" filter="fade">
-                                      <p:cBhvr>
-                                        <p:cTn id="52" dur="550"/>
-                                        <p:tgtEl>
-                                          <p:spTgt spid="17"/>
-                                        </p:tgtEl>
-                                      </p:cBhvr>
-                                    </p:animEffect>
-                                    <p:anim calcmode="lin" valueType="num">
-                                      <p:cBhvr additive="base">
-                                        <p:cTn id="53" dur="550" fill="hold"/>
-                                        <p:tgtEl>
-                                          <p:spTgt spid="17"/>
-                                        </p:tgtEl>
-                                        <p:attrNameLst>
-                                          <p:attrName>ppt_x</p:attrName>
-                                        </p:attrNameLst>
-                                      </p:cBhvr>
-                                      <p:tavLst>
-                                        <p:tav tm="0">
-                                          <p:val>
-                                            <p:strVal val="#ppt_x"/>
-                                          </p:val>
-                                        </p:tav>
-                                        <p:tav tm="100000">
-                                          <p:val>
-                                            <p:strVal val="#ppt_x"/>
-                                          </p:val>
-                                        </p:tav>
-                                      </p:tavLst>
-                                    </p:anim>
-                                    <p:anim calcmode="lin" valueType="num">
-                                      <p:cBhvr additive="base">
-                                        <p:cTn id="54" dur="550" fill="hold"/>
-                                        <p:tgtEl>
-                                          <p:spTgt spid="17"/>
-                                        </p:tgtEl>
-                                        <p:attrNameLst>
-                                          <p:attrName>ppt_y</p:attrName>
-                                        </p:attrNameLst>
-                                      </p:cBhvr>
-                                      <p:tavLst>
-                                        <p:tav tm="0">
-                                          <p:val>
-                                            <p:strVal val="#ppt_y+.08"/>
-                                          </p:val>
-                                        </p:tav>
-                                        <p:tav tm="100000">
-                                          <p:val>
-                                            <p:strVal val="#ppt_y"/>
-                                          </p:val>
-                                        </p:tav>
-                                      </p:tavLst>
-                                    </p:anim>
-                                  </p:childTnLst>
-                                </p:cTn>
-                              </p:par>
-                            </p:childTnLst>
-                          </p:cTn>
-                        </p:par>
-                        <p:par>
-                          <p:cTn id="55" fill="hold">
-                            <p:stCondLst>
-                              <p:cond delay="660"/>
-                            </p:stCondLst>
-                            <p:childTnLst>
-                              <p:par>
-                                <p:cTn id="56" presetID="42" presetClass="entr" presetSubtype="0" fill="hold" grpId="0" nodeType="afterEffect">
-                                  <p:stCondLst>
-                                    <p:cond delay="0"/>
-                                  </p:stCondLst>
-                                  <p:childTnLst>
-                                    <p:set>
-                                      <p:cBhvr>
-                                        <p:cTn id="57" dur="1" fill="hold">
-                                          <p:stCondLst>
-                                            <p:cond delay="0"/>
-                                          </p:stCondLst>
-                                        </p:cTn>
-                                        <p:tgtEl>
-                                          <p:spTgt spid="18"/>
-                                        </p:tgtEl>
-                                        <p:attrNameLst>
-                                          <p:attrName>style.visibility</p:attrName>
-                                        </p:attrNameLst>
-                                      </p:cBhvr>
-                                      <p:to>
-                                        <p:strVal val="visible"/>
-                                      </p:to>
-                                    </p:set>
-                                    <p:animEffect transition="in" filter="fade">
-                                      <p:cBhvr>
-                                        <p:cTn id="58" dur="550"/>
-                                        <p:tgtEl>
-                                          <p:spTgt spid="18"/>
-                                        </p:tgtEl>
-                                      </p:cBhvr>
-                                    </p:animEffect>
-                                    <p:anim calcmode="lin" valueType="num">
-                                      <p:cBhvr additive="base">
-                                        <p:cTn id="59" dur="550" fill="hold"/>
-                                        <p:tgtEl>
-                                          <p:spTgt spid="18"/>
-                                        </p:tgtEl>
-                                        <p:attrNameLst>
-                                          <p:attrName>ppt_x</p:attrName>
-                                        </p:attrNameLst>
-                                      </p:cBhvr>
-                                      <p:tavLst>
-                                        <p:tav tm="0">
-                                          <p:val>
-                                            <p:strVal val="#ppt_x"/>
-                                          </p:val>
-                                        </p:tav>
-                                        <p:tav tm="100000">
-                                          <p:val>
-                                            <p:strVal val="#ppt_x"/>
-                                          </p:val>
-                                        </p:tav>
-                                      </p:tavLst>
-                                    </p:anim>
-                                    <p:anim calcmode="lin" valueType="num">
-                                      <p:cBhvr additive="base">
-                                        <p:cTn id="60" dur="550" fill="hold"/>
-                                        <p:tgtEl>
-                                          <p:spTgt spid="18"/>
-                                        </p:tgtEl>
-                                        <p:attrNameLst>
-                                          <p:attrName>ppt_y</p:attrName>
-                                        </p:attrNameLst>
-                                      </p:cBhvr>
-                                      <p:tavLst>
-                                        <p:tav tm="0">
-                                          <p:val>
-                                            <p:strVal val="#ppt_y+.08"/>
-                                          </p:val>
-                                        </p:tav>
-                                        <p:tav tm="100000">
-                                          <p:val>
-                                            <p:strVal val="#ppt_y"/>
-                                          </p:val>
-                                        </p:tav>
-                                      </p:tavLst>
-                                    </p:anim>
-                                  </p:childTnLst>
-                                </p:cTn>
-                              </p:par>
-                            </p:childTnLst>
-                          </p:cTn>
-                        </p:par>
-                        <p:par>
-                          <p:cTn id="61" fill="hold">
-                            <p:stCondLst>
-                              <p:cond delay="660"/>
-                            </p:stCondLst>
-                            <p:childTnLst>
-                              <p:par>
-                                <p:cTn id="62" presetID="42" presetClass="entr" presetSubtype="0" fill="hold" grpId="0" nodeType="afterEffect">
-                                  <p:stCondLst>
-                                    <p:cond delay="0"/>
-                                  </p:stCondLst>
-                                  <p:childTnLst>
-                                    <p:set>
-                                      <p:cBhvr>
-                                        <p:cTn id="63" dur="1" fill="hold">
-                                          <p:stCondLst>
-                                            <p:cond delay="0"/>
-                                          </p:stCondLst>
-                                        </p:cTn>
-                                        <p:tgtEl>
-                                          <p:spTgt spid="19"/>
-                                        </p:tgtEl>
-                                        <p:attrNameLst>
-                                          <p:attrName>style.visibility</p:attrName>
-                                        </p:attrNameLst>
-                                      </p:cBhvr>
-                                      <p:to>
-                                        <p:strVal val="visible"/>
-                                      </p:to>
-                                    </p:set>
-                                    <p:animEffect transition="in" filter="fade">
-                                      <p:cBhvr>
-                                        <p:cTn id="64" dur="550"/>
-                                        <p:tgtEl>
-                                          <p:spTgt spid="19"/>
-                                        </p:tgtEl>
-                                      </p:cBhvr>
-                                    </p:animEffect>
-                                    <p:anim calcmode="lin" valueType="num">
-                                      <p:cBhvr additive="base">
-                                        <p:cTn id="65" dur="550" fill="hold"/>
-                                        <p:tgtEl>
-                                          <p:spTgt spid="19"/>
-                                        </p:tgtEl>
-                                        <p:attrNameLst>
-                                          <p:attrName>ppt_x</p:attrName>
-                                        </p:attrNameLst>
-                                      </p:cBhvr>
-                                      <p:tavLst>
-                                        <p:tav tm="0">
-                                          <p:val>
-                                            <p:strVal val="#ppt_x"/>
-                                          </p:val>
-                                        </p:tav>
-                                        <p:tav tm="100000">
-                                          <p:val>
-                                            <p:strVal val="#ppt_x"/>
-                                          </p:val>
-                                        </p:tav>
-                                      </p:tavLst>
-                                    </p:anim>
-                                    <p:anim calcmode="lin" valueType="num">
-                                      <p:cBhvr additive="base">
-                                        <p:cTn id="66" dur="550" fill="hold"/>
-                                        <p:tgtEl>
-                                          <p:spTgt spid="19"/>
-                                        </p:tgtEl>
-                                        <p:attrNameLst>
-                                          <p:attrName>ppt_y</p:attrName>
-                                        </p:attrNameLst>
-                                      </p:cBhvr>
-                                      <p:tavLst>
-                                        <p:tav tm="0">
-                                          <p:val>
-                                            <p:strVal val="#ppt_y+.08"/>
-                                          </p:val>
-                                        </p:tav>
-                                        <p:tav tm="100000">
-                                          <p:val>
-                                            <p:strVal val="#ppt_y"/>
-                                          </p:val>
-                                        </p:tav>
-                                      </p:tavLst>
-                                    </p:anim>
-                                  </p:childTnLst>
-                                </p:cTn>
-                              </p:par>
-                            </p:childTnLst>
-                          </p:cTn>
-                        </p:par>
-                        <p:par>
-                          <p:cTn id="67" fill="hold">
-                            <p:stCondLst>
-                              <p:cond delay="660"/>
-                            </p:stCondLst>
-                            <p:childTnLst>
-                              <p:par>
-                                <p:cTn id="68" presetID="53" presetClass="entr" presetSubtype="16" fill="hold" grpId="0" nodeType="afterEffect">
-                                  <p:stCondLst>
-                                    <p:cond delay="0"/>
-                                  </p:stCondLst>
-                                  <p:childTnLst>
-                                    <p:set>
-                                      <p:cBhvr>
-                                        <p:cTn id="69" dur="1" fill="hold">
-                                          <p:stCondLst>
-                                            <p:cond delay="0"/>
-                                          </p:stCondLst>
-                                        </p:cTn>
-                                        <p:tgtEl>
-                                          <p:spTgt spid="20"/>
-                                        </p:tgtEl>
-                                        <p:attrNameLst>
-                                          <p:attrName>style.visibility</p:attrName>
-                                        </p:attrNameLst>
-                                      </p:cBhvr>
-                                      <p:to>
-                                        <p:strVal val="visible"/>
-                                      </p:to>
-                                    </p:set>
-                                    <p:animEffect transition="in" filter="fade">
-                                      <p:cBhvr>
-                                        <p:cTn id="70" dur="550"/>
-                                        <p:tgtEl>
-                                          <p:spTgt spid="20"/>
-                                        </p:tgtEl>
-                                      </p:cBhvr>
-                                    </p:animEffect>
-                                    <p:anim calcmode="lin" valueType="num">
-                                      <p:cBhvr additive="base">
-                                        <p:cTn id="71" dur="550" fill="hold"/>
-                                        <p:tgtEl>
-                                          <p:spTgt spid="20"/>
-                                        </p:tgtEl>
-                                        <p:attrNameLst>
-                                          <p:attrName>ppt_w</p:attrName>
-                                        </p:attrNameLst>
-                                      </p:cBhvr>
-                                      <p:tavLst>
-                                        <p:tav tm="0">
-                                          <p:val>
-                                            <p:strVal val="0"/>
-                                          </p:val>
-                                        </p:tav>
-                                        <p:tav tm="100000">
-                                          <p:val>
-                                            <p:strVal val="#ppt_w"/>
-                                          </p:val>
-                                        </p:tav>
-                                      </p:tavLst>
-                                    </p:anim>
-                                    <p:anim calcmode="lin" valueType="num">
-                                      <p:cBhvr additive="base">
-                                        <p:cTn id="72" dur="550" fill="hold"/>
-                                        <p:tgtEl>
-                                          <p:spTgt spid="20"/>
-                                        </p:tgtEl>
-                                        <p:attrNameLst>
-                                          <p:attrName>ppt_h</p:attrName>
-                                        </p:attrNameLst>
-                                      </p:cBhvr>
-                                      <p:tavLst>
-                                        <p:tav tm="0">
-                                          <p:val>
-                                            <p:strVal val="0"/>
-                                          </p:val>
-                                        </p:tav>
-                                        <p:tav tm="100000">
-                                          <p:val>
-                                            <p:strVal val="#ppt_h"/>
-                                          </p:val>
-                                        </p:tav>
-                                      </p:tavLst>
-                                    </p:anim>
-                                  </p:childTnLst>
-                                </p:cTn>
-                              </p:par>
-                            </p:childTnLst>
-                          </p:cTn>
-                        </p:par>
-                        <p:par>
-                          <p:cTn id="73" fill="hold">
-                            <p:stCondLst>
-                              <p:cond delay="660"/>
-                            </p:stCondLst>
-                            <p:childTnLst>
-                              <p:par>
-                                <p:cTn id="74" presetID="42" presetClass="entr" presetSubtype="0" fill="hold" grpId="0" nodeType="afterEffect">
-                                  <p:stCondLst>
-                                    <p:cond delay="0"/>
-                                  </p:stCondLst>
-                                  <p:childTnLst>
-                                    <p:set>
-                                      <p:cBhvr>
-                                        <p:cTn id="75" dur="1" fill="hold">
-                                          <p:stCondLst>
-                                            <p:cond delay="0"/>
-                                          </p:stCondLst>
-                                        </p:cTn>
-                                        <p:tgtEl>
-                                          <p:spTgt spid="21"/>
-                                        </p:tgtEl>
-                                        <p:attrNameLst>
-                                          <p:attrName>style.visibility</p:attrName>
-                                        </p:attrNameLst>
-                                      </p:cBhvr>
-                                      <p:to>
-                                        <p:strVal val="visible"/>
-                                      </p:to>
-                                    </p:set>
-                                    <p:animEffect transition="in" filter="fade">
-                                      <p:cBhvr>
-                                        <p:cTn id="76" dur="550"/>
-                                        <p:tgtEl>
-                                          <p:spTgt spid="21"/>
-                                        </p:tgtEl>
-                                      </p:cBhvr>
-                                    </p:animEffect>
-                                    <p:anim calcmode="lin" valueType="num">
-                                      <p:cBhvr additive="base">
-                                        <p:cTn id="77" dur="550" fill="hold"/>
-                                        <p:tgtEl>
-                                          <p:spTgt spid="21"/>
-                                        </p:tgtEl>
-                                        <p:attrNameLst>
-                                          <p:attrName>ppt_x</p:attrName>
-                                        </p:attrNameLst>
-                                      </p:cBhvr>
-                                      <p:tavLst>
-                                        <p:tav tm="0">
-                                          <p:val>
-                                            <p:strVal val="#ppt_x"/>
-                                          </p:val>
-                                        </p:tav>
-                                        <p:tav tm="100000">
-                                          <p:val>
-                                            <p:strVal val="#ppt_x"/>
-                                          </p:val>
-                                        </p:tav>
-                                      </p:tavLst>
-                                    </p:anim>
-                                    <p:anim calcmode="lin" valueType="num">
-                                      <p:cBhvr additive="base">
-                                        <p:cTn id="78" dur="550" fill="hold"/>
-                                        <p:tgtEl>
-                                          <p:spTgt spid="21"/>
-                                        </p:tgtEl>
-                                        <p:attrNameLst>
-                                          <p:attrName>ppt_y</p:attrName>
-                                        </p:attrNameLst>
-                                      </p:cBhvr>
-                                      <p:tavLst>
-                                        <p:tav tm="0">
-                                          <p:val>
-                                            <p:strVal val="#ppt_y+.08"/>
-                                          </p:val>
-                                        </p:tav>
-                                        <p:tav tm="100000">
-                                          <p:val>
-                                            <p:strVal val="#ppt_y"/>
-                                          </p:val>
-                                        </p:tav>
-                                      </p:tavLst>
-                                    </p:anim>
-                                  </p:childTnLst>
-                                </p:cTn>
-                              </p:par>
-                            </p:childTnLst>
-                          </p:cTn>
-                        </p:par>
-                      </p:childTnLst>
-                    </p:cTn>
-                  </p:par>
-                </p:childTnLst>
-              </p:cTn>
-              <p:prevCondLst>
-                <p:cond evt="onPrev" delay="0">
-                  <p:tgtEl>
-                    <p:sldTgt/>
-                  </p:tgtEl>
-                </p:cond>
-              </p:prevCondLst>
-              <p:nextCondLst>
-                <p:cond evt="onNext" delay="0">
-                  <p:tgtEl>
-                    <p:sldTgt/>
-                  </p:tgtEl>
-                </p:cond>
-              </p:nextCondLst>
-            </p:seq>
-          </p:childTnLst>
-        </p:cTn>
-      </p:par>
-    </p:tnLst>
-    <p:bldLst>
-      <p:bldP spid="6" grpId="0" animBg="1"/>
-      <p:bldP spid="10" grpId="0" animBg="1"/>
-      <p:bldP spid="11" grpId="0" animBg="1"/>
-      <p:bldP spid="12" grpId="0" animBg="1"/>
-      <p:bldP spid="13" grpId="0" animBg="1"/>
-      <p:bldP spid="14" grpId="0" animBg="1"/>
-      <p:bldP spid="15" grpId="0" animBg="1"/>
-      <p:bldP spid="16" grpId="0" animBg="1"/>
-      <p:bldP spid="17" grpId="0" animBg="1"/>
-      <p:bldP spid="18" grpId="0" animBg="1"/>
-      <p:bldP spid="19" grpId="0" animBg="1"/>
-      <p:bldP spid="20" grpId="0" animBg="1"/>
-      <p:bldP spid="21" grpId="0" animBg="1"/>
     </p:bldLst>
   </p:timing>
 </p:sld>
